--- a/doc/최종발표/최종발표.pptx
+++ b/doc/최종발표/최종발표.pptx
@@ -5,7 +5,7 @@
     <p:sldMasterId id="2147483648" r:id="rId1"/>
   </p:sldMasterIdLst>
   <p:notesMasterIdLst>
-    <p:notesMasterId r:id="rId13"/>
+    <p:notesMasterId r:id="rId14"/>
   </p:notesMasterIdLst>
   <p:sldIdLst>
     <p:sldId id="256" r:id="rId2"/>
@@ -14,11 +14,12 @@
     <p:sldId id="259" r:id="rId5"/>
     <p:sldId id="260" r:id="rId6"/>
     <p:sldId id="261" r:id="rId7"/>
-    <p:sldId id="262" r:id="rId8"/>
-    <p:sldId id="263" r:id="rId9"/>
-    <p:sldId id="264" r:id="rId10"/>
-    <p:sldId id="265" r:id="rId11"/>
-    <p:sldId id="267" r:id="rId12"/>
+    <p:sldId id="268" r:id="rId8"/>
+    <p:sldId id="262" r:id="rId9"/>
+    <p:sldId id="263" r:id="rId10"/>
+    <p:sldId id="264" r:id="rId11"/>
+    <p:sldId id="265" r:id="rId12"/>
+    <p:sldId id="267" r:id="rId13"/>
   </p:sldIdLst>
   <p:sldSz cx="9144000" cy="5143500" type="screen16x9"/>
   <p:notesSz cx="5143500" cy="9144000"/>
@@ -718,6 +719,90 @@
 </p:notes>
 </file>
 
+<file path=ppt/notesSlides/notesSlide11.xml><?xml version="1.0" encoding="utf-8"?>
+<p:notes xmlns:a="http://schemas.openxmlformats.org/drawingml/2006/main" xmlns:r="http://schemas.openxmlformats.org/officeDocument/2006/relationships" xmlns:p="http://schemas.openxmlformats.org/presentationml/2006/main">
+  <p:cSld>
+    <p:spTree>
+      <p:nvGrpSpPr>
+        <p:cNvPr id="1" name=""/>
+        <p:cNvGrpSpPr/>
+        <p:nvPr/>
+      </p:nvGrpSpPr>
+      <p:grpSpPr>
+        <a:xfrm>
+          <a:off x="0" y="0"/>
+          <a:ext cx="0" cy="0"/>
+          <a:chOff x="0" y="0"/>
+          <a:chExt cx="0" cy="0"/>
+        </a:xfrm>
+      </p:grpSpPr>
+      <p:sp>
+        <p:nvSpPr>
+          <p:cNvPr id="2" name="Slide Image Placeholder 1"/>
+          <p:cNvSpPr>
+            <a:spLocks noGrp="1" noRot="1" noChangeAspect="1"/>
+          </p:cNvSpPr>
+          <p:nvPr>
+            <p:ph type="sldImg"/>
+          </p:nvPr>
+        </p:nvSpPr>
+        <p:spPr/>
+      </p:sp>
+      <p:sp>
+        <p:nvSpPr>
+          <p:cNvPr id="3" name="Notes Placeholder 2"/>
+          <p:cNvSpPr>
+            <a:spLocks noGrp="1"/>
+          </p:cNvSpPr>
+          <p:nvPr>
+            <p:ph type="body" idx="1"/>
+          </p:nvPr>
+        </p:nvSpPr>
+        <p:spPr/>
+        <p:txBody>
+          <a:bodyPr/>
+          <a:lstStyle/>
+          <a:p>
+            <a:endParaRPr lang="en-US" dirty="0"/>
+          </a:p>
+        </p:txBody>
+      </p:sp>
+      <p:sp>
+        <p:nvSpPr>
+          <p:cNvPr id="4" name="Slide Number Placeholder 3"/>
+          <p:cNvSpPr>
+            <a:spLocks noGrp="1"/>
+          </p:cNvSpPr>
+          <p:nvPr>
+            <p:ph type="sldNum" sz="quarter" idx="10"/>
+          </p:nvPr>
+        </p:nvSpPr>
+        <p:spPr/>
+        <p:txBody>
+          <a:bodyPr/>
+          <a:lstStyle/>
+          <a:p>
+            <a:fld id="{F7021451-1387-4CA6-816F-3879F97B5CBC}" type="slidenum">
+              <a:rPr lang="en-US"/>
+              <a:t>11</a:t>
+            </a:fld>
+            <a:endParaRPr lang="en-US"/>
+          </a:p>
+        </p:txBody>
+      </p:sp>
+    </p:spTree>
+    <p:extLst>
+      <p:ext uri="{BB962C8B-B14F-4D97-AF65-F5344CB8AC3E}">
+        <p14:creationId xmlns:p14="http://schemas.microsoft.com/office/powerpoint/2010/main" val="1024086991"/>
+      </p:ext>
+    </p:extLst>
+  </p:cSld>
+  <p:clrMapOvr>
+    <a:masterClrMapping/>
+  </p:clrMapOvr>
+</p:notes>
+</file>
+
 <file path=ppt/notesSlides/notesSlide2.xml><?xml version="1.0" encoding="utf-8"?>
 <p:notes xmlns:a="http://schemas.openxmlformats.org/drawingml/2006/main" xmlns:r="http://schemas.openxmlformats.org/officeDocument/2006/relationships" xmlns:p="http://schemas.openxmlformats.org/presentationml/2006/main">
   <p:cSld>
@@ -1212,7 +1297,7 @@
     </p:spTree>
     <p:extLst>
       <p:ext uri="{BB962C8B-B14F-4D97-AF65-F5344CB8AC3E}">
-        <p14:creationId xmlns:p14="http://schemas.microsoft.com/office/powerpoint/2010/main" val="1024086991"/>
+        <p14:creationId xmlns:p14="http://schemas.microsoft.com/office/powerpoint/2010/main" val="3231798057"/>
       </p:ext>
     </p:extLst>
   </p:cSld>
@@ -1455,7 +1540,7 @@
             <a:fld id="{1D8BD707-D9CF-40AE-B4C6-C98DA3205C09}" type="datetimeFigureOut">
               <a:rPr lang="en-US" smtClean="0"/>
               <a:pPr/>
-              <a:t>6/7/2026</a:t>
+              <a:t>6/9/2026</a:t>
             </a:fld>
             <a:endParaRPr lang="en-US"/>
           </a:p>
@@ -2103,7 +2188,7 @@
             <a:blip r:embed="rId3">
               <a:extLst>
                 <a:ext uri="{96DAC541-7B7A-43D3-8B79-37D633B846F1}">
-                  <asvg:svgBlip xmlns:asvg="http://schemas.microsoft.com/office/drawing/2016/SVG/main" xmlns="" r:embed="rId4"/>
+                  <asvg:svgBlip xmlns="" xmlns:asvg="http://schemas.microsoft.com/office/drawing/2016/SVG/main" r:embed="rId4"/>
                 </a:ext>
               </a:extLst>
             </a:blip>
@@ -2155,7 +2240,7 @@
             <a:blip r:embed="rId3">
               <a:extLst>
                 <a:ext uri="{96DAC541-7B7A-43D3-8B79-37D633B846F1}">
-                  <asvg:svgBlip xmlns:asvg="http://schemas.microsoft.com/office/drawing/2016/SVG/main" xmlns="" r:embed="rId4"/>
+                  <asvg:svgBlip xmlns="" xmlns:asvg="http://schemas.microsoft.com/office/drawing/2016/SVG/main" r:embed="rId4"/>
                 </a:ext>
               </a:extLst>
             </a:blip>
@@ -2181,6 +2266,1217 @@
 </file>
 
 <file path=ppt/slides/slide10.xml><?xml version="1.0" encoding="utf-8"?>
+<p:sld xmlns:a="http://schemas.openxmlformats.org/drawingml/2006/main" xmlns:r="http://schemas.openxmlformats.org/officeDocument/2006/relationships" xmlns:p="http://schemas.openxmlformats.org/presentationml/2006/main">
+  <p:cSld name="Slide 9">
+    <p:bg>
+      <p:bgPr>
+        <a:solidFill>
+          <a:srgbClr val="EBEBEB"/>
+        </a:solidFill>
+        <a:effectLst/>
+      </p:bgPr>
+    </p:bg>
+    <p:spTree>
+      <p:nvGrpSpPr>
+        <p:cNvPr id="1" name=""/>
+        <p:cNvGrpSpPr/>
+        <p:nvPr/>
+      </p:nvGrpSpPr>
+      <p:grpSpPr>
+        <a:xfrm>
+          <a:off x="0" y="0"/>
+          <a:ext cx="0" cy="0"/>
+          <a:chOff x="0" y="0"/>
+          <a:chExt cx="0" cy="0"/>
+        </a:xfrm>
+      </p:grpSpPr>
+      <p:sp>
+        <p:nvSpPr>
+          <p:cNvPr id="39" name="Freeform 5"/>
+          <p:cNvSpPr/>
+          <p:nvPr/>
+        </p:nvSpPr>
+        <p:spPr>
+          <a:xfrm>
+            <a:off x="6573831" y="-2109472"/>
+            <a:ext cx="4394884" cy="4567091"/>
+          </a:xfrm>
+          <a:custGeom>
+            <a:avLst/>
+            <a:gdLst/>
+            <a:ahLst/>
+            <a:cxnLst/>
+            <a:rect l="l" t="t" r="r" b="b"/>
+            <a:pathLst>
+              <a:path w="7616557" h="7815497">
+                <a:moveTo>
+                  <a:pt x="0" y="0"/>
+                </a:moveTo>
+                <a:lnTo>
+                  <a:pt x="7616556" y="0"/>
+                </a:lnTo>
+                <a:lnTo>
+                  <a:pt x="7616556" y="7815497"/>
+                </a:lnTo>
+                <a:lnTo>
+                  <a:pt x="0" y="7815497"/>
+                </a:lnTo>
+                <a:lnTo>
+                  <a:pt x="0" y="0"/>
+                </a:lnTo>
+                <a:close/>
+              </a:path>
+            </a:pathLst>
+          </a:custGeom>
+          <a:blipFill>
+            <a:blip r:embed="rId3">
+              <a:extLst>
+                <a:ext uri="{96DAC541-7B7A-43D3-8B79-37D633B846F1}">
+                  <asvg:svgBlip xmlns="" xmlns:asvg="http://schemas.microsoft.com/office/drawing/2016/SVG/main" r:embed="rId8"/>
+                </a:ext>
+              </a:extLst>
+            </a:blip>
+            <a:stretch>
+              <a:fillRect/>
+            </a:stretch>
+          </a:blipFill>
+        </p:spPr>
+      </p:sp>
+      <p:sp>
+        <p:nvSpPr>
+          <p:cNvPr id="38" name="Freeform 5"/>
+          <p:cNvSpPr/>
+          <p:nvPr/>
+        </p:nvSpPr>
+        <p:spPr>
+          <a:xfrm>
+            <a:off x="-1751437" y="2561631"/>
+            <a:ext cx="4422678" cy="4733969"/>
+          </a:xfrm>
+          <a:custGeom>
+            <a:avLst/>
+            <a:gdLst/>
+            <a:ahLst/>
+            <a:cxnLst/>
+            <a:rect l="l" t="t" r="r" b="b"/>
+            <a:pathLst>
+              <a:path w="7616557" h="7815497">
+                <a:moveTo>
+                  <a:pt x="0" y="0"/>
+                </a:moveTo>
+                <a:lnTo>
+                  <a:pt x="7616556" y="0"/>
+                </a:lnTo>
+                <a:lnTo>
+                  <a:pt x="7616556" y="7815497"/>
+                </a:lnTo>
+                <a:lnTo>
+                  <a:pt x="0" y="7815497"/>
+                </a:lnTo>
+                <a:lnTo>
+                  <a:pt x="0" y="0"/>
+                </a:lnTo>
+                <a:close/>
+              </a:path>
+            </a:pathLst>
+          </a:custGeom>
+          <a:blipFill>
+            <a:blip r:embed="rId3">
+              <a:extLst>
+                <a:ext uri="{96DAC541-7B7A-43D3-8B79-37D633B846F1}">
+                  <asvg:svgBlip xmlns="" xmlns:asvg="http://schemas.microsoft.com/office/drawing/2016/SVG/main" r:embed="rId8"/>
+                </a:ext>
+              </a:extLst>
+            </a:blip>
+            <a:stretch>
+              <a:fillRect/>
+            </a:stretch>
+          </a:blipFill>
+        </p:spPr>
+      </p:sp>
+      <p:sp>
+        <p:nvSpPr>
+          <p:cNvPr id="6" name="Text 2"/>
+          <p:cNvSpPr/>
+          <p:nvPr/>
+        </p:nvSpPr>
+        <p:spPr>
+          <a:xfrm>
+            <a:off x="320040" y="262890"/>
+            <a:ext cx="8229600" cy="493776"/>
+          </a:xfrm>
+          <a:prstGeom prst="rect">
+            <a:avLst/>
+          </a:prstGeom>
+          <a:noFill/>
+          <a:ln/>
+        </p:spPr>
+        <p:txBody>
+          <a:bodyPr wrap="square" lIns="0" tIns="0" rIns="0" bIns="0" rtlCol="0" anchor="ctr"/>
+          <a:lstStyle/>
+          <a:p>
+            <a:pPr marL="0" indent="0">
+              <a:buNone/>
+            </a:pPr>
+            <a:r>
+              <a:rPr lang="en-US" sz="2600" b="1" dirty="0">
+                <a:solidFill>
+                  <a:srgbClr val="1A1A1A"/>
+                </a:solidFill>
+                <a:latin typeface="Arial Black" pitchFamily="34" charset="0"/>
+                <a:ea typeface="Arial Black" pitchFamily="34" charset="-122"/>
+                <a:cs typeface="Arial Black" pitchFamily="34" charset="-120"/>
+              </a:rPr>
+              <a:t>지표별 상세 분석</a:t>
+            </a:r>
+            <a:endParaRPr lang="en-US" sz="2600" dirty="0"/>
+          </a:p>
+        </p:txBody>
+      </p:sp>
+      <p:graphicFrame>
+        <p:nvGraphicFramePr>
+          <p:cNvPr id="7" name="Chart 0"/>
+          <p:cNvGraphicFramePr/>
+          <p:nvPr>
+            <p:extLst>
+              <p:ext uri="{D42A27DB-BD31-4B8C-83A1-F6EECF244321}">
+                <p14:modId xmlns:p14="http://schemas.microsoft.com/office/powerpoint/2010/main" val="4262387644"/>
+              </p:ext>
+            </p:extLst>
+          </p:nvPr>
+        </p:nvGraphicFramePr>
+        <p:xfrm>
+          <a:off x="320040" y="987552"/>
+          <a:ext cx="4754880" cy="3840480"/>
+        </p:xfrm>
+        <a:graphic>
+          <a:graphicData uri="http://schemas.openxmlformats.org/drawingml/2006/chart">
+            <c:chart xmlns:c="http://schemas.openxmlformats.org/drawingml/2006/chart" xmlns:r="http://schemas.openxmlformats.org/officeDocument/2006/relationships" r:id="rId9"/>
+          </a:graphicData>
+        </a:graphic>
+      </p:graphicFrame>
+      <p:sp>
+        <p:nvSpPr>
+          <p:cNvPr id="8" name="Shape 3"/>
+          <p:cNvSpPr/>
+          <p:nvPr/>
+        </p:nvSpPr>
+        <p:spPr>
+          <a:xfrm>
+            <a:off x="5212080" y="987552"/>
+            <a:ext cx="3657600" cy="877824"/>
+          </a:xfrm>
+          <a:prstGeom prst="rect">
+            <a:avLst/>
+          </a:prstGeom>
+          <a:solidFill>
+            <a:srgbClr val="FFFFFF"/>
+          </a:solidFill>
+          <a:ln w="12700">
+            <a:solidFill>
+              <a:srgbClr val="E2E8F0"/>
+            </a:solidFill>
+            <a:prstDash val="solid"/>
+          </a:ln>
+        </p:spPr>
+      </p:sp>
+      <p:sp>
+        <p:nvSpPr>
+          <p:cNvPr id="9" name="Shape 4"/>
+          <p:cNvSpPr/>
+          <p:nvPr/>
+        </p:nvSpPr>
+        <p:spPr>
+          <a:xfrm>
+            <a:off x="5212080" y="987552"/>
+            <a:ext cx="54864" cy="877824"/>
+          </a:xfrm>
+          <a:prstGeom prst="rect">
+            <a:avLst/>
+          </a:prstGeom>
+          <a:solidFill>
+            <a:srgbClr val="059669"/>
+          </a:solidFill>
+          <a:ln/>
+        </p:spPr>
+      </p:sp>
+      <p:sp>
+        <p:nvSpPr>
+          <p:cNvPr id="10" name="Text 5"/>
+          <p:cNvSpPr/>
+          <p:nvPr/>
+        </p:nvSpPr>
+        <p:spPr>
+          <a:xfrm>
+            <a:off x="5321808" y="1024128"/>
+            <a:ext cx="1188720" cy="457200"/>
+          </a:xfrm>
+          <a:prstGeom prst="rect">
+            <a:avLst/>
+          </a:prstGeom>
+          <a:noFill/>
+          <a:ln/>
+        </p:spPr>
+        <p:txBody>
+          <a:bodyPr wrap="square" lIns="0" tIns="0" rIns="0" bIns="0" rtlCol="0" anchor="ctr"/>
+          <a:lstStyle/>
+          <a:p>
+            <a:pPr marL="0" indent="0">
+              <a:buNone/>
+            </a:pPr>
+            <a:r>
+              <a:rPr lang="en-US" sz="2400" b="1" dirty="0">
+                <a:solidFill>
+                  <a:srgbClr val="059669"/>
+                </a:solidFill>
+                <a:latin typeface="Arial Black" pitchFamily="34" charset="0"/>
+                <a:ea typeface="Arial Black" pitchFamily="34" charset="-122"/>
+                <a:cs typeface="Arial Black" pitchFamily="34" charset="-120"/>
+              </a:rPr>
+              <a:t>0.884</a:t>
+            </a:r>
+            <a:endParaRPr lang="en-US" sz="2400" dirty="0"/>
+          </a:p>
+        </p:txBody>
+      </p:sp>
+      <p:sp>
+        <p:nvSpPr>
+          <p:cNvPr id="11" name="Text 6"/>
+          <p:cNvSpPr/>
+          <p:nvPr/>
+        </p:nvSpPr>
+        <p:spPr>
+          <a:xfrm>
+            <a:off x="6543018" y="1079122"/>
+            <a:ext cx="2103120" cy="237744"/>
+          </a:xfrm>
+          <a:prstGeom prst="rect">
+            <a:avLst/>
+          </a:prstGeom>
+          <a:noFill/>
+          <a:ln/>
+        </p:spPr>
+        <p:txBody>
+          <a:bodyPr wrap="square" lIns="0" tIns="0" rIns="0" bIns="0" rtlCol="0" anchor="ctr"/>
+          <a:lstStyle/>
+          <a:p>
+            <a:pPr marL="0" indent="0" algn="r">
+              <a:buNone/>
+            </a:pPr>
+            <a:r>
+              <a:rPr lang="en-US" sz="1100" b="1" dirty="0">
+                <a:solidFill>
+                  <a:srgbClr val="1A1A1A"/>
+                </a:solidFill>
+              </a:rPr>
+              <a:t>Faithfulness</a:t>
+            </a:r>
+            <a:endParaRPr lang="en-US" sz="1100" dirty="0"/>
+          </a:p>
+        </p:txBody>
+      </p:sp>
+      <p:sp>
+        <p:nvSpPr>
+          <p:cNvPr id="12" name="Shape 7"/>
+          <p:cNvSpPr/>
+          <p:nvPr/>
+        </p:nvSpPr>
+        <p:spPr>
+          <a:xfrm>
+            <a:off x="7917180" y="1565959"/>
+            <a:ext cx="841248" cy="219456"/>
+          </a:xfrm>
+          <a:prstGeom prst="rect">
+            <a:avLst/>
+          </a:prstGeom>
+          <a:solidFill>
+            <a:srgbClr val="DCFCE7"/>
+          </a:solidFill>
+          <a:ln w="12700">
+            <a:solidFill>
+              <a:srgbClr val="DCFCE7"/>
+            </a:solidFill>
+            <a:prstDash val="solid"/>
+          </a:ln>
+        </p:spPr>
+      </p:sp>
+      <p:sp>
+        <p:nvSpPr>
+          <p:cNvPr id="13" name="Text 8"/>
+          <p:cNvSpPr/>
+          <p:nvPr/>
+        </p:nvSpPr>
+        <p:spPr>
+          <a:xfrm>
+            <a:off x="7920196" y="1569201"/>
+            <a:ext cx="841248" cy="219456"/>
+          </a:xfrm>
+          <a:prstGeom prst="rect">
+            <a:avLst/>
+          </a:prstGeom>
+          <a:noFill/>
+          <a:ln/>
+        </p:spPr>
+        <p:txBody>
+          <a:bodyPr wrap="square" lIns="0" tIns="0" rIns="0" bIns="0" rtlCol="0" anchor="ctr"/>
+          <a:lstStyle/>
+          <a:p>
+            <a:pPr marL="0" indent="0" algn="ctr">
+              <a:buNone/>
+            </a:pPr>
+            <a:r>
+              <a:rPr lang="en-US" sz="800" b="1" dirty="0">
+                <a:solidFill>
+                  <a:srgbClr val="15803D"/>
+                </a:solidFill>
+              </a:rPr>
+              <a:t>★ 우수</a:t>
+            </a:r>
+            <a:endParaRPr lang="en-US" sz="800" dirty="0"/>
+          </a:p>
+        </p:txBody>
+      </p:sp>
+      <p:sp>
+        <p:nvSpPr>
+          <p:cNvPr id="14" name="Text 9"/>
+          <p:cNvSpPr/>
+          <p:nvPr/>
+        </p:nvSpPr>
+        <p:spPr>
+          <a:xfrm>
+            <a:off x="5321808" y="1499616"/>
+            <a:ext cx="3438144" cy="320040"/>
+          </a:xfrm>
+          <a:prstGeom prst="rect">
+            <a:avLst/>
+          </a:prstGeom>
+          <a:noFill/>
+          <a:ln/>
+        </p:spPr>
+        <p:txBody>
+          <a:bodyPr wrap="square" lIns="0" tIns="0" rIns="0" bIns="0" rtlCol="0" anchor="ctr"/>
+          <a:lstStyle/>
+          <a:p>
+            <a:pPr marL="0" indent="0">
+              <a:buNone/>
+            </a:pPr>
+            <a:r>
+              <a:rPr lang="en-US" sz="850" dirty="0">
+                <a:solidFill>
+                  <a:srgbClr val="2D2D2D"/>
+                </a:solidFill>
+              </a:rPr>
+              <a:t>Self-RAG Supportiveness 필터가</a:t>
+            </a:r>
+            <a:endParaRPr lang="en-US" sz="850" dirty="0"/>
+          </a:p>
+          <a:p>
+            <a:pPr marL="0" indent="0">
+              <a:buNone/>
+            </a:pPr>
+            <a:r>
+              <a:rPr lang="en-US" sz="850" dirty="0">
+                <a:solidFill>
+                  <a:srgbClr val="2D2D2D"/>
+                </a:solidFill>
+              </a:rPr>
+              <a:t>근거 없는 답변 제어</a:t>
+            </a:r>
+            <a:endParaRPr lang="en-US" sz="850" dirty="0"/>
+          </a:p>
+        </p:txBody>
+      </p:sp>
+      <p:sp>
+        <p:nvSpPr>
+          <p:cNvPr id="15" name="Shape 10"/>
+          <p:cNvSpPr/>
+          <p:nvPr/>
+        </p:nvSpPr>
+        <p:spPr>
+          <a:xfrm>
+            <a:off x="5212080" y="1938528"/>
+            <a:ext cx="3657600" cy="877824"/>
+          </a:xfrm>
+          <a:prstGeom prst="rect">
+            <a:avLst/>
+          </a:prstGeom>
+          <a:solidFill>
+            <a:srgbClr val="FFFFFF"/>
+          </a:solidFill>
+          <a:ln w="12700">
+            <a:solidFill>
+              <a:srgbClr val="E2E8F0"/>
+            </a:solidFill>
+            <a:prstDash val="solid"/>
+          </a:ln>
+        </p:spPr>
+      </p:sp>
+      <p:sp>
+        <p:nvSpPr>
+          <p:cNvPr id="16" name="Shape 11"/>
+          <p:cNvSpPr/>
+          <p:nvPr/>
+        </p:nvSpPr>
+        <p:spPr>
+          <a:xfrm>
+            <a:off x="5212080" y="1938528"/>
+            <a:ext cx="54864" cy="877824"/>
+          </a:xfrm>
+          <a:prstGeom prst="rect">
+            <a:avLst/>
+          </a:prstGeom>
+          <a:solidFill>
+            <a:srgbClr val="059669"/>
+          </a:solidFill>
+          <a:ln/>
+        </p:spPr>
+      </p:sp>
+      <p:sp>
+        <p:nvSpPr>
+          <p:cNvPr id="17" name="Text 12"/>
+          <p:cNvSpPr/>
+          <p:nvPr/>
+        </p:nvSpPr>
+        <p:spPr>
+          <a:xfrm>
+            <a:off x="5321808" y="1975104"/>
+            <a:ext cx="1188720" cy="457200"/>
+          </a:xfrm>
+          <a:prstGeom prst="rect">
+            <a:avLst/>
+          </a:prstGeom>
+          <a:noFill/>
+          <a:ln/>
+        </p:spPr>
+        <p:txBody>
+          <a:bodyPr wrap="square" lIns="0" tIns="0" rIns="0" bIns="0" rtlCol="0" anchor="ctr"/>
+          <a:lstStyle/>
+          <a:p>
+            <a:pPr marL="0" indent="0">
+              <a:buNone/>
+            </a:pPr>
+            <a:r>
+              <a:rPr lang="en-US" sz="2400" b="1" dirty="0">
+                <a:solidFill>
+                  <a:srgbClr val="059669"/>
+                </a:solidFill>
+                <a:latin typeface="Arial Black" pitchFamily="34" charset="0"/>
+                <a:ea typeface="Arial Black" pitchFamily="34" charset="-122"/>
+                <a:cs typeface="Arial Black" pitchFamily="34" charset="-120"/>
+              </a:rPr>
+              <a:t>0.872</a:t>
+            </a:r>
+            <a:endParaRPr lang="en-US" sz="2400" dirty="0"/>
+          </a:p>
+        </p:txBody>
+      </p:sp>
+      <p:sp>
+        <p:nvSpPr>
+          <p:cNvPr id="18" name="Text 13"/>
+          <p:cNvSpPr/>
+          <p:nvPr/>
+        </p:nvSpPr>
+        <p:spPr>
+          <a:xfrm>
+            <a:off x="6533096" y="2025299"/>
+            <a:ext cx="2103120" cy="237744"/>
+          </a:xfrm>
+          <a:prstGeom prst="rect">
+            <a:avLst/>
+          </a:prstGeom>
+          <a:noFill/>
+          <a:ln/>
+        </p:spPr>
+        <p:txBody>
+          <a:bodyPr wrap="square" lIns="0" tIns="0" rIns="0" bIns="0" rtlCol="0" anchor="ctr"/>
+          <a:lstStyle/>
+          <a:p>
+            <a:pPr marL="0" indent="0" algn="r">
+              <a:buNone/>
+            </a:pPr>
+            <a:r>
+              <a:rPr lang="en-US" sz="1100" b="1" dirty="0">
+                <a:solidFill>
+                  <a:srgbClr val="1A1A1A"/>
+                </a:solidFill>
+              </a:rPr>
+              <a:t>Ans. Relevancy</a:t>
+            </a:r>
+            <a:endParaRPr lang="en-US" sz="1100" dirty="0"/>
+          </a:p>
+        </p:txBody>
+      </p:sp>
+      <p:sp>
+        <p:nvSpPr>
+          <p:cNvPr id="19" name="Shape 14"/>
+          <p:cNvSpPr/>
+          <p:nvPr/>
+        </p:nvSpPr>
+        <p:spPr>
+          <a:xfrm>
+            <a:off x="7917180" y="2519983"/>
+            <a:ext cx="841248" cy="219456"/>
+          </a:xfrm>
+          <a:prstGeom prst="rect">
+            <a:avLst/>
+          </a:prstGeom>
+          <a:solidFill>
+            <a:srgbClr val="DCFCE7"/>
+          </a:solidFill>
+          <a:ln w="12700">
+            <a:solidFill>
+              <a:srgbClr val="DCFCE7"/>
+            </a:solidFill>
+            <a:prstDash val="solid"/>
+          </a:ln>
+        </p:spPr>
+      </p:sp>
+      <p:sp>
+        <p:nvSpPr>
+          <p:cNvPr id="20" name="Text 15"/>
+          <p:cNvSpPr/>
+          <p:nvPr/>
+        </p:nvSpPr>
+        <p:spPr>
+          <a:xfrm>
+            <a:off x="7920196" y="2510028"/>
+            <a:ext cx="841248" cy="219456"/>
+          </a:xfrm>
+          <a:prstGeom prst="rect">
+            <a:avLst/>
+          </a:prstGeom>
+          <a:noFill/>
+          <a:ln/>
+        </p:spPr>
+        <p:txBody>
+          <a:bodyPr wrap="square" lIns="0" tIns="0" rIns="0" bIns="0" rtlCol="0" anchor="ctr"/>
+          <a:lstStyle/>
+          <a:p>
+            <a:pPr marL="0" indent="0" algn="ctr">
+              <a:buNone/>
+            </a:pPr>
+            <a:r>
+              <a:rPr lang="en-US" sz="800" b="1" dirty="0">
+                <a:solidFill>
+                  <a:srgbClr val="15803D"/>
+                </a:solidFill>
+              </a:rPr>
+              <a:t>★ 우수</a:t>
+            </a:r>
+            <a:endParaRPr lang="en-US" sz="800" dirty="0"/>
+          </a:p>
+        </p:txBody>
+      </p:sp>
+      <p:sp>
+        <p:nvSpPr>
+          <p:cNvPr id="21" name="Text 16"/>
+          <p:cNvSpPr/>
+          <p:nvPr/>
+        </p:nvSpPr>
+        <p:spPr>
+          <a:xfrm>
+            <a:off x="5321808" y="2450592"/>
+            <a:ext cx="3438144" cy="320040"/>
+          </a:xfrm>
+          <a:prstGeom prst="rect">
+            <a:avLst/>
+          </a:prstGeom>
+          <a:noFill/>
+          <a:ln/>
+        </p:spPr>
+        <p:txBody>
+          <a:bodyPr wrap="square" lIns="0" tIns="0" rIns="0" bIns="0" rtlCol="0" anchor="ctr"/>
+          <a:lstStyle/>
+          <a:p>
+            <a:pPr marL="0" indent="0">
+              <a:buNone/>
+            </a:pPr>
+            <a:r>
+              <a:rPr lang="en-US" sz="850" dirty="0">
+                <a:solidFill>
+                  <a:srgbClr val="2D2D2D"/>
+                </a:solidFill>
+              </a:rPr>
+              <a:t>사건 유형 버튼 + 명확한</a:t>
+            </a:r>
+            <a:endParaRPr lang="en-US" sz="850" dirty="0"/>
+          </a:p>
+          <a:p>
+            <a:pPr marL="0" indent="0">
+              <a:buNone/>
+            </a:pPr>
+            <a:r>
+              <a:rPr lang="en-US" sz="850" dirty="0">
+                <a:solidFill>
+                  <a:srgbClr val="2D2D2D"/>
+                </a:solidFill>
+              </a:rPr>
+              <a:t>프롬프트 템플릿 효과</a:t>
+            </a:r>
+            <a:endParaRPr lang="en-US" sz="850" dirty="0"/>
+          </a:p>
+        </p:txBody>
+      </p:sp>
+      <p:sp>
+        <p:nvSpPr>
+          <p:cNvPr id="22" name="Shape 17"/>
+          <p:cNvSpPr/>
+          <p:nvPr/>
+        </p:nvSpPr>
+        <p:spPr>
+          <a:xfrm>
+            <a:off x="5212080" y="2889504"/>
+            <a:ext cx="3657600" cy="877824"/>
+          </a:xfrm>
+          <a:prstGeom prst="rect">
+            <a:avLst/>
+          </a:prstGeom>
+          <a:solidFill>
+            <a:srgbClr val="FFFFFF"/>
+          </a:solidFill>
+          <a:ln w="12700">
+            <a:solidFill>
+              <a:srgbClr val="E2E8F0"/>
+            </a:solidFill>
+            <a:prstDash val="solid"/>
+          </a:ln>
+        </p:spPr>
+      </p:sp>
+      <p:sp>
+        <p:nvSpPr>
+          <p:cNvPr id="23" name="Shape 18"/>
+          <p:cNvSpPr/>
+          <p:nvPr/>
+        </p:nvSpPr>
+        <p:spPr>
+          <a:xfrm>
+            <a:off x="5212080" y="2889504"/>
+            <a:ext cx="54864" cy="877824"/>
+          </a:xfrm>
+          <a:prstGeom prst="rect">
+            <a:avLst/>
+          </a:prstGeom>
+          <a:solidFill>
+            <a:schemeClr val="accent2">
+              <a:lumMod val="75000"/>
+            </a:schemeClr>
+          </a:solidFill>
+          <a:ln>
+            <a:solidFill>
+              <a:schemeClr val="accent2">
+                <a:lumMod val="75000"/>
+              </a:schemeClr>
+            </a:solidFill>
+          </a:ln>
+        </p:spPr>
+      </p:sp>
+      <p:sp>
+        <p:nvSpPr>
+          <p:cNvPr id="24" name="Text 19"/>
+          <p:cNvSpPr/>
+          <p:nvPr/>
+        </p:nvSpPr>
+        <p:spPr>
+          <a:xfrm>
+            <a:off x="5321808" y="2926080"/>
+            <a:ext cx="1188720" cy="457200"/>
+          </a:xfrm>
+          <a:prstGeom prst="rect">
+            <a:avLst/>
+          </a:prstGeom>
+          <a:noFill/>
+          <a:ln/>
+        </p:spPr>
+        <p:txBody>
+          <a:bodyPr wrap="square" lIns="0" tIns="0" rIns="0" bIns="0" rtlCol="0" anchor="ctr"/>
+          <a:lstStyle/>
+          <a:p>
+            <a:pPr marL="0" indent="0">
+              <a:buNone/>
+            </a:pPr>
+            <a:r>
+              <a:rPr lang="en-US" sz="2400" b="1" dirty="0">
+                <a:solidFill>
+                  <a:schemeClr val="accent2">
+                    <a:lumMod val="75000"/>
+                  </a:schemeClr>
+                </a:solidFill>
+                <a:latin typeface="Arial Black" pitchFamily="34" charset="0"/>
+                <a:ea typeface="Arial Black" pitchFamily="34" charset="-122"/>
+                <a:cs typeface="Arial Black" pitchFamily="34" charset="-120"/>
+              </a:rPr>
+              <a:t>0.774</a:t>
+            </a:r>
+            <a:endParaRPr lang="en-US" sz="2400" dirty="0">
+              <a:solidFill>
+                <a:schemeClr val="accent2">
+                  <a:lumMod val="75000"/>
+                </a:schemeClr>
+              </a:solidFill>
+            </a:endParaRPr>
+          </a:p>
+        </p:txBody>
+      </p:sp>
+      <p:sp>
+        <p:nvSpPr>
+          <p:cNvPr id="25" name="Text 20"/>
+          <p:cNvSpPr/>
+          <p:nvPr/>
+        </p:nvSpPr>
+        <p:spPr>
+          <a:xfrm>
+            <a:off x="7554176" y="2978404"/>
+            <a:ext cx="1082040" cy="237744"/>
+          </a:xfrm>
+          <a:prstGeom prst="rect">
+            <a:avLst/>
+          </a:prstGeom>
+          <a:noFill/>
+          <a:ln/>
+        </p:spPr>
+        <p:txBody>
+          <a:bodyPr wrap="square" lIns="0" tIns="0" rIns="0" bIns="0" rtlCol="0" anchor="ctr"/>
+          <a:lstStyle/>
+          <a:p>
+            <a:pPr marL="0" indent="0" algn="r">
+              <a:buNone/>
+            </a:pPr>
+            <a:r>
+              <a:rPr lang="en-US" sz="1100" b="1" dirty="0">
+                <a:solidFill>
+                  <a:srgbClr val="1A1A1A"/>
+                </a:solidFill>
+              </a:rPr>
+              <a:t>Ctx. Precision</a:t>
+            </a:r>
+            <a:endParaRPr lang="en-US" sz="1100" dirty="0"/>
+          </a:p>
+        </p:txBody>
+      </p:sp>
+      <p:sp>
+        <p:nvSpPr>
+          <p:cNvPr id="26" name="Shape 21"/>
+          <p:cNvSpPr/>
+          <p:nvPr/>
+        </p:nvSpPr>
+        <p:spPr>
+          <a:xfrm>
+            <a:off x="7918704" y="3472180"/>
+            <a:ext cx="841248" cy="219456"/>
+          </a:xfrm>
+          <a:prstGeom prst="rect">
+            <a:avLst/>
+          </a:prstGeom>
+          <a:solidFill>
+            <a:srgbClr val="FEF3C7"/>
+          </a:solidFill>
+          <a:ln w="12700">
+            <a:solidFill>
+              <a:srgbClr val="FEF3C7"/>
+            </a:solidFill>
+            <a:prstDash val="solid"/>
+          </a:ln>
+        </p:spPr>
+      </p:sp>
+      <p:sp>
+        <p:nvSpPr>
+          <p:cNvPr id="27" name="Text 22"/>
+          <p:cNvSpPr/>
+          <p:nvPr/>
+        </p:nvSpPr>
+        <p:spPr>
+          <a:xfrm>
+            <a:off x="7917942" y="3472180"/>
+            <a:ext cx="841248" cy="219456"/>
+          </a:xfrm>
+          <a:prstGeom prst="rect">
+            <a:avLst/>
+          </a:prstGeom>
+          <a:noFill/>
+          <a:ln/>
+        </p:spPr>
+        <p:txBody>
+          <a:bodyPr wrap="square" lIns="0" tIns="0" rIns="0" bIns="0" rtlCol="0" anchor="ctr"/>
+          <a:lstStyle/>
+          <a:p>
+            <a:pPr marL="0" indent="0" algn="ctr">
+              <a:buNone/>
+            </a:pPr>
+            <a:r>
+              <a:rPr lang="en-US" sz="800" b="1" dirty="0">
+                <a:solidFill>
+                  <a:srgbClr val="92400E"/>
+                </a:solidFill>
+              </a:rPr>
+              <a:t>△ 개선여지</a:t>
+            </a:r>
+            <a:endParaRPr lang="en-US" sz="800" dirty="0"/>
+          </a:p>
+        </p:txBody>
+      </p:sp>
+      <p:sp>
+        <p:nvSpPr>
+          <p:cNvPr id="28" name="Text 23"/>
+          <p:cNvSpPr/>
+          <p:nvPr/>
+        </p:nvSpPr>
+        <p:spPr>
+          <a:xfrm>
+            <a:off x="5321808" y="3401568"/>
+            <a:ext cx="3438144" cy="320040"/>
+          </a:xfrm>
+          <a:prstGeom prst="rect">
+            <a:avLst/>
+          </a:prstGeom>
+          <a:noFill/>
+          <a:ln/>
+        </p:spPr>
+        <p:txBody>
+          <a:bodyPr wrap="square" lIns="0" tIns="0" rIns="0" bIns="0" rtlCol="0" anchor="ctr"/>
+          <a:lstStyle/>
+          <a:p>
+            <a:pPr marL="0" indent="0">
+              <a:buNone/>
+            </a:pPr>
+            <a:r>
+              <a:rPr lang="en-US" sz="850" dirty="0">
+                <a:solidFill>
+                  <a:srgbClr val="2D2D2D"/>
+                </a:solidFill>
+              </a:rPr>
+              <a:t>Top-K=4 시 무관 청크 포함</a:t>
+            </a:r>
+            <a:endParaRPr lang="en-US" sz="850" dirty="0"/>
+          </a:p>
+          <a:p>
+            <a:pPr marL="0" indent="0">
+              <a:buNone/>
+            </a:pPr>
+            <a:r>
+              <a:rPr lang="en-US" sz="850" dirty="0">
+                <a:solidFill>
+                  <a:srgbClr val="2D2D2D"/>
+                </a:solidFill>
+              </a:rPr>
+              <a:t>→ chunk 300/K=3 조정 시 +0.05</a:t>
+            </a:r>
+            <a:endParaRPr lang="en-US" sz="850" dirty="0"/>
+          </a:p>
+        </p:txBody>
+      </p:sp>
+      <p:sp>
+        <p:nvSpPr>
+          <p:cNvPr id="29" name="Shape 24"/>
+          <p:cNvSpPr/>
+          <p:nvPr/>
+        </p:nvSpPr>
+        <p:spPr>
+          <a:xfrm>
+            <a:off x="5212080" y="3840480"/>
+            <a:ext cx="3657600" cy="877824"/>
+          </a:xfrm>
+          <a:prstGeom prst="rect">
+            <a:avLst/>
+          </a:prstGeom>
+          <a:solidFill>
+            <a:srgbClr val="FFFFFF"/>
+          </a:solidFill>
+          <a:ln w="12700">
+            <a:solidFill>
+              <a:srgbClr val="E2E8F0"/>
+            </a:solidFill>
+            <a:prstDash val="solid"/>
+          </a:ln>
+        </p:spPr>
+      </p:sp>
+      <p:sp>
+        <p:nvSpPr>
+          <p:cNvPr id="30" name="Shape 25"/>
+          <p:cNvSpPr/>
+          <p:nvPr/>
+        </p:nvSpPr>
+        <p:spPr>
+          <a:xfrm>
+            <a:off x="5212080" y="3840480"/>
+            <a:ext cx="54864" cy="877824"/>
+          </a:xfrm>
+          <a:prstGeom prst="rect">
+            <a:avLst/>
+          </a:prstGeom>
+          <a:solidFill>
+            <a:srgbClr val="059669"/>
+          </a:solidFill>
+          <a:ln>
+            <a:solidFill>
+              <a:srgbClr val="059669"/>
+            </a:solidFill>
+          </a:ln>
+        </p:spPr>
+      </p:sp>
+      <p:sp>
+        <p:nvSpPr>
+          <p:cNvPr id="31" name="Text 26"/>
+          <p:cNvSpPr/>
+          <p:nvPr/>
+        </p:nvSpPr>
+        <p:spPr>
+          <a:xfrm>
+            <a:off x="5321808" y="3877056"/>
+            <a:ext cx="1188720" cy="457200"/>
+          </a:xfrm>
+          <a:prstGeom prst="rect">
+            <a:avLst/>
+          </a:prstGeom>
+          <a:noFill/>
+          <a:ln/>
+        </p:spPr>
+        <p:txBody>
+          <a:bodyPr wrap="square" lIns="0" tIns="0" rIns="0" bIns="0" rtlCol="0" anchor="ctr"/>
+          <a:lstStyle/>
+          <a:p>
+            <a:pPr marL="0" indent="0">
+              <a:buNone/>
+            </a:pPr>
+            <a:r>
+              <a:rPr lang="en-US" sz="2400" b="1" dirty="0">
+                <a:solidFill>
+                  <a:srgbClr val="059669"/>
+                </a:solidFill>
+                <a:latin typeface="Arial Black" pitchFamily="34" charset="0"/>
+                <a:ea typeface="Arial Black" pitchFamily="34" charset="-122"/>
+                <a:cs typeface="Arial Black" pitchFamily="34" charset="-120"/>
+              </a:rPr>
+              <a:t>0.823</a:t>
+            </a:r>
+            <a:endParaRPr lang="en-US" sz="2400" dirty="0">
+              <a:solidFill>
+                <a:srgbClr val="059669"/>
+              </a:solidFill>
+            </a:endParaRPr>
+          </a:p>
+        </p:txBody>
+      </p:sp>
+      <p:sp>
+        <p:nvSpPr>
+          <p:cNvPr id="32" name="Text 27"/>
+          <p:cNvSpPr/>
+          <p:nvPr/>
+        </p:nvSpPr>
+        <p:spPr>
+          <a:xfrm>
+            <a:off x="7467092" y="3931920"/>
+            <a:ext cx="1173988" cy="237744"/>
+          </a:xfrm>
+          <a:prstGeom prst="rect">
+            <a:avLst/>
+          </a:prstGeom>
+          <a:noFill/>
+          <a:ln/>
+        </p:spPr>
+        <p:txBody>
+          <a:bodyPr wrap="square" lIns="0" tIns="0" rIns="0" bIns="0" rtlCol="0" anchor="ctr"/>
+          <a:lstStyle/>
+          <a:p>
+            <a:pPr marL="0" indent="0" algn="r">
+              <a:buNone/>
+            </a:pPr>
+            <a:r>
+              <a:rPr lang="en-US" sz="1100" b="1" dirty="0">
+                <a:solidFill>
+                  <a:srgbClr val="1A1A1A"/>
+                </a:solidFill>
+              </a:rPr>
+              <a:t>Ctx. Recall</a:t>
+            </a:r>
+            <a:endParaRPr lang="en-US" sz="1100" dirty="0"/>
+          </a:p>
+        </p:txBody>
+      </p:sp>
+      <p:sp>
+        <p:nvSpPr>
+          <p:cNvPr id="33" name="Shape 28"/>
+          <p:cNvSpPr/>
+          <p:nvPr/>
+        </p:nvSpPr>
+        <p:spPr>
+          <a:xfrm>
+            <a:off x="7917942" y="4422778"/>
+            <a:ext cx="841248" cy="219456"/>
+          </a:xfrm>
+          <a:prstGeom prst="rect">
+            <a:avLst/>
+          </a:prstGeom>
+          <a:solidFill>
+            <a:srgbClr val="DBEAFE"/>
+          </a:solidFill>
+          <a:ln w="12700">
+            <a:solidFill>
+              <a:srgbClr val="DBEAFE"/>
+            </a:solidFill>
+            <a:prstDash val="solid"/>
+          </a:ln>
+        </p:spPr>
+      </p:sp>
+      <p:sp>
+        <p:nvSpPr>
+          <p:cNvPr id="34" name="Text 29"/>
+          <p:cNvSpPr/>
+          <p:nvPr/>
+        </p:nvSpPr>
+        <p:spPr>
+          <a:xfrm>
+            <a:off x="7917180" y="4422778"/>
+            <a:ext cx="841248" cy="219456"/>
+          </a:xfrm>
+          <a:prstGeom prst="rect">
+            <a:avLst/>
+          </a:prstGeom>
+          <a:noFill/>
+          <a:ln/>
+        </p:spPr>
+        <p:txBody>
+          <a:bodyPr wrap="square" lIns="0" tIns="0" rIns="0" bIns="0" rtlCol="0" anchor="ctr"/>
+          <a:lstStyle/>
+          <a:p>
+            <a:pPr marL="0" indent="0" algn="ctr">
+              <a:buNone/>
+            </a:pPr>
+            <a:r>
+              <a:rPr lang="en-US" sz="800" b="1" dirty="0">
+                <a:solidFill>
+                  <a:srgbClr val="1E40AF"/>
+                </a:solidFill>
+              </a:rPr>
+              <a:t>○ 양호</a:t>
+            </a:r>
+            <a:endParaRPr lang="en-US" sz="800" dirty="0"/>
+          </a:p>
+        </p:txBody>
+      </p:sp>
+      <p:sp>
+        <p:nvSpPr>
+          <p:cNvPr id="35" name="Text 30"/>
+          <p:cNvSpPr/>
+          <p:nvPr/>
+        </p:nvSpPr>
+        <p:spPr>
+          <a:xfrm>
+            <a:off x="5321808" y="4352544"/>
+            <a:ext cx="3438144" cy="320040"/>
+          </a:xfrm>
+          <a:prstGeom prst="rect">
+            <a:avLst/>
+          </a:prstGeom>
+          <a:noFill/>
+          <a:ln/>
+        </p:spPr>
+        <p:txBody>
+          <a:bodyPr wrap="square" lIns="0" tIns="0" rIns="0" bIns="0" rtlCol="0" anchor="ctr"/>
+          <a:lstStyle/>
+          <a:p>
+            <a:pPr marL="0" indent="0">
+              <a:buNone/>
+            </a:pPr>
+            <a:r>
+              <a:rPr lang="en-US" sz="850" dirty="0">
+                <a:solidFill>
+                  <a:srgbClr val="2D2D2D"/>
+                </a:solidFill>
+              </a:rPr>
+              <a:t>청크 오버랩(80) 적용으로</a:t>
+            </a:r>
+            <a:endParaRPr lang="en-US" sz="850" dirty="0"/>
+          </a:p>
+          <a:p>
+            <a:pPr marL="0" indent="0">
+              <a:buNone/>
+            </a:pPr>
+            <a:r>
+              <a:rPr lang="en-US" sz="850" dirty="0">
+                <a:solidFill>
+                  <a:srgbClr val="2D2D2D"/>
+                </a:solidFill>
+              </a:rPr>
+              <a:t>필요 정보 대부분 포함</a:t>
+            </a:r>
+            <a:endParaRPr lang="en-US" sz="850" dirty="0"/>
+          </a:p>
+        </p:txBody>
+      </p:sp>
+      <p:sp>
+        <p:nvSpPr>
+          <p:cNvPr id="36" name="Shape 31"/>
+          <p:cNvSpPr/>
+          <p:nvPr/>
+        </p:nvSpPr>
+        <p:spPr>
+          <a:xfrm>
+            <a:off x="5212080" y="4791456"/>
+            <a:ext cx="3657600" cy="274320"/>
+          </a:xfrm>
+          <a:prstGeom prst="rect">
+            <a:avLst/>
+          </a:prstGeom>
+          <a:solidFill>
+            <a:schemeClr val="bg1">
+              <a:lumMod val="85000"/>
+            </a:schemeClr>
+          </a:solidFill>
+          <a:ln w="12700">
+            <a:solidFill>
+              <a:schemeClr val="tx1"/>
+            </a:solidFill>
+            <a:prstDash val="solid"/>
+          </a:ln>
+        </p:spPr>
+      </p:sp>
+      <p:sp>
+        <p:nvSpPr>
+          <p:cNvPr id="37" name="Text 32"/>
+          <p:cNvSpPr/>
+          <p:nvPr/>
+        </p:nvSpPr>
+        <p:spPr>
+          <a:xfrm>
+            <a:off x="5321808" y="4809744"/>
+            <a:ext cx="3474720" cy="237744"/>
+          </a:xfrm>
+          <a:prstGeom prst="rect">
+            <a:avLst/>
+          </a:prstGeom>
+          <a:noFill/>
+          <a:ln/>
+        </p:spPr>
+        <p:txBody>
+          <a:bodyPr wrap="square" lIns="0" tIns="0" rIns="0" bIns="0" rtlCol="0" anchor="ctr"/>
+          <a:lstStyle/>
+          <a:p>
+            <a:pPr marL="0" indent="0">
+              <a:buNone/>
+            </a:pPr>
+            <a:r>
+              <a:rPr lang="en-US" sz="850" dirty="0"/>
+              <a:t>개선 목표 → Ctx.Precision: 0.83+  /  Ctx.Recall: 0.88+  /  전체 평균 0.85+</a:t>
+            </a:r>
+          </a:p>
+        </p:txBody>
+      </p:sp>
+    </p:spTree>
+  </p:cSld>
+  <p:clrMapOvr>
+    <a:masterClrMapping/>
+  </p:clrMapOvr>
+  <p:timing>
+    <p:tnLst>
+      <p:par>
+        <p:cTn id="1" dur="indefinite" restart="never" nodeType="tmRoot"/>
+      </p:par>
+    </p:tnLst>
+  </p:timing>
+</p:sld>
+</file>
+
+<file path=ppt/slides/slide11.xml><?xml version="1.0" encoding="utf-8"?>
 <p:sld xmlns:a="http://schemas.openxmlformats.org/drawingml/2006/main" xmlns:r="http://schemas.openxmlformats.org/officeDocument/2006/relationships" xmlns:p="http://schemas.openxmlformats.org/presentationml/2006/main">
   <p:cSld name="Slide 10">
     <p:bg>
@@ -2213,8 +3509,8 @@
         </p:nvSpPr>
         <p:spPr>
           <a:xfrm rot="20793437">
-            <a:off x="4954549" y="-2327028"/>
-            <a:ext cx="6709932" cy="6885191"/>
+            <a:off x="6391626" y="-1961362"/>
+            <a:ext cx="4578157" cy="4768082"/>
           </a:xfrm>
           <a:custGeom>
             <a:avLst/>
@@ -2247,7 +3543,7 @@
             <a:blip r:embed="rId3">
               <a:extLst>
                 <a:ext uri="{96DAC541-7B7A-43D3-8B79-37D633B846F1}">
-                  <asvg:svgBlip xmlns:asvg="http://schemas.microsoft.com/office/drawing/2016/SVG/main" xmlns="" r:embed="rId4"/>
+                  <asvg:svgBlip xmlns="" xmlns:asvg="http://schemas.microsoft.com/office/drawing/2016/SVG/main" r:embed="rId4"/>
                 </a:ext>
               </a:extLst>
             </a:blip>
@@ -3279,7 +4575,7 @@
 </p:sld>
 </file>
 
-<file path=ppt/slides/slide11.xml><?xml version="1.0" encoding="utf-8"?>
+<file path=ppt/slides/slide12.xml><?xml version="1.0" encoding="utf-8"?>
 <p:sld xmlns:a="http://schemas.openxmlformats.org/drawingml/2006/main" xmlns:r="http://schemas.openxmlformats.org/officeDocument/2006/relationships" xmlns:p="http://schemas.openxmlformats.org/presentationml/2006/main">
   <p:cSld>
     <p:spTree>
@@ -3350,8 +4646,8 @@
         </p:nvSpPr>
         <p:spPr>
           <a:xfrm rot="-10580377">
-            <a:off x="6210178" y="-5104716"/>
-            <a:ext cx="12018192" cy="12332100"/>
+            <a:off x="6586429" y="-1829840"/>
+            <a:ext cx="4911939" cy="5416600"/>
           </a:xfrm>
           <a:custGeom>
             <a:avLst/>
@@ -3384,7 +4680,7 @@
             <a:blip r:embed="rId3">
               <a:extLst>
                 <a:ext uri="{96DAC541-7B7A-43D3-8B79-37D633B846F1}">
-                  <asvg:svgBlip xmlns:asvg="http://schemas.microsoft.com/office/drawing/2016/SVG/main" xmlns="" r:embed="rId4"/>
+                  <asvg:svgBlip xmlns="" xmlns:asvg="http://schemas.microsoft.com/office/drawing/2016/SVG/main" r:embed="rId4"/>
                 </a:ext>
               </a:extLst>
             </a:blip>
@@ -3480,7 +4776,7 @@
             <a:blip r:embed="rId5">
               <a:extLst>
                 <a:ext uri="{96DAC541-7B7A-43D3-8B79-37D633B846F1}">
-                  <asvg:svgBlip xmlns:asvg="http://schemas.microsoft.com/office/drawing/2016/SVG/main" xmlns="" r:embed="rId6"/>
+                  <asvg:svgBlip xmlns="" xmlns:asvg="http://schemas.microsoft.com/office/drawing/2016/SVG/main" r:embed="rId6"/>
                 </a:ext>
               </a:extLst>
             </a:blip>
@@ -4227,7 +5523,7 @@
             <a:blip r:embed="rId3">
               <a:extLst>
                 <a:ext uri="{96DAC541-7B7A-43D3-8B79-37D633B846F1}">
-                  <asvg:svgBlip xmlns:asvg="http://schemas.microsoft.com/office/drawing/2016/SVG/main" xmlns="" r:embed="rId4"/>
+                  <asvg:svgBlip xmlns="" xmlns:asvg="http://schemas.microsoft.com/office/drawing/2016/SVG/main" r:embed="rId4"/>
                 </a:ext>
               </a:extLst>
             </a:blip>
@@ -4279,7 +5575,7 @@
             <a:blip r:embed="rId5">
               <a:extLst>
                 <a:ext uri="{96DAC541-7B7A-43D3-8B79-37D633B846F1}">
-                  <asvg:svgBlip xmlns:asvg="http://schemas.microsoft.com/office/drawing/2016/SVG/main" xmlns="" r:embed="rId6"/>
+                  <asvg:svgBlip xmlns="" xmlns:asvg="http://schemas.microsoft.com/office/drawing/2016/SVG/main" r:embed="rId6"/>
                 </a:ext>
               </a:extLst>
             </a:blip>
@@ -4726,7 +6022,7 @@
             <a:blip r:embed="rId4">
               <a:extLst>
                 <a:ext uri="{96DAC541-7B7A-43D3-8B79-37D633B846F1}">
-                  <asvg:svgBlip xmlns:asvg="http://schemas.microsoft.com/office/drawing/2016/SVG/main" xmlns="" r:embed="rId7"/>
+                  <asvg:svgBlip xmlns="" xmlns:asvg="http://schemas.microsoft.com/office/drawing/2016/SVG/main" r:embed="rId7"/>
                 </a:ext>
               </a:extLst>
             </a:blip>
@@ -4784,8 +6080,8 @@
         </p:nvSpPr>
         <p:spPr>
           <a:xfrm>
-            <a:off x="-3548055" y="-4017657"/>
-            <a:ext cx="6709932" cy="6885191"/>
+            <a:off x="-2042542" y="-2543494"/>
+            <a:ext cx="4346341" cy="5411028"/>
           </a:xfrm>
           <a:custGeom>
             <a:avLst/>
@@ -4818,7 +6114,7 @@
             <a:blip r:embed="rId3">
               <a:extLst>
                 <a:ext uri="{96DAC541-7B7A-43D3-8B79-37D633B846F1}">
-                  <asvg:svgBlip xmlns:asvg="http://schemas.microsoft.com/office/drawing/2016/SVG/main" xmlns="" r:embed="rId4"/>
+                  <asvg:svgBlip xmlns="" xmlns:asvg="http://schemas.microsoft.com/office/drawing/2016/SVG/main" r:embed="rId4"/>
                 </a:ext>
               </a:extLst>
             </a:blip>
@@ -4836,8 +6132,8 @@
         </p:nvSpPr>
         <p:spPr>
           <a:xfrm>
-            <a:off x="6062903" y="-2671997"/>
-            <a:ext cx="7616557" cy="7815497"/>
+            <a:off x="6662057" y="-2543494"/>
+            <a:ext cx="5565974" cy="5539531"/>
           </a:xfrm>
           <a:custGeom>
             <a:avLst/>
@@ -4870,7 +6166,7 @@
             <a:blip r:embed="rId3">
               <a:extLst>
                 <a:ext uri="{96DAC541-7B7A-43D3-8B79-37D633B846F1}">
-                  <asvg:svgBlip xmlns:asvg="http://schemas.microsoft.com/office/drawing/2016/SVG/main" xmlns="" r:embed="rId4"/>
+                  <asvg:svgBlip xmlns="" xmlns:asvg="http://schemas.microsoft.com/office/drawing/2016/SVG/main" r:embed="rId4"/>
                 </a:ext>
               </a:extLst>
             </a:blip>
@@ -6865,8 +8161,8 @@
         </p:nvSpPr>
         <p:spPr>
           <a:xfrm>
-            <a:off x="5395842" y="-2647068"/>
-            <a:ext cx="6709932" cy="6885191"/>
+            <a:off x="6793992" y="-1952850"/>
+            <a:ext cx="3934231" cy="5070954"/>
           </a:xfrm>
           <a:custGeom>
             <a:avLst/>
@@ -6899,7 +8195,7 @@
             <a:blip r:embed="rId3">
               <a:extLst>
                 <a:ext uri="{96DAC541-7B7A-43D3-8B79-37D633B846F1}">
-                  <asvg:svgBlip xmlns:asvg="http://schemas.microsoft.com/office/drawing/2016/SVG/main" xmlns="" r:embed="rId4"/>
+                  <asvg:svgBlip xmlns="" xmlns:asvg="http://schemas.microsoft.com/office/drawing/2016/SVG/main" r:embed="rId4"/>
                 </a:ext>
               </a:extLst>
             </a:blip>
@@ -8326,8 +9622,8 @@
         </p:nvSpPr>
         <p:spPr>
           <a:xfrm>
-            <a:off x="5935980" y="-2453853"/>
-            <a:ext cx="7616557" cy="7815497"/>
+            <a:off x="7251788" y="-1810144"/>
+            <a:ext cx="3784423" cy="4322277"/>
           </a:xfrm>
           <a:custGeom>
             <a:avLst/>
@@ -8360,7 +9656,7 @@
             <a:blip r:embed="rId3">
               <a:extLst>
                 <a:ext uri="{96DAC541-7B7A-43D3-8B79-37D633B846F1}">
-                  <asvg:svgBlip xmlns:asvg="http://schemas.microsoft.com/office/drawing/2016/SVG/main" xmlns="" r:embed="rId8"/>
+                  <asvg:svgBlip xmlns="" xmlns:asvg="http://schemas.microsoft.com/office/drawing/2016/SVG/main" r:embed="rId8"/>
                 </a:ext>
               </a:extLst>
             </a:blip>
@@ -9386,7 +10682,7 @@
 
 <file path=ppt/slides/slide7.xml><?xml version="1.0" encoding="utf-8"?>
 <p:sld xmlns:a="http://schemas.openxmlformats.org/drawingml/2006/main" xmlns:r="http://schemas.openxmlformats.org/officeDocument/2006/relationships" xmlns:p="http://schemas.openxmlformats.org/presentationml/2006/main">
-  <p:cSld name="Slide 7">
+  <p:cSld>
     <p:bg>
       <p:bgPr>
         <a:solidFill>
@@ -9411,14 +10707,14 @@
       </p:grpSpPr>
       <p:sp>
         <p:nvSpPr>
-          <p:cNvPr id="43" name="Freeform 5"/>
-          <p:cNvSpPr/>
-          <p:nvPr/>
-        </p:nvSpPr>
-        <p:spPr>
-          <a:xfrm>
-            <a:off x="6007608" y="-4355509"/>
-            <a:ext cx="7616557" cy="7815497"/>
+          <p:cNvPr id="23" name="Freeform 5"/>
+          <p:cNvSpPr/>
+          <p:nvPr/>
+        </p:nvSpPr>
+        <p:spPr>
+          <a:xfrm>
+            <a:off x="7251788" y="-1810144"/>
+            <a:ext cx="3784423" cy="4322277"/>
           </a:xfrm>
           <a:custGeom>
             <a:avLst/>
@@ -9451,7 +10747,7 @@
             <a:blip r:embed="rId3">
               <a:extLst>
                 <a:ext uri="{96DAC541-7B7A-43D3-8B79-37D633B846F1}">
-                  <asvg:svgBlip xmlns:asvg="http://schemas.microsoft.com/office/drawing/2016/SVG/main" xmlns="" r:embed="rId8"/>
+                  <asvg:svgBlip xmlns="" xmlns:asvg="http://schemas.microsoft.com/office/drawing/2016/SVG/main" r:embed="rId8"/>
                 </a:ext>
               </a:extLst>
             </a:blip>
@@ -9463,14 +10759,164 @@
       </p:sp>
       <p:sp>
         <p:nvSpPr>
-          <p:cNvPr id="49" name="Freeform 5"/>
-          <p:cNvSpPr/>
-          <p:nvPr/>
-        </p:nvSpPr>
-        <p:spPr>
-          <a:xfrm>
-            <a:off x="-3126853" y="2295144"/>
-            <a:ext cx="7616557" cy="7815497"/>
+          <p:cNvPr id="5" name="Text 2"/>
+          <p:cNvSpPr/>
+          <p:nvPr/>
+        </p:nvSpPr>
+        <p:spPr>
+          <a:xfrm>
+            <a:off x="365760" y="176784"/>
+            <a:ext cx="8229600" cy="530352"/>
+          </a:xfrm>
+          <a:prstGeom prst="rect">
+            <a:avLst/>
+          </a:prstGeom>
+          <a:noFill/>
+          <a:ln/>
+        </p:spPr>
+        <p:txBody>
+          <a:bodyPr wrap="square" lIns="0" tIns="0" rIns="0" bIns="0" rtlCol="0" anchor="ctr"/>
+          <a:lstStyle/>
+          <a:p>
+            <a:pPr marL="0" indent="0">
+              <a:buNone/>
+            </a:pPr>
+            <a:r>
+              <a:rPr lang="en-US" sz="2800" b="1" dirty="0">
+                <a:solidFill>
+                  <a:srgbClr val="1A1A1A"/>
+                </a:solidFill>
+                <a:latin typeface="Arial Black" pitchFamily="34" charset="0"/>
+                <a:ea typeface="Arial Black" pitchFamily="34" charset="-122"/>
+                <a:cs typeface="Arial Black" pitchFamily="34" charset="-120"/>
+              </a:rPr>
+              <a:t>RAG vs LLM 비교 출력 UI</a:t>
+            </a:r>
+            <a:endParaRPr lang="en-US" sz="2800" dirty="0"/>
+          </a:p>
+        </p:txBody>
+      </p:sp>
+      <p:sp>
+        <p:nvSpPr>
+          <p:cNvPr id="6" name="Text 3"/>
+          <p:cNvSpPr/>
+          <p:nvPr/>
+        </p:nvSpPr>
+        <p:spPr>
+          <a:xfrm>
+            <a:off x="365760" y="745744"/>
+            <a:ext cx="8229600" cy="256032"/>
+          </a:xfrm>
+          <a:prstGeom prst="rect">
+            <a:avLst/>
+          </a:prstGeom>
+          <a:noFill/>
+          <a:ln/>
+        </p:spPr>
+        <p:txBody>
+          <a:bodyPr wrap="square" lIns="0" tIns="0" rIns="0" bIns="0" rtlCol="0" anchor="ctr"/>
+          <a:lstStyle/>
+          <a:p>
+            <a:pPr marL="0" indent="0">
+              <a:buNone/>
+            </a:pPr>
+            <a:r>
+              <a:rPr lang="en-US" sz="1200" dirty="0">
+                <a:solidFill>
+                  <a:srgbClr val="2D2D2D"/>
+                </a:solidFill>
+              </a:rPr>
+              <a:t>동일 질문에 대해 Self-RAG 답변과 순수 LLM 답변을 나란히 출력 — 차이를 즉시 확인</a:t>
+            </a:r>
+            <a:endParaRPr lang="en-US" sz="1200" dirty="0"/>
+          </a:p>
+        </p:txBody>
+      </p:sp>
+      <p:pic>
+        <p:nvPicPr>
+          <p:cNvPr id="2" name="그림 1"/>
+          <p:cNvPicPr>
+            <a:picLocks noChangeAspect="1"/>
+          </p:cNvPicPr>
+          <p:nvPr/>
+        </p:nvPicPr>
+        <p:blipFill>
+          <a:blip r:embed="rId9">
+            <a:extLst>
+              <a:ext uri="{28A0092B-C50C-407E-A947-70E740481C1C}">
+                <a14:useLocalDpi xmlns:a14="http://schemas.microsoft.com/office/drawing/2010/main" val="0"/>
+              </a:ext>
+            </a:extLst>
+          </a:blip>
+          <a:stretch>
+            <a:fillRect/>
+          </a:stretch>
+        </p:blipFill>
+        <p:spPr>
+          <a:xfrm>
+            <a:off x="365760" y="1185534"/>
+            <a:ext cx="7649029" cy="3606142"/>
+          </a:xfrm>
+          <a:prstGeom prst="rect">
+            <a:avLst/>
+          </a:prstGeom>
+        </p:spPr>
+      </p:pic>
+    </p:spTree>
+    <p:extLst>
+      <p:ext uri="{BB962C8B-B14F-4D97-AF65-F5344CB8AC3E}">
+        <p14:creationId xmlns:p14="http://schemas.microsoft.com/office/powerpoint/2010/main" val="861285532"/>
+      </p:ext>
+    </p:extLst>
+  </p:cSld>
+  <p:clrMapOvr>
+    <a:masterClrMapping/>
+  </p:clrMapOvr>
+  <p:timing>
+    <p:tnLst>
+      <p:par>
+        <p:cTn id="1" dur="indefinite" restart="never" nodeType="tmRoot"/>
+      </p:par>
+    </p:tnLst>
+  </p:timing>
+</p:sld>
+</file>
+
+<file path=ppt/slides/slide8.xml><?xml version="1.0" encoding="utf-8"?>
+<p:sld xmlns:a="http://schemas.openxmlformats.org/drawingml/2006/main" xmlns:r="http://schemas.openxmlformats.org/officeDocument/2006/relationships" xmlns:p="http://schemas.openxmlformats.org/presentationml/2006/main">
+  <p:cSld name="Slide 7">
+    <p:bg>
+      <p:bgPr>
+        <a:solidFill>
+          <a:srgbClr val="EBEBEB"/>
+        </a:solidFill>
+        <a:effectLst/>
+      </p:bgPr>
+    </p:bg>
+    <p:spTree>
+      <p:nvGrpSpPr>
+        <p:cNvPr id="1" name=""/>
+        <p:cNvGrpSpPr/>
+        <p:nvPr/>
+      </p:nvGrpSpPr>
+      <p:grpSpPr>
+        <a:xfrm>
+          <a:off x="0" y="0"/>
+          <a:ext cx="0" cy="0"/>
+          <a:chOff x="0" y="0"/>
+          <a:chExt cx="0" cy="0"/>
+        </a:xfrm>
+      </p:grpSpPr>
+      <p:sp>
+        <p:nvSpPr>
+          <p:cNvPr id="43" name="Freeform 5"/>
+          <p:cNvSpPr/>
+          <p:nvPr/>
+        </p:nvSpPr>
+        <p:spPr>
+          <a:xfrm>
+            <a:off x="6858000" y="-1886629"/>
+            <a:ext cx="4653901" cy="4611541"/>
           </a:xfrm>
           <a:custGeom>
             <a:avLst/>
@@ -9503,7 +10949,7 @@
             <a:blip r:embed="rId3">
               <a:extLst>
                 <a:ext uri="{96DAC541-7B7A-43D3-8B79-37D633B846F1}">
-                  <asvg:svgBlip xmlns:asvg="http://schemas.microsoft.com/office/drawing/2016/SVG/main" xmlns="" r:embed="rId8"/>
+                  <asvg:svgBlip xmlns="" xmlns:asvg="http://schemas.microsoft.com/office/drawing/2016/SVG/main" r:embed="rId8"/>
                 </a:ext>
               </a:extLst>
             </a:blip>
@@ -9515,1375 +10961,14 @@
       </p:sp>
       <p:sp>
         <p:nvSpPr>
-          <p:cNvPr id="17" name="Shape 14"/>
-          <p:cNvSpPr/>
-          <p:nvPr/>
-        </p:nvSpPr>
-        <p:spPr>
-          <a:xfrm>
-            <a:off x="6757416" y="1261872"/>
-            <a:ext cx="201168" cy="128016"/>
-          </a:xfrm>
-          <a:prstGeom prst="rect">
-            <a:avLst/>
-          </a:prstGeom>
-          <a:solidFill>
-            <a:srgbClr val="AAAAAA"/>
-          </a:solidFill>
-          <a:ln/>
-        </p:spPr>
-      </p:sp>
-      <p:sp>
-        <p:nvSpPr>
-          <p:cNvPr id="13" name="Shape 10"/>
-          <p:cNvSpPr/>
-          <p:nvPr/>
-        </p:nvSpPr>
-        <p:spPr>
-          <a:xfrm>
-            <a:off x="4544568" y="1261872"/>
-            <a:ext cx="201168" cy="128016"/>
-          </a:xfrm>
-          <a:prstGeom prst="rect">
-            <a:avLst/>
-          </a:prstGeom>
-          <a:solidFill>
-            <a:srgbClr val="AAAAAA"/>
-          </a:solidFill>
-          <a:ln/>
-        </p:spPr>
-      </p:sp>
-      <p:sp>
-        <p:nvSpPr>
-          <p:cNvPr id="9" name="Shape 6"/>
-          <p:cNvSpPr/>
-          <p:nvPr/>
-        </p:nvSpPr>
-        <p:spPr>
-          <a:xfrm>
-            <a:off x="2331720" y="1261872"/>
-            <a:ext cx="201168" cy="128016"/>
-          </a:xfrm>
-          <a:prstGeom prst="rect">
-            <a:avLst/>
-          </a:prstGeom>
-          <a:solidFill>
-            <a:srgbClr val="AAAAAA"/>
-          </a:solidFill>
-          <a:ln/>
-        </p:spPr>
-      </p:sp>
-      <p:sp>
-        <p:nvSpPr>
-          <p:cNvPr id="5" name="Text 2"/>
-          <p:cNvSpPr/>
-          <p:nvPr/>
-        </p:nvSpPr>
-        <p:spPr>
-          <a:xfrm>
-            <a:off x="320040" y="212598"/>
-            <a:ext cx="8229600" cy="530352"/>
-          </a:xfrm>
-          <a:prstGeom prst="rect">
-            <a:avLst/>
-          </a:prstGeom>
-          <a:noFill/>
-          <a:ln/>
-        </p:spPr>
-        <p:txBody>
-          <a:bodyPr wrap="square" lIns="0" tIns="0" rIns="0" bIns="0" rtlCol="0" anchor="ctr"/>
-          <a:lstStyle/>
-          <a:p>
-            <a:pPr marL="0" indent="0">
-              <a:buNone/>
-            </a:pPr>
-            <a:r>
-              <a:rPr lang="en-US" sz="2600" b="1" dirty="0">
-                <a:solidFill>
-                  <a:srgbClr val="1A1A1A"/>
-                </a:solidFill>
-                <a:latin typeface="Arial Black" pitchFamily="34" charset="0"/>
-                <a:ea typeface="Arial Black" pitchFamily="34" charset="-122"/>
-                <a:cs typeface="Arial Black" pitchFamily="34" charset="-120"/>
-              </a:rPr>
-              <a:t>RAGAS 평가 — 데이터셋 &amp; 방법론</a:t>
-            </a:r>
-            <a:endParaRPr lang="en-US" sz="2600" dirty="0"/>
-          </a:p>
-        </p:txBody>
-      </p:sp>
-      <p:sp>
-        <p:nvSpPr>
-          <p:cNvPr id="6" name="Shape 3"/>
-          <p:cNvSpPr/>
-          <p:nvPr/>
-        </p:nvSpPr>
-        <p:spPr>
-          <a:xfrm>
-            <a:off x="320040" y="1005840"/>
-            <a:ext cx="2011680" cy="658368"/>
-          </a:xfrm>
-          <a:prstGeom prst="rect">
-            <a:avLst/>
-          </a:prstGeom>
-          <a:solidFill>
-            <a:schemeClr val="bg1"/>
-          </a:solidFill>
-          <a:ln w="12700">
-            <a:solidFill>
-              <a:schemeClr val="tx1"/>
-            </a:solidFill>
-            <a:prstDash val="solid"/>
-          </a:ln>
-        </p:spPr>
-      </p:sp>
-      <p:sp>
-        <p:nvSpPr>
-          <p:cNvPr id="7" name="Text 4"/>
-          <p:cNvSpPr/>
-          <p:nvPr/>
-        </p:nvSpPr>
-        <p:spPr>
-          <a:xfrm>
-            <a:off x="320040" y="1042416"/>
-            <a:ext cx="2011680" cy="329184"/>
-          </a:xfrm>
-          <a:prstGeom prst="rect">
-            <a:avLst/>
-          </a:prstGeom>
-          <a:noFill/>
-          <a:ln/>
-        </p:spPr>
-        <p:txBody>
-          <a:bodyPr wrap="square" lIns="0" tIns="0" rIns="0" bIns="0" rtlCol="0" anchor="ctr"/>
-          <a:lstStyle/>
-          <a:p>
-            <a:pPr marL="0" indent="0" algn="ctr">
-              <a:buNone/>
-            </a:pPr>
-            <a:r>
-              <a:rPr lang="en-US" sz="1000" b="1" dirty="0"/>
-              <a:t>질문 + Ground Truth</a:t>
-            </a:r>
-            <a:endParaRPr lang="en-US" sz="1000" dirty="0"/>
-          </a:p>
-        </p:txBody>
-      </p:sp>
-      <p:sp>
-        <p:nvSpPr>
-          <p:cNvPr id="8" name="Text 5"/>
-          <p:cNvSpPr/>
-          <p:nvPr/>
-        </p:nvSpPr>
-        <p:spPr>
-          <a:xfrm>
-            <a:off x="320040" y="1371600"/>
-            <a:ext cx="2011680" cy="237744"/>
-          </a:xfrm>
-          <a:prstGeom prst="rect">
-            <a:avLst/>
-          </a:prstGeom>
-          <a:noFill/>
-          <a:ln/>
-        </p:spPr>
-        <p:txBody>
-          <a:bodyPr wrap="square" lIns="0" tIns="0" rIns="0" bIns="0" rtlCol="0" anchor="ctr"/>
-          <a:lstStyle/>
-          <a:p>
-            <a:pPr marL="0" indent="0" algn="ctr">
-              <a:buNone/>
-            </a:pPr>
-            <a:r>
-              <a:rPr lang="en-US" sz="900" dirty="0"/>
-              <a:t>12개 준비</a:t>
-            </a:r>
-          </a:p>
-        </p:txBody>
-      </p:sp>
-      <p:sp>
-        <p:nvSpPr>
-          <p:cNvPr id="10" name="Shape 7"/>
-          <p:cNvSpPr/>
-          <p:nvPr/>
-        </p:nvSpPr>
-        <p:spPr>
-          <a:xfrm>
-            <a:off x="2532888" y="1005840"/>
-            <a:ext cx="2011680" cy="658368"/>
-          </a:xfrm>
-          <a:prstGeom prst="rect">
-            <a:avLst/>
-          </a:prstGeom>
-          <a:solidFill>
-            <a:schemeClr val="bg1">
-              <a:lumMod val="85000"/>
-            </a:schemeClr>
-          </a:solidFill>
-          <a:ln w="12700">
-            <a:solidFill>
-              <a:schemeClr val="tx1"/>
-            </a:solidFill>
-            <a:prstDash val="solid"/>
-          </a:ln>
-        </p:spPr>
-      </p:sp>
-      <p:sp>
-        <p:nvSpPr>
-          <p:cNvPr id="11" name="Text 8"/>
-          <p:cNvSpPr/>
-          <p:nvPr/>
-        </p:nvSpPr>
-        <p:spPr>
-          <a:xfrm>
-            <a:off x="2532888" y="1042416"/>
-            <a:ext cx="2011680" cy="329184"/>
-          </a:xfrm>
-          <a:prstGeom prst="rect">
-            <a:avLst/>
-          </a:prstGeom>
-          <a:noFill/>
-          <a:ln/>
-        </p:spPr>
-        <p:txBody>
-          <a:bodyPr wrap="square" lIns="0" tIns="0" rIns="0" bIns="0" rtlCol="0" anchor="ctr"/>
-          <a:lstStyle/>
-          <a:p>
-            <a:pPr marL="0" indent="0" algn="ctr">
-              <a:buNone/>
-            </a:pPr>
-            <a:r>
-              <a:rPr lang="en-US" sz="1000" b="1" dirty="0"/>
-              <a:t>FAISS 벡터DB</a:t>
-            </a:r>
-            <a:endParaRPr lang="en-US" sz="1000" dirty="0"/>
-          </a:p>
-        </p:txBody>
-      </p:sp>
-      <p:sp>
-        <p:nvSpPr>
-          <p:cNvPr id="12" name="Text 9"/>
-          <p:cNvSpPr/>
-          <p:nvPr/>
-        </p:nvSpPr>
-        <p:spPr>
-          <a:xfrm>
-            <a:off x="2532888" y="1371600"/>
-            <a:ext cx="2011680" cy="237744"/>
-          </a:xfrm>
-          <a:prstGeom prst="rect">
-            <a:avLst/>
-          </a:prstGeom>
-          <a:noFill/>
-          <a:ln/>
-        </p:spPr>
-        <p:txBody>
-          <a:bodyPr wrap="square" lIns="0" tIns="0" rIns="0" bIns="0" rtlCol="0" anchor="ctr"/>
-          <a:lstStyle/>
-          <a:p>
-            <a:pPr marL="0" indent="0" algn="ctr">
-              <a:buNone/>
-            </a:pPr>
-            <a:r>
-              <a:rPr lang="en-US" sz="900" dirty="0"/>
-              <a:t>문서 검색 (K=4)</a:t>
-            </a:r>
-          </a:p>
-        </p:txBody>
-      </p:sp>
-      <p:sp>
-        <p:nvSpPr>
-          <p:cNvPr id="14" name="Shape 11"/>
-          <p:cNvSpPr/>
-          <p:nvPr/>
-        </p:nvSpPr>
-        <p:spPr>
-          <a:xfrm>
-            <a:off x="4745736" y="1005840"/>
-            <a:ext cx="2011680" cy="658368"/>
-          </a:xfrm>
-          <a:prstGeom prst="rect">
-            <a:avLst/>
-          </a:prstGeom>
-          <a:solidFill>
-            <a:schemeClr val="bg1">
-              <a:lumMod val="50000"/>
-            </a:schemeClr>
-          </a:solidFill>
-          <a:ln w="12700">
-            <a:solidFill>
-              <a:schemeClr val="tx1"/>
-            </a:solidFill>
-            <a:prstDash val="solid"/>
-          </a:ln>
-        </p:spPr>
-      </p:sp>
-      <p:sp>
-        <p:nvSpPr>
-          <p:cNvPr id="15" name="Text 12"/>
-          <p:cNvSpPr/>
-          <p:nvPr/>
-        </p:nvSpPr>
-        <p:spPr>
-          <a:xfrm>
-            <a:off x="4745736" y="1042416"/>
-            <a:ext cx="2011680" cy="329184"/>
-          </a:xfrm>
-          <a:prstGeom prst="rect">
-            <a:avLst/>
-          </a:prstGeom>
-          <a:noFill/>
-          <a:ln/>
-        </p:spPr>
-        <p:txBody>
-          <a:bodyPr wrap="square" lIns="0" tIns="0" rIns="0" bIns="0" rtlCol="0" anchor="ctr"/>
-          <a:lstStyle/>
-          <a:p>
-            <a:pPr marL="0" indent="0" algn="ctr">
-              <a:buNone/>
-            </a:pPr>
-            <a:r>
-              <a:rPr lang="en-US" sz="1000" b="1" dirty="0">
-                <a:solidFill>
-                  <a:schemeClr val="bg1"/>
-                </a:solidFill>
-              </a:rPr>
-              <a:t>GPT-4o-mini</a:t>
-            </a:r>
-            <a:endParaRPr lang="en-US" sz="1000" dirty="0">
-              <a:solidFill>
-                <a:schemeClr val="bg1"/>
-              </a:solidFill>
-            </a:endParaRPr>
-          </a:p>
-        </p:txBody>
-      </p:sp>
-      <p:sp>
-        <p:nvSpPr>
-          <p:cNvPr id="16" name="Text 13"/>
-          <p:cNvSpPr/>
-          <p:nvPr/>
-        </p:nvSpPr>
-        <p:spPr>
-          <a:xfrm>
-            <a:off x="4745736" y="1371600"/>
-            <a:ext cx="2011680" cy="237744"/>
-          </a:xfrm>
-          <a:prstGeom prst="rect">
-            <a:avLst/>
-          </a:prstGeom>
-          <a:noFill/>
-          <a:ln/>
-        </p:spPr>
-        <p:txBody>
-          <a:bodyPr wrap="square" lIns="0" tIns="0" rIns="0" bIns="0" rtlCol="0" anchor="ctr"/>
-          <a:lstStyle/>
-          <a:p>
-            <a:pPr marL="0" indent="0" algn="ctr">
-              <a:buNone/>
-            </a:pPr>
-            <a:r>
-              <a:rPr lang="en-US" sz="900" dirty="0">
-                <a:solidFill>
-                  <a:schemeClr val="bg1"/>
-                </a:solidFill>
-              </a:rPr>
-              <a:t>답변 생성</a:t>
-            </a:r>
-          </a:p>
-        </p:txBody>
-      </p:sp>
-      <p:sp>
-        <p:nvSpPr>
-          <p:cNvPr id="18" name="Shape 15"/>
-          <p:cNvSpPr/>
-          <p:nvPr/>
-        </p:nvSpPr>
-        <p:spPr>
-          <a:xfrm>
-            <a:off x="6958584" y="1005840"/>
-            <a:ext cx="2011680" cy="658368"/>
-          </a:xfrm>
-          <a:prstGeom prst="rect">
-            <a:avLst/>
-          </a:prstGeom>
-          <a:solidFill>
-            <a:schemeClr val="tx1"/>
-          </a:solidFill>
-          <a:ln w="12700">
-            <a:solidFill>
-              <a:schemeClr val="tx1"/>
-            </a:solidFill>
-            <a:prstDash val="solid"/>
-          </a:ln>
-        </p:spPr>
-      </p:sp>
-      <p:sp>
-        <p:nvSpPr>
-          <p:cNvPr id="19" name="Text 16"/>
-          <p:cNvSpPr/>
-          <p:nvPr/>
-        </p:nvSpPr>
-        <p:spPr>
-          <a:xfrm>
-            <a:off x="6958584" y="1042416"/>
-            <a:ext cx="2011680" cy="329184"/>
-          </a:xfrm>
-          <a:prstGeom prst="rect">
-            <a:avLst/>
-          </a:prstGeom>
-          <a:noFill/>
-          <a:ln/>
-        </p:spPr>
-        <p:txBody>
-          <a:bodyPr wrap="square" lIns="0" tIns="0" rIns="0" bIns="0" rtlCol="0" anchor="ctr"/>
-          <a:lstStyle/>
-          <a:p>
-            <a:pPr marL="0" indent="0" algn="ctr">
-              <a:buNone/>
-            </a:pPr>
-            <a:r>
-              <a:rPr lang="en-US" sz="1000" b="1" dirty="0">
-                <a:solidFill>
-                  <a:srgbClr val="FFFFFF"/>
-                </a:solidFill>
-              </a:rPr>
-              <a:t>RAGAS evaluate()</a:t>
-            </a:r>
-            <a:endParaRPr lang="en-US" sz="1000" dirty="0"/>
-          </a:p>
-        </p:txBody>
-      </p:sp>
-      <p:sp>
-        <p:nvSpPr>
-          <p:cNvPr id="20" name="Text 17"/>
-          <p:cNvSpPr/>
-          <p:nvPr/>
-        </p:nvSpPr>
-        <p:spPr>
-          <a:xfrm>
-            <a:off x="6958584" y="1371600"/>
-            <a:ext cx="2011680" cy="237744"/>
-          </a:xfrm>
-          <a:prstGeom prst="rect">
-            <a:avLst/>
-          </a:prstGeom>
-          <a:noFill/>
-          <a:ln/>
-        </p:spPr>
-        <p:txBody>
-          <a:bodyPr wrap="square" lIns="0" tIns="0" rIns="0" bIns="0" rtlCol="0" anchor="ctr"/>
-          <a:lstStyle/>
-          <a:p>
-            <a:pPr marL="0" indent="0" algn="ctr">
-              <a:buNone/>
-            </a:pPr>
-            <a:r>
-              <a:rPr lang="en-US" sz="900" dirty="0">
-                <a:solidFill>
-                  <a:schemeClr val="bg1"/>
-                </a:solidFill>
-              </a:rPr>
-              <a:t>4가지 지표 산출</a:t>
-            </a:r>
-          </a:p>
-        </p:txBody>
-      </p:sp>
-      <p:sp>
-        <p:nvSpPr>
-          <p:cNvPr id="21" name="Shape 18"/>
-          <p:cNvSpPr/>
-          <p:nvPr/>
-        </p:nvSpPr>
-        <p:spPr>
-          <a:xfrm>
-            <a:off x="320040" y="1865376"/>
-            <a:ext cx="2011680" cy="2651760"/>
-          </a:xfrm>
-          <a:prstGeom prst="rect">
-            <a:avLst/>
-          </a:prstGeom>
-          <a:solidFill>
-            <a:schemeClr val="bg1"/>
-          </a:solidFill>
-          <a:ln w="19050">
-            <a:solidFill>
-              <a:schemeClr val="tx1"/>
-            </a:solidFill>
-            <a:prstDash val="solid"/>
-          </a:ln>
-        </p:spPr>
-      </p:sp>
-      <p:sp>
-        <p:nvSpPr>
-          <p:cNvPr id="23" name="Text 20"/>
-          <p:cNvSpPr/>
-          <p:nvPr/>
-        </p:nvSpPr>
-        <p:spPr>
-          <a:xfrm>
-            <a:off x="1069848" y="1993392"/>
-            <a:ext cx="512064" cy="420624"/>
-          </a:xfrm>
-          <a:prstGeom prst="rect">
-            <a:avLst/>
-          </a:prstGeom>
-          <a:noFill/>
-          <a:ln/>
-        </p:spPr>
-        <p:txBody>
-          <a:bodyPr wrap="square" lIns="0" tIns="0" rIns="0" bIns="0" rtlCol="0" anchor="ctr"/>
-          <a:lstStyle/>
-          <a:p>
-            <a:pPr marL="0" indent="0" algn="ctr">
-              <a:buNone/>
-            </a:pPr>
-            <a:r>
-              <a:rPr lang="en-US" sz="2200" b="1" dirty="0">
-                <a:latin typeface="Arial Black" pitchFamily="34" charset="0"/>
-                <a:ea typeface="Arial Black" pitchFamily="34" charset="-122"/>
-                <a:cs typeface="Arial Black" pitchFamily="34" charset="-120"/>
-              </a:rPr>
-              <a:t>1</a:t>
-            </a:r>
-            <a:endParaRPr lang="en-US" sz="2200" dirty="0"/>
-          </a:p>
-        </p:txBody>
-      </p:sp>
-      <p:sp>
-        <p:nvSpPr>
-          <p:cNvPr id="24" name="Text 21"/>
-          <p:cNvSpPr/>
-          <p:nvPr/>
-        </p:nvSpPr>
-        <p:spPr>
-          <a:xfrm>
-            <a:off x="320040" y="2468880"/>
-            <a:ext cx="2011680" cy="256032"/>
-          </a:xfrm>
-          <a:prstGeom prst="rect">
-            <a:avLst/>
-          </a:prstGeom>
-          <a:noFill/>
-          <a:ln/>
-        </p:spPr>
-        <p:txBody>
-          <a:bodyPr wrap="square" lIns="0" tIns="0" rIns="0" bIns="0" rtlCol="0" anchor="ctr"/>
-          <a:lstStyle/>
-          <a:p>
-            <a:pPr marL="0" indent="0" algn="ctr">
-              <a:buNone/>
-            </a:pPr>
-            <a:r>
-              <a:rPr lang="en-US" sz="1000" b="1" dirty="0"/>
-              <a:t>Faithfulness</a:t>
-            </a:r>
-            <a:endParaRPr lang="en-US" sz="1000" dirty="0"/>
-          </a:p>
-        </p:txBody>
-      </p:sp>
-      <p:sp>
-        <p:nvSpPr>
-          <p:cNvPr id="25" name="Text 22"/>
-          <p:cNvSpPr/>
-          <p:nvPr/>
-        </p:nvSpPr>
-        <p:spPr>
-          <a:xfrm>
-            <a:off x="320040" y="2706624"/>
-            <a:ext cx="2011680" cy="201168"/>
-          </a:xfrm>
-          <a:prstGeom prst="rect">
-            <a:avLst/>
-          </a:prstGeom>
-          <a:noFill/>
-          <a:ln/>
-        </p:spPr>
-        <p:txBody>
-          <a:bodyPr wrap="square" lIns="0" tIns="0" rIns="0" bIns="0" rtlCol="0" anchor="ctr"/>
-          <a:lstStyle/>
-          <a:p>
-            <a:pPr marL="0" indent="0" algn="ctr">
-              <a:buNone/>
-            </a:pPr>
-            <a:r>
-              <a:rPr lang="en-US" sz="900" dirty="0"/>
-              <a:t>충실도</a:t>
-            </a:r>
-          </a:p>
-        </p:txBody>
-      </p:sp>
-      <p:sp>
-        <p:nvSpPr>
-          <p:cNvPr id="26" name="Text 23"/>
-          <p:cNvSpPr/>
-          <p:nvPr/>
-        </p:nvSpPr>
-        <p:spPr>
-          <a:xfrm>
-            <a:off x="411480" y="3139948"/>
-            <a:ext cx="1828800" cy="640080"/>
-          </a:xfrm>
-          <a:prstGeom prst="rect">
-            <a:avLst/>
-          </a:prstGeom>
-          <a:noFill/>
-          <a:ln/>
-        </p:spPr>
-        <p:txBody>
-          <a:bodyPr wrap="square" lIns="0" tIns="0" rIns="0" bIns="0" rtlCol="0" anchor="ctr"/>
-          <a:lstStyle/>
-          <a:p>
-            <a:pPr marL="0" indent="0" algn="ctr">
-              <a:buNone/>
-            </a:pPr>
-            <a:r>
-              <a:rPr lang="en-US" sz="900" dirty="0"/>
-              <a:t>답변이 검색 문서에 근거?</a:t>
-            </a:r>
-          </a:p>
-          <a:p>
-            <a:pPr marL="0" indent="0" algn="ctr">
-              <a:buNone/>
-            </a:pPr>
-            <a:r>
-              <a:rPr lang="en-US" sz="900" dirty="0"/>
-              <a:t>환각 방지 핵심 지표</a:t>
-            </a:r>
-          </a:p>
-        </p:txBody>
-      </p:sp>
-      <p:sp>
-        <p:nvSpPr>
-          <p:cNvPr id="27" name="Text 24"/>
-          <p:cNvSpPr/>
-          <p:nvPr/>
-        </p:nvSpPr>
-        <p:spPr>
-          <a:xfrm>
-            <a:off x="411480" y="4197096"/>
-            <a:ext cx="1828800" cy="219456"/>
-          </a:xfrm>
-          <a:prstGeom prst="rect">
-            <a:avLst/>
-          </a:prstGeom>
-          <a:noFill/>
-          <a:ln/>
-        </p:spPr>
-        <p:txBody>
-          <a:bodyPr wrap="square" lIns="0" tIns="0" rIns="0" bIns="0" rtlCol="0" anchor="ctr"/>
-          <a:lstStyle/>
-          <a:p>
-            <a:pPr marL="0" indent="0" algn="ctr">
-              <a:buNone/>
-            </a:pPr>
-            <a:r>
-              <a:rPr lang="en-US" sz="750" dirty="0"/>
-              <a:t>기준: 0.8↑ 우수 / 0.6↓ 개선</a:t>
-            </a:r>
-          </a:p>
-        </p:txBody>
-      </p:sp>
-      <p:sp>
-        <p:nvSpPr>
-          <p:cNvPr id="28" name="Shape 25"/>
-          <p:cNvSpPr/>
-          <p:nvPr/>
-        </p:nvSpPr>
-        <p:spPr>
-          <a:xfrm>
-            <a:off x="2532888" y="1865376"/>
-            <a:ext cx="2011680" cy="2651760"/>
-          </a:xfrm>
-          <a:prstGeom prst="rect">
-            <a:avLst/>
-          </a:prstGeom>
-          <a:solidFill>
-            <a:schemeClr val="bg1">
-              <a:lumMod val="85000"/>
-            </a:schemeClr>
-          </a:solidFill>
-          <a:ln w="19050">
-            <a:solidFill>
-              <a:schemeClr val="tx1"/>
-            </a:solidFill>
-            <a:prstDash val="solid"/>
-          </a:ln>
-        </p:spPr>
-      </p:sp>
-      <p:sp>
-        <p:nvSpPr>
-          <p:cNvPr id="30" name="Text 27"/>
-          <p:cNvSpPr/>
-          <p:nvPr/>
-        </p:nvSpPr>
-        <p:spPr>
-          <a:xfrm>
-            <a:off x="3282696" y="1993392"/>
-            <a:ext cx="512064" cy="420624"/>
-          </a:xfrm>
-          <a:prstGeom prst="rect">
-            <a:avLst/>
-          </a:prstGeom>
-          <a:noFill/>
-          <a:ln/>
-        </p:spPr>
-        <p:txBody>
-          <a:bodyPr wrap="square" lIns="0" tIns="0" rIns="0" bIns="0" rtlCol="0" anchor="ctr"/>
-          <a:lstStyle/>
-          <a:p>
-            <a:pPr marL="0" indent="0" algn="ctr">
-              <a:buNone/>
-            </a:pPr>
-            <a:r>
-              <a:rPr lang="en-US" sz="2200" b="1" dirty="0">
-                <a:latin typeface="Arial Black" pitchFamily="34" charset="0"/>
-                <a:ea typeface="Arial Black" pitchFamily="34" charset="-122"/>
-                <a:cs typeface="Arial Black" pitchFamily="34" charset="-120"/>
-              </a:rPr>
-              <a:t>2</a:t>
-            </a:r>
-            <a:endParaRPr lang="en-US" sz="2200" dirty="0"/>
-          </a:p>
-        </p:txBody>
-      </p:sp>
-      <p:sp>
-        <p:nvSpPr>
-          <p:cNvPr id="31" name="Text 28"/>
-          <p:cNvSpPr/>
-          <p:nvPr/>
-        </p:nvSpPr>
-        <p:spPr>
-          <a:xfrm>
-            <a:off x="2532888" y="2468880"/>
-            <a:ext cx="2011680" cy="256032"/>
-          </a:xfrm>
-          <a:prstGeom prst="rect">
-            <a:avLst/>
-          </a:prstGeom>
-          <a:noFill/>
-          <a:ln/>
-        </p:spPr>
-        <p:txBody>
-          <a:bodyPr wrap="square" lIns="0" tIns="0" rIns="0" bIns="0" rtlCol="0" anchor="ctr"/>
-          <a:lstStyle/>
-          <a:p>
-            <a:pPr marL="0" indent="0" algn="ctr">
-              <a:buNone/>
-            </a:pPr>
-            <a:r>
-              <a:rPr lang="en-US" sz="1000" b="1" dirty="0"/>
-              <a:t>Answer Relevancy</a:t>
-            </a:r>
-            <a:endParaRPr lang="en-US" sz="1000" dirty="0"/>
-          </a:p>
-        </p:txBody>
-      </p:sp>
-      <p:sp>
-        <p:nvSpPr>
-          <p:cNvPr id="32" name="Text 29"/>
-          <p:cNvSpPr/>
-          <p:nvPr/>
-        </p:nvSpPr>
-        <p:spPr>
-          <a:xfrm>
-            <a:off x="2532888" y="2706624"/>
-            <a:ext cx="2011680" cy="201168"/>
-          </a:xfrm>
-          <a:prstGeom prst="rect">
-            <a:avLst/>
-          </a:prstGeom>
-          <a:noFill/>
-          <a:ln/>
-        </p:spPr>
-        <p:txBody>
-          <a:bodyPr wrap="square" lIns="0" tIns="0" rIns="0" bIns="0" rtlCol="0" anchor="ctr"/>
-          <a:lstStyle/>
-          <a:p>
-            <a:pPr marL="0" indent="0" algn="ctr">
-              <a:buNone/>
-            </a:pPr>
-            <a:r>
-              <a:rPr lang="en-US" sz="900" dirty="0"/>
-              <a:t>답변 관련성</a:t>
-            </a:r>
-          </a:p>
-        </p:txBody>
-      </p:sp>
-      <p:sp>
-        <p:nvSpPr>
-          <p:cNvPr id="33" name="Text 30"/>
-          <p:cNvSpPr/>
-          <p:nvPr/>
-        </p:nvSpPr>
-        <p:spPr>
-          <a:xfrm>
-            <a:off x="2624328" y="3142742"/>
-            <a:ext cx="1828800" cy="640080"/>
-          </a:xfrm>
-          <a:prstGeom prst="rect">
-            <a:avLst/>
-          </a:prstGeom>
-          <a:noFill/>
-          <a:ln/>
-        </p:spPr>
-        <p:txBody>
-          <a:bodyPr wrap="square" lIns="0" tIns="0" rIns="0" bIns="0" rtlCol="0" anchor="ctr"/>
-          <a:lstStyle/>
-          <a:p>
-            <a:pPr marL="0" indent="0" algn="ctr">
-              <a:buNone/>
-            </a:pPr>
-            <a:r>
-              <a:rPr lang="en-US" sz="900" dirty="0"/>
-              <a:t>답변이 질문에 얼마나</a:t>
-            </a:r>
-          </a:p>
-          <a:p>
-            <a:pPr marL="0" indent="0" algn="ctr">
-              <a:buNone/>
-            </a:pPr>
-            <a:r>
-              <a:rPr lang="en-US" sz="900" dirty="0"/>
-              <a:t>직접 대응하는가</a:t>
-            </a:r>
-          </a:p>
-        </p:txBody>
-      </p:sp>
-      <p:sp>
-        <p:nvSpPr>
-          <p:cNvPr id="34" name="Text 31"/>
-          <p:cNvSpPr/>
-          <p:nvPr/>
-        </p:nvSpPr>
-        <p:spPr>
-          <a:xfrm>
-            <a:off x="2624328" y="4197096"/>
-            <a:ext cx="1828800" cy="219456"/>
-          </a:xfrm>
-          <a:prstGeom prst="rect">
-            <a:avLst/>
-          </a:prstGeom>
-          <a:noFill/>
-          <a:ln/>
-        </p:spPr>
-        <p:txBody>
-          <a:bodyPr wrap="square" lIns="0" tIns="0" rIns="0" bIns="0" rtlCol="0" anchor="ctr"/>
-          <a:lstStyle/>
-          <a:p>
-            <a:pPr marL="0" indent="0" algn="ctr">
-              <a:buNone/>
-            </a:pPr>
-            <a:r>
-              <a:rPr lang="en-US" sz="750" dirty="0"/>
-              <a:t>기준: 0.8↑ 우수 / 0.6↓ 개선</a:t>
-            </a:r>
-          </a:p>
-        </p:txBody>
-      </p:sp>
-      <p:sp>
-        <p:nvSpPr>
-          <p:cNvPr id="35" name="Shape 32"/>
-          <p:cNvSpPr/>
-          <p:nvPr/>
-        </p:nvSpPr>
-        <p:spPr>
-          <a:xfrm>
-            <a:off x="4745736" y="1865376"/>
-            <a:ext cx="2011680" cy="2651760"/>
-          </a:xfrm>
-          <a:prstGeom prst="rect">
-            <a:avLst/>
-          </a:prstGeom>
-          <a:solidFill>
-            <a:schemeClr val="bg1">
-              <a:lumMod val="50000"/>
-            </a:schemeClr>
-          </a:solidFill>
-          <a:ln w="19050">
-            <a:solidFill>
-              <a:schemeClr val="tx1"/>
-            </a:solidFill>
-            <a:prstDash val="solid"/>
-          </a:ln>
-        </p:spPr>
-      </p:sp>
-      <p:sp>
-        <p:nvSpPr>
-          <p:cNvPr id="37" name="Text 34"/>
-          <p:cNvSpPr/>
-          <p:nvPr/>
-        </p:nvSpPr>
-        <p:spPr>
-          <a:xfrm>
-            <a:off x="5495544" y="1993392"/>
-            <a:ext cx="512064" cy="420624"/>
-          </a:xfrm>
-          <a:prstGeom prst="rect">
-            <a:avLst/>
-          </a:prstGeom>
-          <a:noFill/>
-          <a:ln/>
-        </p:spPr>
-        <p:txBody>
-          <a:bodyPr wrap="square" lIns="0" tIns="0" rIns="0" bIns="0" rtlCol="0" anchor="ctr"/>
-          <a:lstStyle/>
-          <a:p>
-            <a:pPr marL="0" indent="0" algn="ctr">
-              <a:buNone/>
-            </a:pPr>
-            <a:r>
-              <a:rPr lang="en-US" sz="2200" b="1" dirty="0">
-                <a:solidFill>
-                  <a:schemeClr val="bg1"/>
-                </a:solidFill>
-                <a:latin typeface="Arial Black" pitchFamily="34" charset="0"/>
-                <a:ea typeface="Arial Black" pitchFamily="34" charset="-122"/>
-                <a:cs typeface="Arial Black" pitchFamily="34" charset="-120"/>
-              </a:rPr>
-              <a:t>3</a:t>
-            </a:r>
-            <a:endParaRPr lang="en-US" sz="2200" dirty="0">
-              <a:solidFill>
-                <a:schemeClr val="bg1"/>
-              </a:solidFill>
-            </a:endParaRPr>
-          </a:p>
-        </p:txBody>
-      </p:sp>
-      <p:sp>
-        <p:nvSpPr>
-          <p:cNvPr id="38" name="Text 35"/>
-          <p:cNvSpPr/>
-          <p:nvPr/>
-        </p:nvSpPr>
-        <p:spPr>
-          <a:xfrm>
-            <a:off x="4745736" y="2468880"/>
-            <a:ext cx="2011680" cy="256032"/>
-          </a:xfrm>
-          <a:prstGeom prst="rect">
-            <a:avLst/>
-          </a:prstGeom>
-          <a:noFill/>
-          <a:ln/>
-        </p:spPr>
-        <p:txBody>
-          <a:bodyPr wrap="square" lIns="0" tIns="0" rIns="0" bIns="0" rtlCol="0" anchor="ctr"/>
-          <a:lstStyle/>
-          <a:p>
-            <a:pPr marL="0" indent="0" algn="ctr">
-              <a:buNone/>
-            </a:pPr>
-            <a:r>
-              <a:rPr lang="en-US" sz="1000" b="1" dirty="0">
-                <a:solidFill>
-                  <a:schemeClr val="bg1"/>
-                </a:solidFill>
-              </a:rPr>
-              <a:t>Context Precision</a:t>
-            </a:r>
-            <a:endParaRPr lang="en-US" sz="1000" dirty="0">
-              <a:solidFill>
-                <a:schemeClr val="bg1"/>
-              </a:solidFill>
-            </a:endParaRPr>
-          </a:p>
-        </p:txBody>
-      </p:sp>
-      <p:sp>
-        <p:nvSpPr>
-          <p:cNvPr id="39" name="Text 36"/>
-          <p:cNvSpPr/>
-          <p:nvPr/>
-        </p:nvSpPr>
-        <p:spPr>
-          <a:xfrm>
-            <a:off x="4745736" y="2706624"/>
-            <a:ext cx="2011680" cy="201168"/>
-          </a:xfrm>
-          <a:prstGeom prst="rect">
-            <a:avLst/>
-          </a:prstGeom>
-          <a:noFill/>
-          <a:ln/>
-        </p:spPr>
-        <p:txBody>
-          <a:bodyPr wrap="square" lIns="0" tIns="0" rIns="0" bIns="0" rtlCol="0" anchor="ctr"/>
-          <a:lstStyle/>
-          <a:p>
-            <a:pPr marL="0" indent="0" algn="ctr">
-              <a:buNone/>
-            </a:pPr>
-            <a:r>
-              <a:rPr lang="en-US" sz="900" dirty="0">
-                <a:solidFill>
-                  <a:schemeClr val="bg1"/>
-                </a:solidFill>
-              </a:rPr>
-              <a:t>문맥 정밀도</a:t>
-            </a:r>
-          </a:p>
-        </p:txBody>
-      </p:sp>
-      <p:sp>
-        <p:nvSpPr>
-          <p:cNvPr id="40" name="Text 37"/>
-          <p:cNvSpPr/>
-          <p:nvPr/>
-        </p:nvSpPr>
-        <p:spPr>
-          <a:xfrm>
-            <a:off x="4837176" y="3142742"/>
-            <a:ext cx="1828800" cy="640080"/>
-          </a:xfrm>
-          <a:prstGeom prst="rect">
-            <a:avLst/>
-          </a:prstGeom>
-          <a:noFill/>
-          <a:ln/>
-        </p:spPr>
-        <p:txBody>
-          <a:bodyPr wrap="square" lIns="0" tIns="0" rIns="0" bIns="0" rtlCol="0" anchor="ctr"/>
-          <a:lstStyle/>
-          <a:p>
-            <a:pPr marL="0" indent="0" algn="ctr">
-              <a:buNone/>
-            </a:pPr>
-            <a:r>
-              <a:rPr lang="en-US" sz="900" dirty="0">
-                <a:solidFill>
-                  <a:schemeClr val="bg1"/>
-                </a:solidFill>
-              </a:rPr>
-              <a:t>검색 청크 중 관련 있는</a:t>
-            </a:r>
-          </a:p>
-          <a:p>
-            <a:pPr marL="0" indent="0" algn="ctr">
-              <a:buNone/>
-            </a:pPr>
-            <a:r>
-              <a:rPr lang="en-US" sz="900" dirty="0">
-                <a:solidFill>
-                  <a:schemeClr val="bg1"/>
-                </a:solidFill>
-              </a:rPr>
-              <a:t>것이 상위에 있는가</a:t>
-            </a:r>
-          </a:p>
-        </p:txBody>
-      </p:sp>
-      <p:sp>
-        <p:nvSpPr>
-          <p:cNvPr id="41" name="Text 38"/>
-          <p:cNvSpPr/>
-          <p:nvPr/>
-        </p:nvSpPr>
-        <p:spPr>
-          <a:xfrm>
-            <a:off x="4837176" y="4197096"/>
-            <a:ext cx="1828800" cy="219456"/>
-          </a:xfrm>
-          <a:prstGeom prst="rect">
-            <a:avLst/>
-          </a:prstGeom>
-          <a:noFill/>
-          <a:ln/>
-        </p:spPr>
-        <p:txBody>
-          <a:bodyPr wrap="square" lIns="0" tIns="0" rIns="0" bIns="0" rtlCol="0" anchor="ctr"/>
-          <a:lstStyle/>
-          <a:p>
-            <a:pPr marL="0" indent="0" algn="ctr">
-              <a:buNone/>
-            </a:pPr>
-            <a:r>
-              <a:rPr lang="en-US" sz="750" dirty="0">
-                <a:solidFill>
-                  <a:schemeClr val="bg1"/>
-                </a:solidFill>
-              </a:rPr>
-              <a:t>기준: 0.8↑ 우수 / 0.6↓ 개선</a:t>
-            </a:r>
-          </a:p>
-        </p:txBody>
-      </p:sp>
-      <p:sp>
-        <p:nvSpPr>
-          <p:cNvPr id="42" name="Shape 39"/>
-          <p:cNvSpPr/>
-          <p:nvPr/>
-        </p:nvSpPr>
-        <p:spPr>
-          <a:xfrm>
-            <a:off x="6958584" y="1865376"/>
-            <a:ext cx="2011680" cy="2651760"/>
-          </a:xfrm>
-          <a:prstGeom prst="rect">
-            <a:avLst/>
-          </a:prstGeom>
-          <a:solidFill>
-            <a:schemeClr val="tx1"/>
-          </a:solidFill>
-          <a:ln w="19050">
-            <a:solidFill>
-              <a:schemeClr val="tx1"/>
-            </a:solidFill>
-            <a:prstDash val="solid"/>
-          </a:ln>
-        </p:spPr>
-      </p:sp>
-      <p:sp>
-        <p:nvSpPr>
-          <p:cNvPr id="44" name="Text 41"/>
-          <p:cNvSpPr/>
-          <p:nvPr/>
-        </p:nvSpPr>
-        <p:spPr>
-          <a:xfrm>
-            <a:off x="7708392" y="1993392"/>
-            <a:ext cx="512064" cy="420624"/>
-          </a:xfrm>
-          <a:prstGeom prst="rect">
-            <a:avLst/>
-          </a:prstGeom>
-          <a:noFill/>
-          <a:ln/>
-        </p:spPr>
-        <p:txBody>
-          <a:bodyPr wrap="square" lIns="0" tIns="0" rIns="0" bIns="0" rtlCol="0" anchor="ctr"/>
-          <a:lstStyle/>
-          <a:p>
-            <a:pPr marL="0" indent="0" algn="ctr">
-              <a:buNone/>
-            </a:pPr>
-            <a:r>
-              <a:rPr lang="en-US" sz="2200" b="1" dirty="0">
-                <a:solidFill>
-                  <a:schemeClr val="bg1"/>
-                </a:solidFill>
-                <a:latin typeface="Arial Black" pitchFamily="34" charset="0"/>
-                <a:ea typeface="Arial Black" pitchFamily="34" charset="-122"/>
-                <a:cs typeface="Arial Black" pitchFamily="34" charset="-120"/>
-              </a:rPr>
-              <a:t>4</a:t>
-            </a:r>
-            <a:endParaRPr lang="en-US" sz="2200" dirty="0">
-              <a:solidFill>
-                <a:schemeClr val="bg1"/>
-              </a:solidFill>
-            </a:endParaRPr>
-          </a:p>
-        </p:txBody>
-      </p:sp>
-      <p:sp>
-        <p:nvSpPr>
-          <p:cNvPr id="45" name="Text 42"/>
-          <p:cNvSpPr/>
-          <p:nvPr/>
-        </p:nvSpPr>
-        <p:spPr>
-          <a:xfrm>
-            <a:off x="6958584" y="2468880"/>
-            <a:ext cx="2011680" cy="256032"/>
-          </a:xfrm>
-          <a:prstGeom prst="rect">
-            <a:avLst/>
-          </a:prstGeom>
-          <a:noFill/>
-          <a:ln/>
-        </p:spPr>
-        <p:txBody>
-          <a:bodyPr wrap="square" lIns="0" tIns="0" rIns="0" bIns="0" rtlCol="0" anchor="ctr"/>
-          <a:lstStyle/>
-          <a:p>
-            <a:pPr marL="0" indent="0" algn="ctr">
-              <a:buNone/>
-            </a:pPr>
-            <a:r>
-              <a:rPr lang="en-US" sz="1000" b="1" dirty="0">
-                <a:solidFill>
-                  <a:schemeClr val="bg1"/>
-                </a:solidFill>
-              </a:rPr>
-              <a:t>Context Recall</a:t>
-            </a:r>
-            <a:endParaRPr lang="en-US" sz="1000" dirty="0">
-              <a:solidFill>
-                <a:schemeClr val="bg1"/>
-              </a:solidFill>
-            </a:endParaRPr>
-          </a:p>
-        </p:txBody>
-      </p:sp>
-      <p:sp>
-        <p:nvSpPr>
-          <p:cNvPr id="46" name="Text 43"/>
-          <p:cNvSpPr/>
-          <p:nvPr/>
-        </p:nvSpPr>
-        <p:spPr>
-          <a:xfrm>
-            <a:off x="6958584" y="2706624"/>
-            <a:ext cx="2011680" cy="201168"/>
-          </a:xfrm>
-          <a:prstGeom prst="rect">
-            <a:avLst/>
-          </a:prstGeom>
-          <a:noFill/>
-          <a:ln/>
-        </p:spPr>
-        <p:txBody>
-          <a:bodyPr wrap="square" lIns="0" tIns="0" rIns="0" bIns="0" rtlCol="0" anchor="ctr"/>
-          <a:lstStyle/>
-          <a:p>
-            <a:pPr marL="0" indent="0" algn="ctr">
-              <a:buNone/>
-            </a:pPr>
-            <a:r>
-              <a:rPr lang="en-US" sz="900" dirty="0">
-                <a:solidFill>
-                  <a:schemeClr val="bg1"/>
-                </a:solidFill>
-              </a:rPr>
-              <a:t>문맥 재현율</a:t>
-            </a:r>
-          </a:p>
-        </p:txBody>
-      </p:sp>
-      <p:sp>
-        <p:nvSpPr>
-          <p:cNvPr id="47" name="Text 44"/>
-          <p:cNvSpPr/>
-          <p:nvPr/>
-        </p:nvSpPr>
-        <p:spPr>
-          <a:xfrm>
-            <a:off x="7050024" y="2980944"/>
-            <a:ext cx="1828800" cy="640080"/>
-          </a:xfrm>
-          <a:prstGeom prst="rect">
-            <a:avLst/>
-          </a:prstGeom>
-          <a:noFill/>
-          <a:ln/>
-        </p:spPr>
-        <p:txBody>
-          <a:bodyPr wrap="square" lIns="0" tIns="0" rIns="0" bIns="0" rtlCol="0" anchor="ctr"/>
-          <a:lstStyle/>
-          <a:p>
-            <a:pPr marL="0" indent="0" algn="ctr">
-              <a:buNone/>
-            </a:pPr>
-            <a:r>
-              <a:rPr lang="en-US" sz="900" dirty="0">
-                <a:solidFill>
-                  <a:schemeClr val="bg1"/>
-                </a:solidFill>
-              </a:rPr>
-              <a:t>정답에 필요한 정보가</a:t>
-            </a:r>
-          </a:p>
-          <a:p>
-            <a:pPr marL="0" indent="0" algn="ctr">
-              <a:buNone/>
-            </a:pPr>
-            <a:r>
-              <a:rPr lang="en-US" sz="900" dirty="0">
-                <a:solidFill>
-                  <a:schemeClr val="bg1"/>
-                </a:solidFill>
-              </a:rPr>
-              <a:t>검색 문맥에 포함됐는가</a:t>
-            </a:r>
-          </a:p>
-        </p:txBody>
-      </p:sp>
-      <p:sp>
-        <p:nvSpPr>
-          <p:cNvPr id="48" name="Text 45"/>
-          <p:cNvSpPr/>
-          <p:nvPr/>
-        </p:nvSpPr>
-        <p:spPr>
-          <a:xfrm>
-            <a:off x="7050024" y="4197096"/>
-            <a:ext cx="1828800" cy="219456"/>
-          </a:xfrm>
-          <a:prstGeom prst="rect">
-            <a:avLst/>
-          </a:prstGeom>
-          <a:noFill/>
-          <a:ln/>
-        </p:spPr>
-        <p:txBody>
-          <a:bodyPr wrap="square" lIns="0" tIns="0" rIns="0" bIns="0" rtlCol="0" anchor="ctr"/>
-          <a:lstStyle/>
-          <a:p>
-            <a:pPr marL="0" indent="0" algn="ctr">
-              <a:buNone/>
-            </a:pPr>
-            <a:r>
-              <a:rPr lang="en-US" sz="750" dirty="0">
-                <a:solidFill>
-                  <a:schemeClr val="bg1"/>
-                </a:solidFill>
-              </a:rPr>
-              <a:t>기준: 0.8↑ 우수 / 0.6↓ 개선</a:t>
-            </a:r>
-          </a:p>
-        </p:txBody>
-      </p:sp>
-    </p:spTree>
-  </p:cSld>
-  <p:clrMapOvr>
-    <a:masterClrMapping/>
-  </p:clrMapOvr>
-  <p:timing>
-    <p:tnLst>
-      <p:par>
-        <p:cTn id="1" dur="indefinite" restart="never" nodeType="tmRoot"/>
-      </p:par>
-    </p:tnLst>
-  </p:timing>
-</p:sld>
-</file>
-
-<file path=ppt/slides/slide8.xml><?xml version="1.0" encoding="utf-8"?>
-<p:sld xmlns:a="http://schemas.openxmlformats.org/drawingml/2006/main" xmlns:r="http://schemas.openxmlformats.org/officeDocument/2006/relationships" xmlns:p="http://schemas.openxmlformats.org/presentationml/2006/main">
-  <p:cSld name="Slide 8">
-    <p:bg>
-      <p:bgPr>
-        <a:solidFill>
-          <a:srgbClr val="EBEBEB"/>
-        </a:solidFill>
-        <a:effectLst/>
-      </p:bgPr>
-    </p:bg>
-    <p:spTree>
-      <p:nvGrpSpPr>
-        <p:cNvPr id="1" name=""/>
-        <p:cNvGrpSpPr/>
-        <p:nvPr/>
-      </p:nvGrpSpPr>
-      <p:grpSpPr>
-        <a:xfrm>
-          <a:off x="0" y="0"/>
-          <a:ext cx="0" cy="0"/>
-          <a:chOff x="0" y="0"/>
-          <a:chExt cx="0" cy="0"/>
-        </a:xfrm>
-      </p:grpSpPr>
-      <p:sp>
-        <p:nvSpPr>
-          <p:cNvPr id="8" name="Freeform 5"/>
-          <p:cNvSpPr/>
-          <p:nvPr/>
-        </p:nvSpPr>
-        <p:spPr>
-          <a:xfrm>
-            <a:off x="-3488239" y="1853448"/>
-            <a:ext cx="7616557" cy="7815497"/>
+          <p:cNvPr id="49" name="Freeform 5"/>
+          <p:cNvSpPr/>
+          <p:nvPr/>
+        </p:nvSpPr>
+        <p:spPr>
+          <a:xfrm>
+            <a:off x="-1942903" y="2542032"/>
+            <a:ext cx="4708765" cy="4990001"/>
           </a:xfrm>
           <a:custGeom>
             <a:avLst/>
@@ -10916,7 +11001,7 @@
             <a:blip r:embed="rId3">
               <a:extLst>
                 <a:ext uri="{96DAC541-7B7A-43D3-8B79-37D633B846F1}">
-                  <asvg:svgBlip xmlns:asvg="http://schemas.microsoft.com/office/drawing/2016/SVG/main" xmlns="" r:embed="rId8"/>
+                  <asvg:svgBlip xmlns="" xmlns:asvg="http://schemas.microsoft.com/office/drawing/2016/SVG/main" r:embed="rId8"/>
                 </a:ext>
               </a:extLst>
             </a:blip>
@@ -10928,13 +11013,1374 @@
       </p:sp>
       <p:sp>
         <p:nvSpPr>
-          <p:cNvPr id="7" name="Freeform 5"/>
-          <p:cNvSpPr/>
-          <p:nvPr/>
-        </p:nvSpPr>
-        <p:spPr>
-          <a:xfrm>
-            <a:off x="7046535" y="-645207"/>
+          <p:cNvPr id="17" name="Shape 14"/>
+          <p:cNvSpPr/>
+          <p:nvPr/>
+        </p:nvSpPr>
+        <p:spPr>
+          <a:xfrm>
+            <a:off x="6757416" y="1261872"/>
+            <a:ext cx="201168" cy="128016"/>
+          </a:xfrm>
+          <a:prstGeom prst="rect">
+            <a:avLst/>
+          </a:prstGeom>
+          <a:solidFill>
+            <a:srgbClr val="AAAAAA"/>
+          </a:solidFill>
+          <a:ln/>
+        </p:spPr>
+      </p:sp>
+      <p:sp>
+        <p:nvSpPr>
+          <p:cNvPr id="13" name="Shape 10"/>
+          <p:cNvSpPr/>
+          <p:nvPr/>
+        </p:nvSpPr>
+        <p:spPr>
+          <a:xfrm>
+            <a:off x="4544568" y="1261872"/>
+            <a:ext cx="201168" cy="128016"/>
+          </a:xfrm>
+          <a:prstGeom prst="rect">
+            <a:avLst/>
+          </a:prstGeom>
+          <a:solidFill>
+            <a:srgbClr val="AAAAAA"/>
+          </a:solidFill>
+          <a:ln/>
+        </p:spPr>
+      </p:sp>
+      <p:sp>
+        <p:nvSpPr>
+          <p:cNvPr id="9" name="Shape 6"/>
+          <p:cNvSpPr/>
+          <p:nvPr/>
+        </p:nvSpPr>
+        <p:spPr>
+          <a:xfrm>
+            <a:off x="2331720" y="1261872"/>
+            <a:ext cx="201168" cy="128016"/>
+          </a:xfrm>
+          <a:prstGeom prst="rect">
+            <a:avLst/>
+          </a:prstGeom>
+          <a:solidFill>
+            <a:srgbClr val="AAAAAA"/>
+          </a:solidFill>
+          <a:ln/>
+        </p:spPr>
+      </p:sp>
+      <p:sp>
+        <p:nvSpPr>
+          <p:cNvPr id="5" name="Text 2"/>
+          <p:cNvSpPr/>
+          <p:nvPr/>
+        </p:nvSpPr>
+        <p:spPr>
+          <a:xfrm>
+            <a:off x="320040" y="212598"/>
+            <a:ext cx="8229600" cy="530352"/>
+          </a:xfrm>
+          <a:prstGeom prst="rect">
+            <a:avLst/>
+          </a:prstGeom>
+          <a:noFill/>
+          <a:ln/>
+        </p:spPr>
+        <p:txBody>
+          <a:bodyPr wrap="square" lIns="0" tIns="0" rIns="0" bIns="0" rtlCol="0" anchor="ctr"/>
+          <a:lstStyle/>
+          <a:p>
+            <a:pPr marL="0" indent="0">
+              <a:buNone/>
+            </a:pPr>
+            <a:r>
+              <a:rPr lang="en-US" sz="2600" b="1" dirty="0">
+                <a:solidFill>
+                  <a:srgbClr val="1A1A1A"/>
+                </a:solidFill>
+                <a:latin typeface="Arial Black" pitchFamily="34" charset="0"/>
+                <a:ea typeface="Arial Black" pitchFamily="34" charset="-122"/>
+                <a:cs typeface="Arial Black" pitchFamily="34" charset="-120"/>
+              </a:rPr>
+              <a:t>RAGAS 평가 — 데이터셋 &amp; 방법론</a:t>
+            </a:r>
+            <a:endParaRPr lang="en-US" sz="2600" dirty="0"/>
+          </a:p>
+        </p:txBody>
+      </p:sp>
+      <p:sp>
+        <p:nvSpPr>
+          <p:cNvPr id="6" name="Shape 3"/>
+          <p:cNvSpPr/>
+          <p:nvPr/>
+        </p:nvSpPr>
+        <p:spPr>
+          <a:xfrm>
+            <a:off x="320040" y="1005840"/>
+            <a:ext cx="2011680" cy="658368"/>
+          </a:xfrm>
+          <a:prstGeom prst="rect">
+            <a:avLst/>
+          </a:prstGeom>
+          <a:solidFill>
+            <a:schemeClr val="bg1"/>
+          </a:solidFill>
+          <a:ln w="12700">
+            <a:solidFill>
+              <a:schemeClr val="tx1"/>
+            </a:solidFill>
+            <a:prstDash val="solid"/>
+          </a:ln>
+        </p:spPr>
+      </p:sp>
+      <p:sp>
+        <p:nvSpPr>
+          <p:cNvPr id="7" name="Text 4"/>
+          <p:cNvSpPr/>
+          <p:nvPr/>
+        </p:nvSpPr>
+        <p:spPr>
+          <a:xfrm>
+            <a:off x="320040" y="1042416"/>
+            <a:ext cx="2011680" cy="329184"/>
+          </a:xfrm>
+          <a:prstGeom prst="rect">
+            <a:avLst/>
+          </a:prstGeom>
+          <a:noFill/>
+          <a:ln/>
+        </p:spPr>
+        <p:txBody>
+          <a:bodyPr wrap="square" lIns="0" tIns="0" rIns="0" bIns="0" rtlCol="0" anchor="ctr"/>
+          <a:lstStyle/>
+          <a:p>
+            <a:pPr marL="0" indent="0" algn="ctr">
+              <a:buNone/>
+            </a:pPr>
+            <a:r>
+              <a:rPr lang="en-US" sz="1000" b="1" dirty="0"/>
+              <a:t>질문 + Ground Truth</a:t>
+            </a:r>
+            <a:endParaRPr lang="en-US" sz="1000" dirty="0"/>
+          </a:p>
+        </p:txBody>
+      </p:sp>
+      <p:sp>
+        <p:nvSpPr>
+          <p:cNvPr id="8" name="Text 5"/>
+          <p:cNvSpPr/>
+          <p:nvPr/>
+        </p:nvSpPr>
+        <p:spPr>
+          <a:xfrm>
+            <a:off x="320040" y="1371600"/>
+            <a:ext cx="2011680" cy="237744"/>
+          </a:xfrm>
+          <a:prstGeom prst="rect">
+            <a:avLst/>
+          </a:prstGeom>
+          <a:noFill/>
+          <a:ln/>
+        </p:spPr>
+        <p:txBody>
+          <a:bodyPr wrap="square" lIns="0" tIns="0" rIns="0" bIns="0" rtlCol="0" anchor="ctr"/>
+          <a:lstStyle/>
+          <a:p>
+            <a:pPr marL="0" indent="0" algn="ctr">
+              <a:buNone/>
+            </a:pPr>
+            <a:r>
+              <a:rPr lang="en-US" sz="900" dirty="0"/>
+              <a:t>12개 준비</a:t>
+            </a:r>
+          </a:p>
+        </p:txBody>
+      </p:sp>
+      <p:sp>
+        <p:nvSpPr>
+          <p:cNvPr id="10" name="Shape 7"/>
+          <p:cNvSpPr/>
+          <p:nvPr/>
+        </p:nvSpPr>
+        <p:spPr>
+          <a:xfrm>
+            <a:off x="2532888" y="1005840"/>
+            <a:ext cx="2011680" cy="658368"/>
+          </a:xfrm>
+          <a:prstGeom prst="rect">
+            <a:avLst/>
+          </a:prstGeom>
+          <a:solidFill>
+            <a:schemeClr val="bg1">
+              <a:lumMod val="85000"/>
+            </a:schemeClr>
+          </a:solidFill>
+          <a:ln w="12700">
+            <a:solidFill>
+              <a:schemeClr val="tx1"/>
+            </a:solidFill>
+            <a:prstDash val="solid"/>
+          </a:ln>
+        </p:spPr>
+      </p:sp>
+      <p:sp>
+        <p:nvSpPr>
+          <p:cNvPr id="11" name="Text 8"/>
+          <p:cNvSpPr/>
+          <p:nvPr/>
+        </p:nvSpPr>
+        <p:spPr>
+          <a:xfrm>
+            <a:off x="2532888" y="1042416"/>
+            <a:ext cx="2011680" cy="329184"/>
+          </a:xfrm>
+          <a:prstGeom prst="rect">
+            <a:avLst/>
+          </a:prstGeom>
+          <a:noFill/>
+          <a:ln/>
+        </p:spPr>
+        <p:txBody>
+          <a:bodyPr wrap="square" lIns="0" tIns="0" rIns="0" bIns="0" rtlCol="0" anchor="ctr"/>
+          <a:lstStyle/>
+          <a:p>
+            <a:pPr marL="0" indent="0" algn="ctr">
+              <a:buNone/>
+            </a:pPr>
+            <a:r>
+              <a:rPr lang="en-US" sz="1000" b="1" dirty="0"/>
+              <a:t>FAISS 벡터DB</a:t>
+            </a:r>
+            <a:endParaRPr lang="en-US" sz="1000" dirty="0"/>
+          </a:p>
+        </p:txBody>
+      </p:sp>
+      <p:sp>
+        <p:nvSpPr>
+          <p:cNvPr id="12" name="Text 9"/>
+          <p:cNvSpPr/>
+          <p:nvPr/>
+        </p:nvSpPr>
+        <p:spPr>
+          <a:xfrm>
+            <a:off x="2532888" y="1371600"/>
+            <a:ext cx="2011680" cy="237744"/>
+          </a:xfrm>
+          <a:prstGeom prst="rect">
+            <a:avLst/>
+          </a:prstGeom>
+          <a:noFill/>
+          <a:ln/>
+        </p:spPr>
+        <p:txBody>
+          <a:bodyPr wrap="square" lIns="0" tIns="0" rIns="0" bIns="0" rtlCol="0" anchor="ctr"/>
+          <a:lstStyle/>
+          <a:p>
+            <a:pPr marL="0" indent="0" algn="ctr">
+              <a:buNone/>
+            </a:pPr>
+            <a:r>
+              <a:rPr lang="en-US" sz="900" dirty="0"/>
+              <a:t>문서 검색 (K=4)</a:t>
+            </a:r>
+          </a:p>
+        </p:txBody>
+      </p:sp>
+      <p:sp>
+        <p:nvSpPr>
+          <p:cNvPr id="14" name="Shape 11"/>
+          <p:cNvSpPr/>
+          <p:nvPr/>
+        </p:nvSpPr>
+        <p:spPr>
+          <a:xfrm>
+            <a:off x="4745736" y="1005840"/>
+            <a:ext cx="2011680" cy="658368"/>
+          </a:xfrm>
+          <a:prstGeom prst="rect">
+            <a:avLst/>
+          </a:prstGeom>
+          <a:solidFill>
+            <a:schemeClr val="bg1">
+              <a:lumMod val="50000"/>
+            </a:schemeClr>
+          </a:solidFill>
+          <a:ln w="12700">
+            <a:solidFill>
+              <a:schemeClr val="tx1"/>
+            </a:solidFill>
+            <a:prstDash val="solid"/>
+          </a:ln>
+        </p:spPr>
+      </p:sp>
+      <p:sp>
+        <p:nvSpPr>
+          <p:cNvPr id="15" name="Text 12"/>
+          <p:cNvSpPr/>
+          <p:nvPr/>
+        </p:nvSpPr>
+        <p:spPr>
+          <a:xfrm>
+            <a:off x="4745736" y="1042416"/>
+            <a:ext cx="2011680" cy="329184"/>
+          </a:xfrm>
+          <a:prstGeom prst="rect">
+            <a:avLst/>
+          </a:prstGeom>
+          <a:noFill/>
+          <a:ln/>
+        </p:spPr>
+        <p:txBody>
+          <a:bodyPr wrap="square" lIns="0" tIns="0" rIns="0" bIns="0" rtlCol="0" anchor="ctr"/>
+          <a:lstStyle/>
+          <a:p>
+            <a:pPr marL="0" indent="0" algn="ctr">
+              <a:buNone/>
+            </a:pPr>
+            <a:r>
+              <a:rPr lang="en-US" sz="1000" b="1" dirty="0">
+                <a:solidFill>
+                  <a:schemeClr val="bg1"/>
+                </a:solidFill>
+              </a:rPr>
+              <a:t>GPT-4o-mini</a:t>
+            </a:r>
+            <a:endParaRPr lang="en-US" sz="1000" dirty="0">
+              <a:solidFill>
+                <a:schemeClr val="bg1"/>
+              </a:solidFill>
+            </a:endParaRPr>
+          </a:p>
+        </p:txBody>
+      </p:sp>
+      <p:sp>
+        <p:nvSpPr>
+          <p:cNvPr id="16" name="Text 13"/>
+          <p:cNvSpPr/>
+          <p:nvPr/>
+        </p:nvSpPr>
+        <p:spPr>
+          <a:xfrm>
+            <a:off x="4745736" y="1371600"/>
+            <a:ext cx="2011680" cy="237744"/>
+          </a:xfrm>
+          <a:prstGeom prst="rect">
+            <a:avLst/>
+          </a:prstGeom>
+          <a:noFill/>
+          <a:ln/>
+        </p:spPr>
+        <p:txBody>
+          <a:bodyPr wrap="square" lIns="0" tIns="0" rIns="0" bIns="0" rtlCol="0" anchor="ctr"/>
+          <a:lstStyle/>
+          <a:p>
+            <a:pPr marL="0" indent="0" algn="ctr">
+              <a:buNone/>
+            </a:pPr>
+            <a:r>
+              <a:rPr lang="en-US" sz="900" dirty="0">
+                <a:solidFill>
+                  <a:schemeClr val="bg1"/>
+                </a:solidFill>
+              </a:rPr>
+              <a:t>답변 생성</a:t>
+            </a:r>
+          </a:p>
+        </p:txBody>
+      </p:sp>
+      <p:sp>
+        <p:nvSpPr>
+          <p:cNvPr id="18" name="Shape 15"/>
+          <p:cNvSpPr/>
+          <p:nvPr/>
+        </p:nvSpPr>
+        <p:spPr>
+          <a:xfrm>
+            <a:off x="6958584" y="1005840"/>
+            <a:ext cx="2011680" cy="658368"/>
+          </a:xfrm>
+          <a:prstGeom prst="rect">
+            <a:avLst/>
+          </a:prstGeom>
+          <a:solidFill>
+            <a:schemeClr val="tx1"/>
+          </a:solidFill>
+          <a:ln w="12700">
+            <a:solidFill>
+              <a:schemeClr val="tx1"/>
+            </a:solidFill>
+            <a:prstDash val="solid"/>
+          </a:ln>
+        </p:spPr>
+      </p:sp>
+      <p:sp>
+        <p:nvSpPr>
+          <p:cNvPr id="19" name="Text 16"/>
+          <p:cNvSpPr/>
+          <p:nvPr/>
+        </p:nvSpPr>
+        <p:spPr>
+          <a:xfrm>
+            <a:off x="6958584" y="1042416"/>
+            <a:ext cx="2011680" cy="329184"/>
+          </a:xfrm>
+          <a:prstGeom prst="rect">
+            <a:avLst/>
+          </a:prstGeom>
+          <a:noFill/>
+          <a:ln/>
+        </p:spPr>
+        <p:txBody>
+          <a:bodyPr wrap="square" lIns="0" tIns="0" rIns="0" bIns="0" rtlCol="0" anchor="ctr"/>
+          <a:lstStyle/>
+          <a:p>
+            <a:pPr marL="0" indent="0" algn="ctr">
+              <a:buNone/>
+            </a:pPr>
+            <a:r>
+              <a:rPr lang="en-US" sz="1000" b="1" dirty="0">
+                <a:solidFill>
+                  <a:srgbClr val="FFFFFF"/>
+                </a:solidFill>
+              </a:rPr>
+              <a:t>RAGAS evaluate()</a:t>
+            </a:r>
+            <a:endParaRPr lang="en-US" sz="1000" dirty="0"/>
+          </a:p>
+        </p:txBody>
+      </p:sp>
+      <p:sp>
+        <p:nvSpPr>
+          <p:cNvPr id="20" name="Text 17"/>
+          <p:cNvSpPr/>
+          <p:nvPr/>
+        </p:nvSpPr>
+        <p:spPr>
+          <a:xfrm>
+            <a:off x="6958584" y="1371600"/>
+            <a:ext cx="2011680" cy="237744"/>
+          </a:xfrm>
+          <a:prstGeom prst="rect">
+            <a:avLst/>
+          </a:prstGeom>
+          <a:noFill/>
+          <a:ln/>
+        </p:spPr>
+        <p:txBody>
+          <a:bodyPr wrap="square" lIns="0" tIns="0" rIns="0" bIns="0" rtlCol="0" anchor="ctr"/>
+          <a:lstStyle/>
+          <a:p>
+            <a:pPr marL="0" indent="0" algn="ctr">
+              <a:buNone/>
+            </a:pPr>
+            <a:r>
+              <a:rPr lang="en-US" sz="900" dirty="0">
+                <a:solidFill>
+                  <a:schemeClr val="bg1"/>
+                </a:solidFill>
+              </a:rPr>
+              <a:t>4가지 지표 산출</a:t>
+            </a:r>
+          </a:p>
+        </p:txBody>
+      </p:sp>
+      <p:sp>
+        <p:nvSpPr>
+          <p:cNvPr id="21" name="Shape 18"/>
+          <p:cNvSpPr/>
+          <p:nvPr/>
+        </p:nvSpPr>
+        <p:spPr>
+          <a:xfrm>
+            <a:off x="320040" y="1865376"/>
+            <a:ext cx="2011680" cy="2651760"/>
+          </a:xfrm>
+          <a:prstGeom prst="rect">
+            <a:avLst/>
+          </a:prstGeom>
+          <a:solidFill>
+            <a:schemeClr val="bg1"/>
+          </a:solidFill>
+          <a:ln w="19050">
+            <a:solidFill>
+              <a:schemeClr val="tx1"/>
+            </a:solidFill>
+            <a:prstDash val="solid"/>
+          </a:ln>
+        </p:spPr>
+      </p:sp>
+      <p:sp>
+        <p:nvSpPr>
+          <p:cNvPr id="23" name="Text 20"/>
+          <p:cNvSpPr/>
+          <p:nvPr/>
+        </p:nvSpPr>
+        <p:spPr>
+          <a:xfrm>
+            <a:off x="1069848" y="1993392"/>
+            <a:ext cx="512064" cy="420624"/>
+          </a:xfrm>
+          <a:prstGeom prst="rect">
+            <a:avLst/>
+          </a:prstGeom>
+          <a:noFill/>
+          <a:ln/>
+        </p:spPr>
+        <p:txBody>
+          <a:bodyPr wrap="square" lIns="0" tIns="0" rIns="0" bIns="0" rtlCol="0" anchor="ctr"/>
+          <a:lstStyle/>
+          <a:p>
+            <a:pPr marL="0" indent="0" algn="ctr">
+              <a:buNone/>
+            </a:pPr>
+            <a:r>
+              <a:rPr lang="en-US" sz="2200" b="1" dirty="0">
+                <a:latin typeface="Arial Black" pitchFamily="34" charset="0"/>
+                <a:ea typeface="Arial Black" pitchFamily="34" charset="-122"/>
+                <a:cs typeface="Arial Black" pitchFamily="34" charset="-120"/>
+              </a:rPr>
+              <a:t>1</a:t>
+            </a:r>
+            <a:endParaRPr lang="en-US" sz="2200" dirty="0"/>
+          </a:p>
+        </p:txBody>
+      </p:sp>
+      <p:sp>
+        <p:nvSpPr>
+          <p:cNvPr id="24" name="Text 21"/>
+          <p:cNvSpPr/>
+          <p:nvPr/>
+        </p:nvSpPr>
+        <p:spPr>
+          <a:xfrm>
+            <a:off x="320040" y="2468880"/>
+            <a:ext cx="2011680" cy="256032"/>
+          </a:xfrm>
+          <a:prstGeom prst="rect">
+            <a:avLst/>
+          </a:prstGeom>
+          <a:noFill/>
+          <a:ln/>
+        </p:spPr>
+        <p:txBody>
+          <a:bodyPr wrap="square" lIns="0" tIns="0" rIns="0" bIns="0" rtlCol="0" anchor="ctr"/>
+          <a:lstStyle/>
+          <a:p>
+            <a:pPr marL="0" indent="0" algn="ctr">
+              <a:buNone/>
+            </a:pPr>
+            <a:r>
+              <a:rPr lang="en-US" sz="1000" b="1" dirty="0"/>
+              <a:t>Faithfulness</a:t>
+            </a:r>
+            <a:endParaRPr lang="en-US" sz="1000" dirty="0"/>
+          </a:p>
+        </p:txBody>
+      </p:sp>
+      <p:sp>
+        <p:nvSpPr>
+          <p:cNvPr id="25" name="Text 22"/>
+          <p:cNvSpPr/>
+          <p:nvPr/>
+        </p:nvSpPr>
+        <p:spPr>
+          <a:xfrm>
+            <a:off x="320040" y="2706624"/>
+            <a:ext cx="2011680" cy="201168"/>
+          </a:xfrm>
+          <a:prstGeom prst="rect">
+            <a:avLst/>
+          </a:prstGeom>
+          <a:noFill/>
+          <a:ln/>
+        </p:spPr>
+        <p:txBody>
+          <a:bodyPr wrap="square" lIns="0" tIns="0" rIns="0" bIns="0" rtlCol="0" anchor="ctr"/>
+          <a:lstStyle/>
+          <a:p>
+            <a:pPr marL="0" indent="0" algn="ctr">
+              <a:buNone/>
+            </a:pPr>
+            <a:r>
+              <a:rPr lang="en-US" sz="900" dirty="0"/>
+              <a:t>충실도</a:t>
+            </a:r>
+          </a:p>
+        </p:txBody>
+      </p:sp>
+      <p:sp>
+        <p:nvSpPr>
+          <p:cNvPr id="26" name="Text 23"/>
+          <p:cNvSpPr/>
+          <p:nvPr/>
+        </p:nvSpPr>
+        <p:spPr>
+          <a:xfrm>
+            <a:off x="411480" y="3139948"/>
+            <a:ext cx="1828800" cy="640080"/>
+          </a:xfrm>
+          <a:prstGeom prst="rect">
+            <a:avLst/>
+          </a:prstGeom>
+          <a:noFill/>
+          <a:ln/>
+        </p:spPr>
+        <p:txBody>
+          <a:bodyPr wrap="square" lIns="0" tIns="0" rIns="0" bIns="0" rtlCol="0" anchor="ctr"/>
+          <a:lstStyle/>
+          <a:p>
+            <a:pPr marL="0" indent="0" algn="ctr">
+              <a:buNone/>
+            </a:pPr>
+            <a:r>
+              <a:rPr lang="en-US" sz="900" dirty="0"/>
+              <a:t>답변이 검색 문서에 근거?</a:t>
+            </a:r>
+          </a:p>
+          <a:p>
+            <a:pPr marL="0" indent="0" algn="ctr">
+              <a:buNone/>
+            </a:pPr>
+            <a:r>
+              <a:rPr lang="en-US" sz="900" dirty="0"/>
+              <a:t>환각 방지 핵심 지표</a:t>
+            </a:r>
+          </a:p>
+        </p:txBody>
+      </p:sp>
+      <p:sp>
+        <p:nvSpPr>
+          <p:cNvPr id="27" name="Text 24"/>
+          <p:cNvSpPr/>
+          <p:nvPr/>
+        </p:nvSpPr>
+        <p:spPr>
+          <a:xfrm>
+            <a:off x="411480" y="4197096"/>
+            <a:ext cx="1828800" cy="219456"/>
+          </a:xfrm>
+          <a:prstGeom prst="rect">
+            <a:avLst/>
+          </a:prstGeom>
+          <a:noFill/>
+          <a:ln/>
+        </p:spPr>
+        <p:txBody>
+          <a:bodyPr wrap="square" lIns="0" tIns="0" rIns="0" bIns="0" rtlCol="0" anchor="ctr"/>
+          <a:lstStyle/>
+          <a:p>
+            <a:pPr marL="0" indent="0" algn="ctr">
+              <a:buNone/>
+            </a:pPr>
+            <a:r>
+              <a:rPr lang="en-US" sz="750" dirty="0"/>
+              <a:t>기준: 0.8↑ 우수 / 0.6↓ 개선</a:t>
+            </a:r>
+          </a:p>
+        </p:txBody>
+      </p:sp>
+      <p:sp>
+        <p:nvSpPr>
+          <p:cNvPr id="28" name="Shape 25"/>
+          <p:cNvSpPr/>
+          <p:nvPr/>
+        </p:nvSpPr>
+        <p:spPr>
+          <a:xfrm>
+            <a:off x="2532888" y="1865376"/>
+            <a:ext cx="2011680" cy="2651760"/>
+          </a:xfrm>
+          <a:prstGeom prst="rect">
+            <a:avLst/>
+          </a:prstGeom>
+          <a:solidFill>
+            <a:schemeClr val="bg1">
+              <a:lumMod val="85000"/>
+            </a:schemeClr>
+          </a:solidFill>
+          <a:ln w="19050">
+            <a:solidFill>
+              <a:schemeClr val="tx1"/>
+            </a:solidFill>
+            <a:prstDash val="solid"/>
+          </a:ln>
+        </p:spPr>
+      </p:sp>
+      <p:sp>
+        <p:nvSpPr>
+          <p:cNvPr id="30" name="Text 27"/>
+          <p:cNvSpPr/>
+          <p:nvPr/>
+        </p:nvSpPr>
+        <p:spPr>
+          <a:xfrm>
+            <a:off x="3282696" y="1993392"/>
+            <a:ext cx="512064" cy="420624"/>
+          </a:xfrm>
+          <a:prstGeom prst="rect">
+            <a:avLst/>
+          </a:prstGeom>
+          <a:noFill/>
+          <a:ln/>
+        </p:spPr>
+        <p:txBody>
+          <a:bodyPr wrap="square" lIns="0" tIns="0" rIns="0" bIns="0" rtlCol="0" anchor="ctr"/>
+          <a:lstStyle/>
+          <a:p>
+            <a:pPr marL="0" indent="0" algn="ctr">
+              <a:buNone/>
+            </a:pPr>
+            <a:r>
+              <a:rPr lang="en-US" sz="2200" b="1" dirty="0">
+                <a:latin typeface="Arial Black" pitchFamily="34" charset="0"/>
+                <a:ea typeface="Arial Black" pitchFamily="34" charset="-122"/>
+                <a:cs typeface="Arial Black" pitchFamily="34" charset="-120"/>
+              </a:rPr>
+              <a:t>2</a:t>
+            </a:r>
+            <a:endParaRPr lang="en-US" sz="2200" dirty="0"/>
+          </a:p>
+        </p:txBody>
+      </p:sp>
+      <p:sp>
+        <p:nvSpPr>
+          <p:cNvPr id="31" name="Text 28"/>
+          <p:cNvSpPr/>
+          <p:nvPr/>
+        </p:nvSpPr>
+        <p:spPr>
+          <a:xfrm>
+            <a:off x="2532888" y="2468880"/>
+            <a:ext cx="2011680" cy="256032"/>
+          </a:xfrm>
+          <a:prstGeom prst="rect">
+            <a:avLst/>
+          </a:prstGeom>
+          <a:noFill/>
+          <a:ln/>
+        </p:spPr>
+        <p:txBody>
+          <a:bodyPr wrap="square" lIns="0" tIns="0" rIns="0" bIns="0" rtlCol="0" anchor="ctr"/>
+          <a:lstStyle/>
+          <a:p>
+            <a:pPr marL="0" indent="0" algn="ctr">
+              <a:buNone/>
+            </a:pPr>
+            <a:r>
+              <a:rPr lang="en-US" sz="1000" b="1" dirty="0"/>
+              <a:t>Answer Relevancy</a:t>
+            </a:r>
+            <a:endParaRPr lang="en-US" sz="1000" dirty="0"/>
+          </a:p>
+        </p:txBody>
+      </p:sp>
+      <p:sp>
+        <p:nvSpPr>
+          <p:cNvPr id="32" name="Text 29"/>
+          <p:cNvSpPr/>
+          <p:nvPr/>
+        </p:nvSpPr>
+        <p:spPr>
+          <a:xfrm>
+            <a:off x="2532888" y="2706624"/>
+            <a:ext cx="2011680" cy="201168"/>
+          </a:xfrm>
+          <a:prstGeom prst="rect">
+            <a:avLst/>
+          </a:prstGeom>
+          <a:noFill/>
+          <a:ln/>
+        </p:spPr>
+        <p:txBody>
+          <a:bodyPr wrap="square" lIns="0" tIns="0" rIns="0" bIns="0" rtlCol="0" anchor="ctr"/>
+          <a:lstStyle/>
+          <a:p>
+            <a:pPr marL="0" indent="0" algn="ctr">
+              <a:buNone/>
+            </a:pPr>
+            <a:r>
+              <a:rPr lang="en-US" sz="900" dirty="0"/>
+              <a:t>답변 관련성</a:t>
+            </a:r>
+          </a:p>
+        </p:txBody>
+      </p:sp>
+      <p:sp>
+        <p:nvSpPr>
+          <p:cNvPr id="33" name="Text 30"/>
+          <p:cNvSpPr/>
+          <p:nvPr/>
+        </p:nvSpPr>
+        <p:spPr>
+          <a:xfrm>
+            <a:off x="2624328" y="3142742"/>
+            <a:ext cx="1828800" cy="640080"/>
+          </a:xfrm>
+          <a:prstGeom prst="rect">
+            <a:avLst/>
+          </a:prstGeom>
+          <a:noFill/>
+          <a:ln/>
+        </p:spPr>
+        <p:txBody>
+          <a:bodyPr wrap="square" lIns="0" tIns="0" rIns="0" bIns="0" rtlCol="0" anchor="ctr"/>
+          <a:lstStyle/>
+          <a:p>
+            <a:pPr marL="0" indent="0" algn="ctr">
+              <a:buNone/>
+            </a:pPr>
+            <a:r>
+              <a:rPr lang="en-US" sz="900" dirty="0"/>
+              <a:t>답변이 질문에 얼마나</a:t>
+            </a:r>
+          </a:p>
+          <a:p>
+            <a:pPr marL="0" indent="0" algn="ctr">
+              <a:buNone/>
+            </a:pPr>
+            <a:r>
+              <a:rPr lang="en-US" sz="900" dirty="0"/>
+              <a:t>직접 대응하는가</a:t>
+            </a:r>
+          </a:p>
+        </p:txBody>
+      </p:sp>
+      <p:sp>
+        <p:nvSpPr>
+          <p:cNvPr id="34" name="Text 31"/>
+          <p:cNvSpPr/>
+          <p:nvPr/>
+        </p:nvSpPr>
+        <p:spPr>
+          <a:xfrm>
+            <a:off x="2624328" y="4197096"/>
+            <a:ext cx="1828800" cy="219456"/>
+          </a:xfrm>
+          <a:prstGeom prst="rect">
+            <a:avLst/>
+          </a:prstGeom>
+          <a:noFill/>
+          <a:ln/>
+        </p:spPr>
+        <p:txBody>
+          <a:bodyPr wrap="square" lIns="0" tIns="0" rIns="0" bIns="0" rtlCol="0" anchor="ctr"/>
+          <a:lstStyle/>
+          <a:p>
+            <a:pPr marL="0" indent="0" algn="ctr">
+              <a:buNone/>
+            </a:pPr>
+            <a:r>
+              <a:rPr lang="en-US" sz="750" dirty="0"/>
+              <a:t>기준: 0.8↑ 우수 / 0.6↓ 개선</a:t>
+            </a:r>
+          </a:p>
+        </p:txBody>
+      </p:sp>
+      <p:sp>
+        <p:nvSpPr>
+          <p:cNvPr id="35" name="Shape 32"/>
+          <p:cNvSpPr/>
+          <p:nvPr/>
+        </p:nvSpPr>
+        <p:spPr>
+          <a:xfrm>
+            <a:off x="4745736" y="1865376"/>
+            <a:ext cx="2011680" cy="2651760"/>
+          </a:xfrm>
+          <a:prstGeom prst="rect">
+            <a:avLst/>
+          </a:prstGeom>
+          <a:solidFill>
+            <a:schemeClr val="bg1">
+              <a:lumMod val="50000"/>
+            </a:schemeClr>
+          </a:solidFill>
+          <a:ln w="19050">
+            <a:solidFill>
+              <a:schemeClr val="tx1"/>
+            </a:solidFill>
+            <a:prstDash val="solid"/>
+          </a:ln>
+        </p:spPr>
+      </p:sp>
+      <p:sp>
+        <p:nvSpPr>
+          <p:cNvPr id="37" name="Text 34"/>
+          <p:cNvSpPr/>
+          <p:nvPr/>
+        </p:nvSpPr>
+        <p:spPr>
+          <a:xfrm>
+            <a:off x="5495544" y="1993392"/>
+            <a:ext cx="512064" cy="420624"/>
+          </a:xfrm>
+          <a:prstGeom prst="rect">
+            <a:avLst/>
+          </a:prstGeom>
+          <a:noFill/>
+          <a:ln/>
+        </p:spPr>
+        <p:txBody>
+          <a:bodyPr wrap="square" lIns="0" tIns="0" rIns="0" bIns="0" rtlCol="0" anchor="ctr"/>
+          <a:lstStyle/>
+          <a:p>
+            <a:pPr marL="0" indent="0" algn="ctr">
+              <a:buNone/>
+            </a:pPr>
+            <a:r>
+              <a:rPr lang="en-US" sz="2200" b="1" dirty="0">
+                <a:solidFill>
+                  <a:schemeClr val="bg1"/>
+                </a:solidFill>
+                <a:latin typeface="Arial Black" pitchFamily="34" charset="0"/>
+                <a:ea typeface="Arial Black" pitchFamily="34" charset="-122"/>
+                <a:cs typeface="Arial Black" pitchFamily="34" charset="-120"/>
+              </a:rPr>
+              <a:t>3</a:t>
+            </a:r>
+            <a:endParaRPr lang="en-US" sz="2200" dirty="0">
+              <a:solidFill>
+                <a:schemeClr val="bg1"/>
+              </a:solidFill>
+            </a:endParaRPr>
+          </a:p>
+        </p:txBody>
+      </p:sp>
+      <p:sp>
+        <p:nvSpPr>
+          <p:cNvPr id="38" name="Text 35"/>
+          <p:cNvSpPr/>
+          <p:nvPr/>
+        </p:nvSpPr>
+        <p:spPr>
+          <a:xfrm>
+            <a:off x="4745736" y="2468880"/>
+            <a:ext cx="2011680" cy="256032"/>
+          </a:xfrm>
+          <a:prstGeom prst="rect">
+            <a:avLst/>
+          </a:prstGeom>
+          <a:noFill/>
+          <a:ln/>
+        </p:spPr>
+        <p:txBody>
+          <a:bodyPr wrap="square" lIns="0" tIns="0" rIns="0" bIns="0" rtlCol="0" anchor="ctr"/>
+          <a:lstStyle/>
+          <a:p>
+            <a:pPr marL="0" indent="0" algn="ctr">
+              <a:buNone/>
+            </a:pPr>
+            <a:r>
+              <a:rPr lang="en-US" sz="1000" b="1" dirty="0">
+                <a:solidFill>
+                  <a:schemeClr val="bg1"/>
+                </a:solidFill>
+              </a:rPr>
+              <a:t>Context Precision</a:t>
+            </a:r>
+            <a:endParaRPr lang="en-US" sz="1000" dirty="0">
+              <a:solidFill>
+                <a:schemeClr val="bg1"/>
+              </a:solidFill>
+            </a:endParaRPr>
+          </a:p>
+        </p:txBody>
+      </p:sp>
+      <p:sp>
+        <p:nvSpPr>
+          <p:cNvPr id="39" name="Text 36"/>
+          <p:cNvSpPr/>
+          <p:nvPr/>
+        </p:nvSpPr>
+        <p:spPr>
+          <a:xfrm>
+            <a:off x="4745736" y="2706624"/>
+            <a:ext cx="2011680" cy="201168"/>
+          </a:xfrm>
+          <a:prstGeom prst="rect">
+            <a:avLst/>
+          </a:prstGeom>
+          <a:noFill/>
+          <a:ln/>
+        </p:spPr>
+        <p:txBody>
+          <a:bodyPr wrap="square" lIns="0" tIns="0" rIns="0" bIns="0" rtlCol="0" anchor="ctr"/>
+          <a:lstStyle/>
+          <a:p>
+            <a:pPr marL="0" indent="0" algn="ctr">
+              <a:buNone/>
+            </a:pPr>
+            <a:r>
+              <a:rPr lang="en-US" sz="900" dirty="0">
+                <a:solidFill>
+                  <a:schemeClr val="bg1"/>
+                </a:solidFill>
+              </a:rPr>
+              <a:t>문맥 정밀도</a:t>
+            </a:r>
+          </a:p>
+        </p:txBody>
+      </p:sp>
+      <p:sp>
+        <p:nvSpPr>
+          <p:cNvPr id="40" name="Text 37"/>
+          <p:cNvSpPr/>
+          <p:nvPr/>
+        </p:nvSpPr>
+        <p:spPr>
+          <a:xfrm>
+            <a:off x="4837176" y="3142742"/>
+            <a:ext cx="1828800" cy="640080"/>
+          </a:xfrm>
+          <a:prstGeom prst="rect">
+            <a:avLst/>
+          </a:prstGeom>
+          <a:noFill/>
+          <a:ln/>
+        </p:spPr>
+        <p:txBody>
+          <a:bodyPr wrap="square" lIns="0" tIns="0" rIns="0" bIns="0" rtlCol="0" anchor="ctr"/>
+          <a:lstStyle/>
+          <a:p>
+            <a:pPr marL="0" indent="0" algn="ctr">
+              <a:buNone/>
+            </a:pPr>
+            <a:r>
+              <a:rPr lang="en-US" sz="900" dirty="0">
+                <a:solidFill>
+                  <a:schemeClr val="bg1"/>
+                </a:solidFill>
+              </a:rPr>
+              <a:t>검색 청크 중 관련 있는</a:t>
+            </a:r>
+          </a:p>
+          <a:p>
+            <a:pPr marL="0" indent="0" algn="ctr">
+              <a:buNone/>
+            </a:pPr>
+            <a:r>
+              <a:rPr lang="en-US" sz="900" dirty="0">
+                <a:solidFill>
+                  <a:schemeClr val="bg1"/>
+                </a:solidFill>
+              </a:rPr>
+              <a:t>것이 상위에 있는가</a:t>
+            </a:r>
+          </a:p>
+        </p:txBody>
+      </p:sp>
+      <p:sp>
+        <p:nvSpPr>
+          <p:cNvPr id="41" name="Text 38"/>
+          <p:cNvSpPr/>
+          <p:nvPr/>
+        </p:nvSpPr>
+        <p:spPr>
+          <a:xfrm>
+            <a:off x="4837176" y="4197096"/>
+            <a:ext cx="1828800" cy="219456"/>
+          </a:xfrm>
+          <a:prstGeom prst="rect">
+            <a:avLst/>
+          </a:prstGeom>
+          <a:noFill/>
+          <a:ln/>
+        </p:spPr>
+        <p:txBody>
+          <a:bodyPr wrap="square" lIns="0" tIns="0" rIns="0" bIns="0" rtlCol="0" anchor="ctr"/>
+          <a:lstStyle/>
+          <a:p>
+            <a:pPr marL="0" indent="0" algn="ctr">
+              <a:buNone/>
+            </a:pPr>
+            <a:r>
+              <a:rPr lang="en-US" sz="750" dirty="0">
+                <a:solidFill>
+                  <a:schemeClr val="bg1"/>
+                </a:solidFill>
+              </a:rPr>
+              <a:t>기준: 0.8↑ 우수 / 0.6↓ 개선</a:t>
+            </a:r>
+          </a:p>
+        </p:txBody>
+      </p:sp>
+      <p:sp>
+        <p:nvSpPr>
+          <p:cNvPr id="42" name="Shape 39"/>
+          <p:cNvSpPr/>
+          <p:nvPr/>
+        </p:nvSpPr>
+        <p:spPr>
+          <a:xfrm>
+            <a:off x="6958584" y="1865376"/>
+            <a:ext cx="2011680" cy="2651760"/>
+          </a:xfrm>
+          <a:prstGeom prst="rect">
+            <a:avLst/>
+          </a:prstGeom>
+          <a:solidFill>
+            <a:schemeClr val="tx1"/>
+          </a:solidFill>
+          <a:ln w="19050">
+            <a:solidFill>
+              <a:schemeClr val="tx1"/>
+            </a:solidFill>
+            <a:prstDash val="solid"/>
+          </a:ln>
+        </p:spPr>
+      </p:sp>
+      <p:sp>
+        <p:nvSpPr>
+          <p:cNvPr id="44" name="Text 41"/>
+          <p:cNvSpPr/>
+          <p:nvPr/>
+        </p:nvSpPr>
+        <p:spPr>
+          <a:xfrm>
+            <a:off x="7708392" y="1993392"/>
+            <a:ext cx="512064" cy="420624"/>
+          </a:xfrm>
+          <a:prstGeom prst="rect">
+            <a:avLst/>
+          </a:prstGeom>
+          <a:noFill/>
+          <a:ln/>
+        </p:spPr>
+        <p:txBody>
+          <a:bodyPr wrap="square" lIns="0" tIns="0" rIns="0" bIns="0" rtlCol="0" anchor="ctr"/>
+          <a:lstStyle/>
+          <a:p>
+            <a:pPr marL="0" indent="0" algn="ctr">
+              <a:buNone/>
+            </a:pPr>
+            <a:r>
+              <a:rPr lang="en-US" sz="2200" b="1" dirty="0">
+                <a:solidFill>
+                  <a:schemeClr val="bg1"/>
+                </a:solidFill>
+                <a:latin typeface="Arial Black" pitchFamily="34" charset="0"/>
+                <a:ea typeface="Arial Black" pitchFamily="34" charset="-122"/>
+                <a:cs typeface="Arial Black" pitchFamily="34" charset="-120"/>
+              </a:rPr>
+              <a:t>4</a:t>
+            </a:r>
+            <a:endParaRPr lang="en-US" sz="2200" dirty="0">
+              <a:solidFill>
+                <a:schemeClr val="bg1"/>
+              </a:solidFill>
+            </a:endParaRPr>
+          </a:p>
+        </p:txBody>
+      </p:sp>
+      <p:sp>
+        <p:nvSpPr>
+          <p:cNvPr id="45" name="Text 42"/>
+          <p:cNvSpPr/>
+          <p:nvPr/>
+        </p:nvSpPr>
+        <p:spPr>
+          <a:xfrm>
+            <a:off x="6958584" y="2468880"/>
+            <a:ext cx="2011680" cy="256032"/>
+          </a:xfrm>
+          <a:prstGeom prst="rect">
+            <a:avLst/>
+          </a:prstGeom>
+          <a:noFill/>
+          <a:ln/>
+        </p:spPr>
+        <p:txBody>
+          <a:bodyPr wrap="square" lIns="0" tIns="0" rIns="0" bIns="0" rtlCol="0" anchor="ctr"/>
+          <a:lstStyle/>
+          <a:p>
+            <a:pPr marL="0" indent="0" algn="ctr">
+              <a:buNone/>
+            </a:pPr>
+            <a:r>
+              <a:rPr lang="en-US" sz="1000" b="1" dirty="0">
+                <a:solidFill>
+                  <a:schemeClr val="bg1"/>
+                </a:solidFill>
+              </a:rPr>
+              <a:t>Context Recall</a:t>
+            </a:r>
+            <a:endParaRPr lang="en-US" sz="1000" dirty="0">
+              <a:solidFill>
+                <a:schemeClr val="bg1"/>
+              </a:solidFill>
+            </a:endParaRPr>
+          </a:p>
+        </p:txBody>
+      </p:sp>
+      <p:sp>
+        <p:nvSpPr>
+          <p:cNvPr id="46" name="Text 43"/>
+          <p:cNvSpPr/>
+          <p:nvPr/>
+        </p:nvSpPr>
+        <p:spPr>
+          <a:xfrm>
+            <a:off x="6958584" y="2706624"/>
+            <a:ext cx="2011680" cy="201168"/>
+          </a:xfrm>
+          <a:prstGeom prst="rect">
+            <a:avLst/>
+          </a:prstGeom>
+          <a:noFill/>
+          <a:ln/>
+        </p:spPr>
+        <p:txBody>
+          <a:bodyPr wrap="square" lIns="0" tIns="0" rIns="0" bIns="0" rtlCol="0" anchor="ctr"/>
+          <a:lstStyle/>
+          <a:p>
+            <a:pPr marL="0" indent="0" algn="ctr">
+              <a:buNone/>
+            </a:pPr>
+            <a:r>
+              <a:rPr lang="en-US" sz="900" dirty="0">
+                <a:solidFill>
+                  <a:schemeClr val="bg1"/>
+                </a:solidFill>
+              </a:rPr>
+              <a:t>문맥 재현율</a:t>
+            </a:r>
+          </a:p>
+        </p:txBody>
+      </p:sp>
+      <p:sp>
+        <p:nvSpPr>
+          <p:cNvPr id="47" name="Text 44"/>
+          <p:cNvSpPr/>
+          <p:nvPr/>
+        </p:nvSpPr>
+        <p:spPr>
+          <a:xfrm>
+            <a:off x="7050024" y="2980944"/>
+            <a:ext cx="1828800" cy="640080"/>
+          </a:xfrm>
+          <a:prstGeom prst="rect">
+            <a:avLst/>
+          </a:prstGeom>
+          <a:noFill/>
+          <a:ln/>
+        </p:spPr>
+        <p:txBody>
+          <a:bodyPr wrap="square" lIns="0" tIns="0" rIns="0" bIns="0" rtlCol="0" anchor="ctr"/>
+          <a:lstStyle/>
+          <a:p>
+            <a:pPr marL="0" indent="0" algn="ctr">
+              <a:buNone/>
+            </a:pPr>
+            <a:r>
+              <a:rPr lang="en-US" sz="900" dirty="0">
+                <a:solidFill>
+                  <a:schemeClr val="bg1"/>
+                </a:solidFill>
+              </a:rPr>
+              <a:t>정답에 필요한 정보가</a:t>
+            </a:r>
+          </a:p>
+          <a:p>
+            <a:pPr marL="0" indent="0" algn="ctr">
+              <a:buNone/>
+            </a:pPr>
+            <a:r>
+              <a:rPr lang="en-US" sz="900" dirty="0">
+                <a:solidFill>
+                  <a:schemeClr val="bg1"/>
+                </a:solidFill>
+              </a:rPr>
+              <a:t>검색 문맥에 포함됐는가</a:t>
+            </a:r>
+          </a:p>
+        </p:txBody>
+      </p:sp>
+      <p:sp>
+        <p:nvSpPr>
+          <p:cNvPr id="48" name="Text 45"/>
+          <p:cNvSpPr/>
+          <p:nvPr/>
+        </p:nvSpPr>
+        <p:spPr>
+          <a:xfrm>
+            <a:off x="7050024" y="4197096"/>
+            <a:ext cx="1828800" cy="219456"/>
+          </a:xfrm>
+          <a:prstGeom prst="rect">
+            <a:avLst/>
+          </a:prstGeom>
+          <a:noFill/>
+          <a:ln/>
+        </p:spPr>
+        <p:txBody>
+          <a:bodyPr wrap="square" lIns="0" tIns="0" rIns="0" bIns="0" rtlCol="0" anchor="ctr"/>
+          <a:lstStyle/>
+          <a:p>
+            <a:pPr marL="0" indent="0" algn="ctr">
+              <a:buNone/>
+            </a:pPr>
+            <a:r>
+              <a:rPr lang="en-US" sz="750" dirty="0">
+                <a:solidFill>
+                  <a:schemeClr val="bg1"/>
+                </a:solidFill>
+              </a:rPr>
+              <a:t>기준: 0.8↑ 우수 / 0.6↓ 개선</a:t>
+            </a:r>
+          </a:p>
+        </p:txBody>
+      </p:sp>
+    </p:spTree>
+  </p:cSld>
+  <p:clrMapOvr>
+    <a:masterClrMapping/>
+  </p:clrMapOvr>
+  <p:timing>
+    <p:tnLst>
+      <p:par>
+        <p:cTn id="1" dur="indefinite" restart="never" nodeType="tmRoot"/>
+      </p:par>
+    </p:tnLst>
+  </p:timing>
+</p:sld>
+</file>
+
+<file path=ppt/slides/slide9.xml><?xml version="1.0" encoding="utf-8"?>
+<p:sld xmlns:a="http://schemas.openxmlformats.org/drawingml/2006/main" xmlns:r="http://schemas.openxmlformats.org/officeDocument/2006/relationships" xmlns:p="http://schemas.openxmlformats.org/presentationml/2006/main">
+  <p:cSld name="Slide 8">
+    <p:bg>
+      <p:bgPr>
+        <a:solidFill>
+          <a:srgbClr val="EBEBEB"/>
+        </a:solidFill>
+        <a:effectLst/>
+      </p:bgPr>
+    </p:bg>
+    <p:spTree>
+      <p:nvGrpSpPr>
+        <p:cNvPr id="1" name=""/>
+        <p:cNvGrpSpPr/>
+        <p:nvPr/>
+      </p:nvGrpSpPr>
+      <p:grpSpPr>
+        <a:xfrm>
+          <a:off x="0" y="0"/>
+          <a:ext cx="0" cy="0"/>
+          <a:chOff x="0" y="0"/>
+          <a:chExt cx="0" cy="0"/>
+        </a:xfrm>
+      </p:grpSpPr>
+      <p:sp>
+        <p:nvSpPr>
+          <p:cNvPr id="8" name="Freeform 5"/>
+          <p:cNvSpPr/>
+          <p:nvPr/>
+        </p:nvSpPr>
+        <p:spPr>
+          <a:xfrm>
+            <a:off x="-3488239" y="1853448"/>
             <a:ext cx="7616557" cy="7815497"/>
           </a:xfrm>
           <a:custGeom>
@@ -10968,7 +12414,59 @@
             <a:blip r:embed="rId3">
               <a:extLst>
                 <a:ext uri="{96DAC541-7B7A-43D3-8B79-37D633B846F1}">
-                  <asvg:svgBlip xmlns:asvg="http://schemas.microsoft.com/office/drawing/2016/SVG/main" xmlns="" r:embed="rId8"/>
+                  <asvg:svgBlip xmlns="" xmlns:asvg="http://schemas.microsoft.com/office/drawing/2016/SVG/main" r:embed="rId8"/>
+                </a:ext>
+              </a:extLst>
+            </a:blip>
+            <a:stretch>
+              <a:fillRect/>
+            </a:stretch>
+          </a:blipFill>
+        </p:spPr>
+      </p:sp>
+      <p:sp>
+        <p:nvSpPr>
+          <p:cNvPr id="7" name="Freeform 5"/>
+          <p:cNvSpPr/>
+          <p:nvPr/>
+        </p:nvSpPr>
+        <p:spPr>
+          <a:xfrm>
+            <a:off x="7046535" y="-645207"/>
+            <a:ext cx="7616557" cy="7815497"/>
+          </a:xfrm>
+          <a:custGeom>
+            <a:avLst/>
+            <a:gdLst/>
+            <a:ahLst/>
+            <a:cxnLst/>
+            <a:rect l="l" t="t" r="r" b="b"/>
+            <a:pathLst>
+              <a:path w="7616557" h="7815497">
+                <a:moveTo>
+                  <a:pt x="0" y="0"/>
+                </a:moveTo>
+                <a:lnTo>
+                  <a:pt x="7616556" y="0"/>
+                </a:lnTo>
+                <a:lnTo>
+                  <a:pt x="7616556" y="7815497"/>
+                </a:lnTo>
+                <a:lnTo>
+                  <a:pt x="0" y="7815497"/>
+                </a:lnTo>
+                <a:lnTo>
+                  <a:pt x="0" y="0"/>
+                </a:lnTo>
+                <a:close/>
+              </a:path>
+            </a:pathLst>
+          </a:custGeom>
+          <a:blipFill>
+            <a:blip r:embed="rId3">
+              <a:extLst>
+                <a:ext uri="{96DAC541-7B7A-43D3-8B79-37D633B846F1}">
+                  <asvg:svgBlip xmlns="" xmlns:asvg="http://schemas.microsoft.com/office/drawing/2016/SVG/main" r:embed="rId8"/>
                 </a:ext>
               </a:extLst>
             </a:blip>
@@ -16532,1217 +18030,6 @@
           </a:graphicData>
         </a:graphic>
       </p:graphicFrame>
-    </p:spTree>
-  </p:cSld>
-  <p:clrMapOvr>
-    <a:masterClrMapping/>
-  </p:clrMapOvr>
-  <p:timing>
-    <p:tnLst>
-      <p:par>
-        <p:cTn id="1" dur="indefinite" restart="never" nodeType="tmRoot"/>
-      </p:par>
-    </p:tnLst>
-  </p:timing>
-</p:sld>
-</file>
-
-<file path=ppt/slides/slide9.xml><?xml version="1.0" encoding="utf-8"?>
-<p:sld xmlns:a="http://schemas.openxmlformats.org/drawingml/2006/main" xmlns:r="http://schemas.openxmlformats.org/officeDocument/2006/relationships" xmlns:p="http://schemas.openxmlformats.org/presentationml/2006/main">
-  <p:cSld name="Slide 9">
-    <p:bg>
-      <p:bgPr>
-        <a:solidFill>
-          <a:srgbClr val="EBEBEB"/>
-        </a:solidFill>
-        <a:effectLst/>
-      </p:bgPr>
-    </p:bg>
-    <p:spTree>
-      <p:nvGrpSpPr>
-        <p:cNvPr id="1" name=""/>
-        <p:cNvGrpSpPr/>
-        <p:nvPr/>
-      </p:nvGrpSpPr>
-      <p:grpSpPr>
-        <a:xfrm>
-          <a:off x="0" y="0"/>
-          <a:ext cx="0" cy="0"/>
-          <a:chOff x="0" y="0"/>
-          <a:chExt cx="0" cy="0"/>
-        </a:xfrm>
-      </p:grpSpPr>
-      <p:sp>
-        <p:nvSpPr>
-          <p:cNvPr id="39" name="Freeform 5"/>
-          <p:cNvSpPr/>
-          <p:nvPr/>
-        </p:nvSpPr>
-        <p:spPr>
-          <a:xfrm>
-            <a:off x="5022441" y="-4304201"/>
-            <a:ext cx="7616557" cy="7815497"/>
-          </a:xfrm>
-          <a:custGeom>
-            <a:avLst/>
-            <a:gdLst/>
-            <a:ahLst/>
-            <a:cxnLst/>
-            <a:rect l="l" t="t" r="r" b="b"/>
-            <a:pathLst>
-              <a:path w="7616557" h="7815497">
-                <a:moveTo>
-                  <a:pt x="0" y="0"/>
-                </a:moveTo>
-                <a:lnTo>
-                  <a:pt x="7616556" y="0"/>
-                </a:lnTo>
-                <a:lnTo>
-                  <a:pt x="7616556" y="7815497"/>
-                </a:lnTo>
-                <a:lnTo>
-                  <a:pt x="0" y="7815497"/>
-                </a:lnTo>
-                <a:lnTo>
-                  <a:pt x="0" y="0"/>
-                </a:lnTo>
-                <a:close/>
-              </a:path>
-            </a:pathLst>
-          </a:custGeom>
-          <a:blipFill>
-            <a:blip r:embed="rId3">
-              <a:extLst>
-                <a:ext uri="{96DAC541-7B7A-43D3-8B79-37D633B846F1}">
-                  <asvg:svgBlip xmlns:asvg="http://schemas.microsoft.com/office/drawing/2016/SVG/main" xmlns="" r:embed="rId8"/>
-                </a:ext>
-              </a:extLst>
-            </a:blip>
-            <a:stretch>
-              <a:fillRect/>
-            </a:stretch>
-          </a:blipFill>
-        </p:spPr>
-      </p:sp>
-      <p:sp>
-        <p:nvSpPr>
-          <p:cNvPr id="38" name="Freeform 5"/>
-          <p:cNvSpPr/>
-          <p:nvPr/>
-        </p:nvSpPr>
-        <p:spPr>
-          <a:xfrm>
-            <a:off x="-2813334" y="1252728"/>
-            <a:ext cx="7616557" cy="7815497"/>
-          </a:xfrm>
-          <a:custGeom>
-            <a:avLst/>
-            <a:gdLst/>
-            <a:ahLst/>
-            <a:cxnLst/>
-            <a:rect l="l" t="t" r="r" b="b"/>
-            <a:pathLst>
-              <a:path w="7616557" h="7815497">
-                <a:moveTo>
-                  <a:pt x="0" y="0"/>
-                </a:moveTo>
-                <a:lnTo>
-                  <a:pt x="7616556" y="0"/>
-                </a:lnTo>
-                <a:lnTo>
-                  <a:pt x="7616556" y="7815497"/>
-                </a:lnTo>
-                <a:lnTo>
-                  <a:pt x="0" y="7815497"/>
-                </a:lnTo>
-                <a:lnTo>
-                  <a:pt x="0" y="0"/>
-                </a:lnTo>
-                <a:close/>
-              </a:path>
-            </a:pathLst>
-          </a:custGeom>
-          <a:blipFill>
-            <a:blip r:embed="rId3">
-              <a:extLst>
-                <a:ext uri="{96DAC541-7B7A-43D3-8B79-37D633B846F1}">
-                  <asvg:svgBlip xmlns:asvg="http://schemas.microsoft.com/office/drawing/2016/SVG/main" xmlns="" r:embed="rId8"/>
-                </a:ext>
-              </a:extLst>
-            </a:blip>
-            <a:stretch>
-              <a:fillRect/>
-            </a:stretch>
-          </a:blipFill>
-        </p:spPr>
-      </p:sp>
-      <p:sp>
-        <p:nvSpPr>
-          <p:cNvPr id="6" name="Text 2"/>
-          <p:cNvSpPr/>
-          <p:nvPr/>
-        </p:nvSpPr>
-        <p:spPr>
-          <a:xfrm>
-            <a:off x="320040" y="262890"/>
-            <a:ext cx="8229600" cy="493776"/>
-          </a:xfrm>
-          <a:prstGeom prst="rect">
-            <a:avLst/>
-          </a:prstGeom>
-          <a:noFill/>
-          <a:ln/>
-        </p:spPr>
-        <p:txBody>
-          <a:bodyPr wrap="square" lIns="0" tIns="0" rIns="0" bIns="0" rtlCol="0" anchor="ctr"/>
-          <a:lstStyle/>
-          <a:p>
-            <a:pPr marL="0" indent="0">
-              <a:buNone/>
-            </a:pPr>
-            <a:r>
-              <a:rPr lang="en-US" sz="2600" b="1" dirty="0">
-                <a:solidFill>
-                  <a:srgbClr val="1A1A1A"/>
-                </a:solidFill>
-                <a:latin typeface="Arial Black" pitchFamily="34" charset="0"/>
-                <a:ea typeface="Arial Black" pitchFamily="34" charset="-122"/>
-                <a:cs typeface="Arial Black" pitchFamily="34" charset="-120"/>
-              </a:rPr>
-              <a:t>지표별 상세 분석</a:t>
-            </a:r>
-            <a:endParaRPr lang="en-US" sz="2600" dirty="0"/>
-          </a:p>
-        </p:txBody>
-      </p:sp>
-      <p:graphicFrame>
-        <p:nvGraphicFramePr>
-          <p:cNvPr id="7" name="Chart 0"/>
-          <p:cNvGraphicFramePr/>
-          <p:nvPr>
-            <p:extLst>
-              <p:ext uri="{D42A27DB-BD31-4B8C-83A1-F6EECF244321}">
-                <p14:modId xmlns:p14="http://schemas.microsoft.com/office/powerpoint/2010/main" val="4262387644"/>
-              </p:ext>
-            </p:extLst>
-          </p:nvPr>
-        </p:nvGraphicFramePr>
-        <p:xfrm>
-          <a:off x="320040" y="987552"/>
-          <a:ext cx="4754880" cy="3840480"/>
-        </p:xfrm>
-        <a:graphic>
-          <a:graphicData uri="http://schemas.openxmlformats.org/drawingml/2006/chart">
-            <c:chart xmlns:c="http://schemas.openxmlformats.org/drawingml/2006/chart" xmlns:r="http://schemas.openxmlformats.org/officeDocument/2006/relationships" r:id="rId9"/>
-          </a:graphicData>
-        </a:graphic>
-      </p:graphicFrame>
-      <p:sp>
-        <p:nvSpPr>
-          <p:cNvPr id="8" name="Shape 3"/>
-          <p:cNvSpPr/>
-          <p:nvPr/>
-        </p:nvSpPr>
-        <p:spPr>
-          <a:xfrm>
-            <a:off x="5212080" y="987552"/>
-            <a:ext cx="3657600" cy="877824"/>
-          </a:xfrm>
-          <a:prstGeom prst="rect">
-            <a:avLst/>
-          </a:prstGeom>
-          <a:solidFill>
-            <a:srgbClr val="FFFFFF"/>
-          </a:solidFill>
-          <a:ln w="12700">
-            <a:solidFill>
-              <a:srgbClr val="E2E8F0"/>
-            </a:solidFill>
-            <a:prstDash val="solid"/>
-          </a:ln>
-        </p:spPr>
-      </p:sp>
-      <p:sp>
-        <p:nvSpPr>
-          <p:cNvPr id="9" name="Shape 4"/>
-          <p:cNvSpPr/>
-          <p:nvPr/>
-        </p:nvSpPr>
-        <p:spPr>
-          <a:xfrm>
-            <a:off x="5212080" y="987552"/>
-            <a:ext cx="54864" cy="877824"/>
-          </a:xfrm>
-          <a:prstGeom prst="rect">
-            <a:avLst/>
-          </a:prstGeom>
-          <a:solidFill>
-            <a:srgbClr val="059669"/>
-          </a:solidFill>
-          <a:ln/>
-        </p:spPr>
-      </p:sp>
-      <p:sp>
-        <p:nvSpPr>
-          <p:cNvPr id="10" name="Text 5"/>
-          <p:cNvSpPr/>
-          <p:nvPr/>
-        </p:nvSpPr>
-        <p:spPr>
-          <a:xfrm>
-            <a:off x="5321808" y="1024128"/>
-            <a:ext cx="1188720" cy="457200"/>
-          </a:xfrm>
-          <a:prstGeom prst="rect">
-            <a:avLst/>
-          </a:prstGeom>
-          <a:noFill/>
-          <a:ln/>
-        </p:spPr>
-        <p:txBody>
-          <a:bodyPr wrap="square" lIns="0" tIns="0" rIns="0" bIns="0" rtlCol="0" anchor="ctr"/>
-          <a:lstStyle/>
-          <a:p>
-            <a:pPr marL="0" indent="0">
-              <a:buNone/>
-            </a:pPr>
-            <a:r>
-              <a:rPr lang="en-US" sz="2400" b="1" dirty="0">
-                <a:solidFill>
-                  <a:srgbClr val="059669"/>
-                </a:solidFill>
-                <a:latin typeface="Arial Black" pitchFamily="34" charset="0"/>
-                <a:ea typeface="Arial Black" pitchFamily="34" charset="-122"/>
-                <a:cs typeface="Arial Black" pitchFamily="34" charset="-120"/>
-              </a:rPr>
-              <a:t>0.884</a:t>
-            </a:r>
-            <a:endParaRPr lang="en-US" sz="2400" dirty="0"/>
-          </a:p>
-        </p:txBody>
-      </p:sp>
-      <p:sp>
-        <p:nvSpPr>
-          <p:cNvPr id="11" name="Text 6"/>
-          <p:cNvSpPr/>
-          <p:nvPr/>
-        </p:nvSpPr>
-        <p:spPr>
-          <a:xfrm>
-            <a:off x="6543018" y="1079122"/>
-            <a:ext cx="2103120" cy="237744"/>
-          </a:xfrm>
-          <a:prstGeom prst="rect">
-            <a:avLst/>
-          </a:prstGeom>
-          <a:noFill/>
-          <a:ln/>
-        </p:spPr>
-        <p:txBody>
-          <a:bodyPr wrap="square" lIns="0" tIns="0" rIns="0" bIns="0" rtlCol="0" anchor="ctr"/>
-          <a:lstStyle/>
-          <a:p>
-            <a:pPr marL="0" indent="0" algn="r">
-              <a:buNone/>
-            </a:pPr>
-            <a:r>
-              <a:rPr lang="en-US" sz="1100" b="1" dirty="0">
-                <a:solidFill>
-                  <a:srgbClr val="1A1A1A"/>
-                </a:solidFill>
-              </a:rPr>
-              <a:t>Faithfulness</a:t>
-            </a:r>
-            <a:endParaRPr lang="en-US" sz="1100" dirty="0"/>
-          </a:p>
-        </p:txBody>
-      </p:sp>
-      <p:sp>
-        <p:nvSpPr>
-          <p:cNvPr id="12" name="Shape 7"/>
-          <p:cNvSpPr/>
-          <p:nvPr/>
-        </p:nvSpPr>
-        <p:spPr>
-          <a:xfrm>
-            <a:off x="7917180" y="1565959"/>
-            <a:ext cx="841248" cy="219456"/>
-          </a:xfrm>
-          <a:prstGeom prst="rect">
-            <a:avLst/>
-          </a:prstGeom>
-          <a:solidFill>
-            <a:srgbClr val="DCFCE7"/>
-          </a:solidFill>
-          <a:ln w="12700">
-            <a:solidFill>
-              <a:srgbClr val="DCFCE7"/>
-            </a:solidFill>
-            <a:prstDash val="solid"/>
-          </a:ln>
-        </p:spPr>
-      </p:sp>
-      <p:sp>
-        <p:nvSpPr>
-          <p:cNvPr id="13" name="Text 8"/>
-          <p:cNvSpPr/>
-          <p:nvPr/>
-        </p:nvSpPr>
-        <p:spPr>
-          <a:xfrm>
-            <a:off x="7920196" y="1569201"/>
-            <a:ext cx="841248" cy="219456"/>
-          </a:xfrm>
-          <a:prstGeom prst="rect">
-            <a:avLst/>
-          </a:prstGeom>
-          <a:noFill/>
-          <a:ln/>
-        </p:spPr>
-        <p:txBody>
-          <a:bodyPr wrap="square" lIns="0" tIns="0" rIns="0" bIns="0" rtlCol="0" anchor="ctr"/>
-          <a:lstStyle/>
-          <a:p>
-            <a:pPr marL="0" indent="0" algn="ctr">
-              <a:buNone/>
-            </a:pPr>
-            <a:r>
-              <a:rPr lang="en-US" sz="800" b="1" dirty="0">
-                <a:solidFill>
-                  <a:srgbClr val="15803D"/>
-                </a:solidFill>
-              </a:rPr>
-              <a:t>★ 우수</a:t>
-            </a:r>
-            <a:endParaRPr lang="en-US" sz="800" dirty="0"/>
-          </a:p>
-        </p:txBody>
-      </p:sp>
-      <p:sp>
-        <p:nvSpPr>
-          <p:cNvPr id="14" name="Text 9"/>
-          <p:cNvSpPr/>
-          <p:nvPr/>
-        </p:nvSpPr>
-        <p:spPr>
-          <a:xfrm>
-            <a:off x="5321808" y="1499616"/>
-            <a:ext cx="3438144" cy="320040"/>
-          </a:xfrm>
-          <a:prstGeom prst="rect">
-            <a:avLst/>
-          </a:prstGeom>
-          <a:noFill/>
-          <a:ln/>
-        </p:spPr>
-        <p:txBody>
-          <a:bodyPr wrap="square" lIns="0" tIns="0" rIns="0" bIns="0" rtlCol="0" anchor="ctr"/>
-          <a:lstStyle/>
-          <a:p>
-            <a:pPr marL="0" indent="0">
-              <a:buNone/>
-            </a:pPr>
-            <a:r>
-              <a:rPr lang="en-US" sz="850" dirty="0">
-                <a:solidFill>
-                  <a:srgbClr val="2D2D2D"/>
-                </a:solidFill>
-              </a:rPr>
-              <a:t>Self-RAG Supportiveness 필터가</a:t>
-            </a:r>
-            <a:endParaRPr lang="en-US" sz="850" dirty="0"/>
-          </a:p>
-          <a:p>
-            <a:pPr marL="0" indent="0">
-              <a:buNone/>
-            </a:pPr>
-            <a:r>
-              <a:rPr lang="en-US" sz="850" dirty="0">
-                <a:solidFill>
-                  <a:srgbClr val="2D2D2D"/>
-                </a:solidFill>
-              </a:rPr>
-              <a:t>근거 없는 답변 제어</a:t>
-            </a:r>
-            <a:endParaRPr lang="en-US" sz="850" dirty="0"/>
-          </a:p>
-        </p:txBody>
-      </p:sp>
-      <p:sp>
-        <p:nvSpPr>
-          <p:cNvPr id="15" name="Shape 10"/>
-          <p:cNvSpPr/>
-          <p:nvPr/>
-        </p:nvSpPr>
-        <p:spPr>
-          <a:xfrm>
-            <a:off x="5212080" y="1938528"/>
-            <a:ext cx="3657600" cy="877824"/>
-          </a:xfrm>
-          <a:prstGeom prst="rect">
-            <a:avLst/>
-          </a:prstGeom>
-          <a:solidFill>
-            <a:srgbClr val="FFFFFF"/>
-          </a:solidFill>
-          <a:ln w="12700">
-            <a:solidFill>
-              <a:srgbClr val="E2E8F0"/>
-            </a:solidFill>
-            <a:prstDash val="solid"/>
-          </a:ln>
-        </p:spPr>
-      </p:sp>
-      <p:sp>
-        <p:nvSpPr>
-          <p:cNvPr id="16" name="Shape 11"/>
-          <p:cNvSpPr/>
-          <p:nvPr/>
-        </p:nvSpPr>
-        <p:spPr>
-          <a:xfrm>
-            <a:off x="5212080" y="1938528"/>
-            <a:ext cx="54864" cy="877824"/>
-          </a:xfrm>
-          <a:prstGeom prst="rect">
-            <a:avLst/>
-          </a:prstGeom>
-          <a:solidFill>
-            <a:srgbClr val="059669"/>
-          </a:solidFill>
-          <a:ln/>
-        </p:spPr>
-      </p:sp>
-      <p:sp>
-        <p:nvSpPr>
-          <p:cNvPr id="17" name="Text 12"/>
-          <p:cNvSpPr/>
-          <p:nvPr/>
-        </p:nvSpPr>
-        <p:spPr>
-          <a:xfrm>
-            <a:off x="5321808" y="1975104"/>
-            <a:ext cx="1188720" cy="457200"/>
-          </a:xfrm>
-          <a:prstGeom prst="rect">
-            <a:avLst/>
-          </a:prstGeom>
-          <a:noFill/>
-          <a:ln/>
-        </p:spPr>
-        <p:txBody>
-          <a:bodyPr wrap="square" lIns="0" tIns="0" rIns="0" bIns="0" rtlCol="0" anchor="ctr"/>
-          <a:lstStyle/>
-          <a:p>
-            <a:pPr marL="0" indent="0">
-              <a:buNone/>
-            </a:pPr>
-            <a:r>
-              <a:rPr lang="en-US" sz="2400" b="1" dirty="0">
-                <a:solidFill>
-                  <a:srgbClr val="059669"/>
-                </a:solidFill>
-                <a:latin typeface="Arial Black" pitchFamily="34" charset="0"/>
-                <a:ea typeface="Arial Black" pitchFamily="34" charset="-122"/>
-                <a:cs typeface="Arial Black" pitchFamily="34" charset="-120"/>
-              </a:rPr>
-              <a:t>0.872</a:t>
-            </a:r>
-            <a:endParaRPr lang="en-US" sz="2400" dirty="0"/>
-          </a:p>
-        </p:txBody>
-      </p:sp>
-      <p:sp>
-        <p:nvSpPr>
-          <p:cNvPr id="18" name="Text 13"/>
-          <p:cNvSpPr/>
-          <p:nvPr/>
-        </p:nvSpPr>
-        <p:spPr>
-          <a:xfrm>
-            <a:off x="6533096" y="2025299"/>
-            <a:ext cx="2103120" cy="237744"/>
-          </a:xfrm>
-          <a:prstGeom prst="rect">
-            <a:avLst/>
-          </a:prstGeom>
-          <a:noFill/>
-          <a:ln/>
-        </p:spPr>
-        <p:txBody>
-          <a:bodyPr wrap="square" lIns="0" tIns="0" rIns="0" bIns="0" rtlCol="0" anchor="ctr"/>
-          <a:lstStyle/>
-          <a:p>
-            <a:pPr marL="0" indent="0" algn="r">
-              <a:buNone/>
-            </a:pPr>
-            <a:r>
-              <a:rPr lang="en-US" sz="1100" b="1" dirty="0">
-                <a:solidFill>
-                  <a:srgbClr val="1A1A1A"/>
-                </a:solidFill>
-              </a:rPr>
-              <a:t>Ans. Relevancy</a:t>
-            </a:r>
-            <a:endParaRPr lang="en-US" sz="1100" dirty="0"/>
-          </a:p>
-        </p:txBody>
-      </p:sp>
-      <p:sp>
-        <p:nvSpPr>
-          <p:cNvPr id="19" name="Shape 14"/>
-          <p:cNvSpPr/>
-          <p:nvPr/>
-        </p:nvSpPr>
-        <p:spPr>
-          <a:xfrm>
-            <a:off x="7917180" y="2519983"/>
-            <a:ext cx="841248" cy="219456"/>
-          </a:xfrm>
-          <a:prstGeom prst="rect">
-            <a:avLst/>
-          </a:prstGeom>
-          <a:solidFill>
-            <a:srgbClr val="DCFCE7"/>
-          </a:solidFill>
-          <a:ln w="12700">
-            <a:solidFill>
-              <a:srgbClr val="DCFCE7"/>
-            </a:solidFill>
-            <a:prstDash val="solid"/>
-          </a:ln>
-        </p:spPr>
-      </p:sp>
-      <p:sp>
-        <p:nvSpPr>
-          <p:cNvPr id="20" name="Text 15"/>
-          <p:cNvSpPr/>
-          <p:nvPr/>
-        </p:nvSpPr>
-        <p:spPr>
-          <a:xfrm>
-            <a:off x="7920196" y="2510028"/>
-            <a:ext cx="841248" cy="219456"/>
-          </a:xfrm>
-          <a:prstGeom prst="rect">
-            <a:avLst/>
-          </a:prstGeom>
-          <a:noFill/>
-          <a:ln/>
-        </p:spPr>
-        <p:txBody>
-          <a:bodyPr wrap="square" lIns="0" tIns="0" rIns="0" bIns="0" rtlCol="0" anchor="ctr"/>
-          <a:lstStyle/>
-          <a:p>
-            <a:pPr marL="0" indent="0" algn="ctr">
-              <a:buNone/>
-            </a:pPr>
-            <a:r>
-              <a:rPr lang="en-US" sz="800" b="1" dirty="0">
-                <a:solidFill>
-                  <a:srgbClr val="15803D"/>
-                </a:solidFill>
-              </a:rPr>
-              <a:t>★ 우수</a:t>
-            </a:r>
-            <a:endParaRPr lang="en-US" sz="800" dirty="0"/>
-          </a:p>
-        </p:txBody>
-      </p:sp>
-      <p:sp>
-        <p:nvSpPr>
-          <p:cNvPr id="21" name="Text 16"/>
-          <p:cNvSpPr/>
-          <p:nvPr/>
-        </p:nvSpPr>
-        <p:spPr>
-          <a:xfrm>
-            <a:off x="5321808" y="2450592"/>
-            <a:ext cx="3438144" cy="320040"/>
-          </a:xfrm>
-          <a:prstGeom prst="rect">
-            <a:avLst/>
-          </a:prstGeom>
-          <a:noFill/>
-          <a:ln/>
-        </p:spPr>
-        <p:txBody>
-          <a:bodyPr wrap="square" lIns="0" tIns="0" rIns="0" bIns="0" rtlCol="0" anchor="ctr"/>
-          <a:lstStyle/>
-          <a:p>
-            <a:pPr marL="0" indent="0">
-              <a:buNone/>
-            </a:pPr>
-            <a:r>
-              <a:rPr lang="en-US" sz="850" dirty="0">
-                <a:solidFill>
-                  <a:srgbClr val="2D2D2D"/>
-                </a:solidFill>
-              </a:rPr>
-              <a:t>사건 유형 버튼 + 명확한</a:t>
-            </a:r>
-            <a:endParaRPr lang="en-US" sz="850" dirty="0"/>
-          </a:p>
-          <a:p>
-            <a:pPr marL="0" indent="0">
-              <a:buNone/>
-            </a:pPr>
-            <a:r>
-              <a:rPr lang="en-US" sz="850" dirty="0">
-                <a:solidFill>
-                  <a:srgbClr val="2D2D2D"/>
-                </a:solidFill>
-              </a:rPr>
-              <a:t>프롬프트 템플릿 효과</a:t>
-            </a:r>
-            <a:endParaRPr lang="en-US" sz="850" dirty="0"/>
-          </a:p>
-        </p:txBody>
-      </p:sp>
-      <p:sp>
-        <p:nvSpPr>
-          <p:cNvPr id="22" name="Shape 17"/>
-          <p:cNvSpPr/>
-          <p:nvPr/>
-        </p:nvSpPr>
-        <p:spPr>
-          <a:xfrm>
-            <a:off x="5212080" y="2889504"/>
-            <a:ext cx="3657600" cy="877824"/>
-          </a:xfrm>
-          <a:prstGeom prst="rect">
-            <a:avLst/>
-          </a:prstGeom>
-          <a:solidFill>
-            <a:srgbClr val="FFFFFF"/>
-          </a:solidFill>
-          <a:ln w="12700">
-            <a:solidFill>
-              <a:srgbClr val="E2E8F0"/>
-            </a:solidFill>
-            <a:prstDash val="solid"/>
-          </a:ln>
-        </p:spPr>
-      </p:sp>
-      <p:sp>
-        <p:nvSpPr>
-          <p:cNvPr id="23" name="Shape 18"/>
-          <p:cNvSpPr/>
-          <p:nvPr/>
-        </p:nvSpPr>
-        <p:spPr>
-          <a:xfrm>
-            <a:off x="5212080" y="2889504"/>
-            <a:ext cx="54864" cy="877824"/>
-          </a:xfrm>
-          <a:prstGeom prst="rect">
-            <a:avLst/>
-          </a:prstGeom>
-          <a:solidFill>
-            <a:schemeClr val="accent2">
-              <a:lumMod val="75000"/>
-            </a:schemeClr>
-          </a:solidFill>
-          <a:ln>
-            <a:solidFill>
-              <a:schemeClr val="accent2">
-                <a:lumMod val="75000"/>
-              </a:schemeClr>
-            </a:solidFill>
-          </a:ln>
-        </p:spPr>
-      </p:sp>
-      <p:sp>
-        <p:nvSpPr>
-          <p:cNvPr id="24" name="Text 19"/>
-          <p:cNvSpPr/>
-          <p:nvPr/>
-        </p:nvSpPr>
-        <p:spPr>
-          <a:xfrm>
-            <a:off x="5321808" y="2926080"/>
-            <a:ext cx="1188720" cy="457200"/>
-          </a:xfrm>
-          <a:prstGeom prst="rect">
-            <a:avLst/>
-          </a:prstGeom>
-          <a:noFill/>
-          <a:ln/>
-        </p:spPr>
-        <p:txBody>
-          <a:bodyPr wrap="square" lIns="0" tIns="0" rIns="0" bIns="0" rtlCol="0" anchor="ctr"/>
-          <a:lstStyle/>
-          <a:p>
-            <a:pPr marL="0" indent="0">
-              <a:buNone/>
-            </a:pPr>
-            <a:r>
-              <a:rPr lang="en-US" sz="2400" b="1" dirty="0">
-                <a:solidFill>
-                  <a:schemeClr val="accent2">
-                    <a:lumMod val="75000"/>
-                  </a:schemeClr>
-                </a:solidFill>
-                <a:latin typeface="Arial Black" pitchFamily="34" charset="0"/>
-                <a:ea typeface="Arial Black" pitchFamily="34" charset="-122"/>
-                <a:cs typeface="Arial Black" pitchFamily="34" charset="-120"/>
-              </a:rPr>
-              <a:t>0.774</a:t>
-            </a:r>
-            <a:endParaRPr lang="en-US" sz="2400" dirty="0">
-              <a:solidFill>
-                <a:schemeClr val="accent2">
-                  <a:lumMod val="75000"/>
-                </a:schemeClr>
-              </a:solidFill>
-            </a:endParaRPr>
-          </a:p>
-        </p:txBody>
-      </p:sp>
-      <p:sp>
-        <p:nvSpPr>
-          <p:cNvPr id="25" name="Text 20"/>
-          <p:cNvSpPr/>
-          <p:nvPr/>
-        </p:nvSpPr>
-        <p:spPr>
-          <a:xfrm>
-            <a:off x="7554176" y="2978404"/>
-            <a:ext cx="1082040" cy="237744"/>
-          </a:xfrm>
-          <a:prstGeom prst="rect">
-            <a:avLst/>
-          </a:prstGeom>
-          <a:noFill/>
-          <a:ln/>
-        </p:spPr>
-        <p:txBody>
-          <a:bodyPr wrap="square" lIns="0" tIns="0" rIns="0" bIns="0" rtlCol="0" anchor="ctr"/>
-          <a:lstStyle/>
-          <a:p>
-            <a:pPr marL="0" indent="0" algn="r">
-              <a:buNone/>
-            </a:pPr>
-            <a:r>
-              <a:rPr lang="en-US" sz="1100" b="1" dirty="0">
-                <a:solidFill>
-                  <a:srgbClr val="1A1A1A"/>
-                </a:solidFill>
-              </a:rPr>
-              <a:t>Ctx. Precision</a:t>
-            </a:r>
-            <a:endParaRPr lang="en-US" sz="1100" dirty="0"/>
-          </a:p>
-        </p:txBody>
-      </p:sp>
-      <p:sp>
-        <p:nvSpPr>
-          <p:cNvPr id="26" name="Shape 21"/>
-          <p:cNvSpPr/>
-          <p:nvPr/>
-        </p:nvSpPr>
-        <p:spPr>
-          <a:xfrm>
-            <a:off x="7918704" y="3472180"/>
-            <a:ext cx="841248" cy="219456"/>
-          </a:xfrm>
-          <a:prstGeom prst="rect">
-            <a:avLst/>
-          </a:prstGeom>
-          <a:solidFill>
-            <a:srgbClr val="FEF3C7"/>
-          </a:solidFill>
-          <a:ln w="12700">
-            <a:solidFill>
-              <a:srgbClr val="FEF3C7"/>
-            </a:solidFill>
-            <a:prstDash val="solid"/>
-          </a:ln>
-        </p:spPr>
-      </p:sp>
-      <p:sp>
-        <p:nvSpPr>
-          <p:cNvPr id="27" name="Text 22"/>
-          <p:cNvSpPr/>
-          <p:nvPr/>
-        </p:nvSpPr>
-        <p:spPr>
-          <a:xfrm>
-            <a:off x="7917942" y="3472180"/>
-            <a:ext cx="841248" cy="219456"/>
-          </a:xfrm>
-          <a:prstGeom prst="rect">
-            <a:avLst/>
-          </a:prstGeom>
-          <a:noFill/>
-          <a:ln/>
-        </p:spPr>
-        <p:txBody>
-          <a:bodyPr wrap="square" lIns="0" tIns="0" rIns="0" bIns="0" rtlCol="0" anchor="ctr"/>
-          <a:lstStyle/>
-          <a:p>
-            <a:pPr marL="0" indent="0" algn="ctr">
-              <a:buNone/>
-            </a:pPr>
-            <a:r>
-              <a:rPr lang="en-US" sz="800" b="1" dirty="0">
-                <a:solidFill>
-                  <a:srgbClr val="92400E"/>
-                </a:solidFill>
-              </a:rPr>
-              <a:t>△ 개선여지</a:t>
-            </a:r>
-            <a:endParaRPr lang="en-US" sz="800" dirty="0"/>
-          </a:p>
-        </p:txBody>
-      </p:sp>
-      <p:sp>
-        <p:nvSpPr>
-          <p:cNvPr id="28" name="Text 23"/>
-          <p:cNvSpPr/>
-          <p:nvPr/>
-        </p:nvSpPr>
-        <p:spPr>
-          <a:xfrm>
-            <a:off x="5321808" y="3401568"/>
-            <a:ext cx="3438144" cy="320040"/>
-          </a:xfrm>
-          <a:prstGeom prst="rect">
-            <a:avLst/>
-          </a:prstGeom>
-          <a:noFill/>
-          <a:ln/>
-        </p:spPr>
-        <p:txBody>
-          <a:bodyPr wrap="square" lIns="0" tIns="0" rIns="0" bIns="0" rtlCol="0" anchor="ctr"/>
-          <a:lstStyle/>
-          <a:p>
-            <a:pPr marL="0" indent="0">
-              <a:buNone/>
-            </a:pPr>
-            <a:r>
-              <a:rPr lang="en-US" sz="850" dirty="0">
-                <a:solidFill>
-                  <a:srgbClr val="2D2D2D"/>
-                </a:solidFill>
-              </a:rPr>
-              <a:t>Top-K=4 시 무관 청크 포함</a:t>
-            </a:r>
-            <a:endParaRPr lang="en-US" sz="850" dirty="0"/>
-          </a:p>
-          <a:p>
-            <a:pPr marL="0" indent="0">
-              <a:buNone/>
-            </a:pPr>
-            <a:r>
-              <a:rPr lang="en-US" sz="850" dirty="0">
-                <a:solidFill>
-                  <a:srgbClr val="2D2D2D"/>
-                </a:solidFill>
-              </a:rPr>
-              <a:t>→ chunk 300/K=3 조정 시 +0.05</a:t>
-            </a:r>
-            <a:endParaRPr lang="en-US" sz="850" dirty="0"/>
-          </a:p>
-        </p:txBody>
-      </p:sp>
-      <p:sp>
-        <p:nvSpPr>
-          <p:cNvPr id="29" name="Shape 24"/>
-          <p:cNvSpPr/>
-          <p:nvPr/>
-        </p:nvSpPr>
-        <p:spPr>
-          <a:xfrm>
-            <a:off x="5212080" y="3840480"/>
-            <a:ext cx="3657600" cy="877824"/>
-          </a:xfrm>
-          <a:prstGeom prst="rect">
-            <a:avLst/>
-          </a:prstGeom>
-          <a:solidFill>
-            <a:srgbClr val="FFFFFF"/>
-          </a:solidFill>
-          <a:ln w="12700">
-            <a:solidFill>
-              <a:srgbClr val="E2E8F0"/>
-            </a:solidFill>
-            <a:prstDash val="solid"/>
-          </a:ln>
-        </p:spPr>
-      </p:sp>
-      <p:sp>
-        <p:nvSpPr>
-          <p:cNvPr id="30" name="Shape 25"/>
-          <p:cNvSpPr/>
-          <p:nvPr/>
-        </p:nvSpPr>
-        <p:spPr>
-          <a:xfrm>
-            <a:off x="5212080" y="3840480"/>
-            <a:ext cx="54864" cy="877824"/>
-          </a:xfrm>
-          <a:prstGeom prst="rect">
-            <a:avLst/>
-          </a:prstGeom>
-          <a:solidFill>
-            <a:srgbClr val="059669"/>
-          </a:solidFill>
-          <a:ln>
-            <a:solidFill>
-              <a:srgbClr val="059669"/>
-            </a:solidFill>
-          </a:ln>
-        </p:spPr>
-      </p:sp>
-      <p:sp>
-        <p:nvSpPr>
-          <p:cNvPr id="31" name="Text 26"/>
-          <p:cNvSpPr/>
-          <p:nvPr/>
-        </p:nvSpPr>
-        <p:spPr>
-          <a:xfrm>
-            <a:off x="5321808" y="3877056"/>
-            <a:ext cx="1188720" cy="457200"/>
-          </a:xfrm>
-          <a:prstGeom prst="rect">
-            <a:avLst/>
-          </a:prstGeom>
-          <a:noFill/>
-          <a:ln/>
-        </p:spPr>
-        <p:txBody>
-          <a:bodyPr wrap="square" lIns="0" tIns="0" rIns="0" bIns="0" rtlCol="0" anchor="ctr"/>
-          <a:lstStyle/>
-          <a:p>
-            <a:pPr marL="0" indent="0">
-              <a:buNone/>
-            </a:pPr>
-            <a:r>
-              <a:rPr lang="en-US" sz="2400" b="1" dirty="0">
-                <a:solidFill>
-                  <a:srgbClr val="059669"/>
-                </a:solidFill>
-                <a:latin typeface="Arial Black" pitchFamily="34" charset="0"/>
-                <a:ea typeface="Arial Black" pitchFamily="34" charset="-122"/>
-                <a:cs typeface="Arial Black" pitchFamily="34" charset="-120"/>
-              </a:rPr>
-              <a:t>0.823</a:t>
-            </a:r>
-            <a:endParaRPr lang="en-US" sz="2400" dirty="0">
-              <a:solidFill>
-                <a:srgbClr val="059669"/>
-              </a:solidFill>
-            </a:endParaRPr>
-          </a:p>
-        </p:txBody>
-      </p:sp>
-      <p:sp>
-        <p:nvSpPr>
-          <p:cNvPr id="32" name="Text 27"/>
-          <p:cNvSpPr/>
-          <p:nvPr/>
-        </p:nvSpPr>
-        <p:spPr>
-          <a:xfrm>
-            <a:off x="7467092" y="3931920"/>
-            <a:ext cx="1173988" cy="237744"/>
-          </a:xfrm>
-          <a:prstGeom prst="rect">
-            <a:avLst/>
-          </a:prstGeom>
-          <a:noFill/>
-          <a:ln/>
-        </p:spPr>
-        <p:txBody>
-          <a:bodyPr wrap="square" lIns="0" tIns="0" rIns="0" bIns="0" rtlCol="0" anchor="ctr"/>
-          <a:lstStyle/>
-          <a:p>
-            <a:pPr marL="0" indent="0" algn="r">
-              <a:buNone/>
-            </a:pPr>
-            <a:r>
-              <a:rPr lang="en-US" sz="1100" b="1" dirty="0">
-                <a:solidFill>
-                  <a:srgbClr val="1A1A1A"/>
-                </a:solidFill>
-              </a:rPr>
-              <a:t>Ctx. Recall</a:t>
-            </a:r>
-            <a:endParaRPr lang="en-US" sz="1100" dirty="0"/>
-          </a:p>
-        </p:txBody>
-      </p:sp>
-      <p:sp>
-        <p:nvSpPr>
-          <p:cNvPr id="33" name="Shape 28"/>
-          <p:cNvSpPr/>
-          <p:nvPr/>
-        </p:nvSpPr>
-        <p:spPr>
-          <a:xfrm>
-            <a:off x="7917942" y="4422778"/>
-            <a:ext cx="841248" cy="219456"/>
-          </a:xfrm>
-          <a:prstGeom prst="rect">
-            <a:avLst/>
-          </a:prstGeom>
-          <a:solidFill>
-            <a:srgbClr val="DBEAFE"/>
-          </a:solidFill>
-          <a:ln w="12700">
-            <a:solidFill>
-              <a:srgbClr val="DBEAFE"/>
-            </a:solidFill>
-            <a:prstDash val="solid"/>
-          </a:ln>
-        </p:spPr>
-      </p:sp>
-      <p:sp>
-        <p:nvSpPr>
-          <p:cNvPr id="34" name="Text 29"/>
-          <p:cNvSpPr/>
-          <p:nvPr/>
-        </p:nvSpPr>
-        <p:spPr>
-          <a:xfrm>
-            <a:off x="7917180" y="4422778"/>
-            <a:ext cx="841248" cy="219456"/>
-          </a:xfrm>
-          <a:prstGeom prst="rect">
-            <a:avLst/>
-          </a:prstGeom>
-          <a:noFill/>
-          <a:ln/>
-        </p:spPr>
-        <p:txBody>
-          <a:bodyPr wrap="square" lIns="0" tIns="0" rIns="0" bIns="0" rtlCol="0" anchor="ctr"/>
-          <a:lstStyle/>
-          <a:p>
-            <a:pPr marL="0" indent="0" algn="ctr">
-              <a:buNone/>
-            </a:pPr>
-            <a:r>
-              <a:rPr lang="en-US" sz="800" b="1" dirty="0">
-                <a:solidFill>
-                  <a:srgbClr val="1E40AF"/>
-                </a:solidFill>
-              </a:rPr>
-              <a:t>○ 양호</a:t>
-            </a:r>
-            <a:endParaRPr lang="en-US" sz="800" dirty="0"/>
-          </a:p>
-        </p:txBody>
-      </p:sp>
-      <p:sp>
-        <p:nvSpPr>
-          <p:cNvPr id="35" name="Text 30"/>
-          <p:cNvSpPr/>
-          <p:nvPr/>
-        </p:nvSpPr>
-        <p:spPr>
-          <a:xfrm>
-            <a:off x="5321808" y="4352544"/>
-            <a:ext cx="3438144" cy="320040"/>
-          </a:xfrm>
-          <a:prstGeom prst="rect">
-            <a:avLst/>
-          </a:prstGeom>
-          <a:noFill/>
-          <a:ln/>
-        </p:spPr>
-        <p:txBody>
-          <a:bodyPr wrap="square" lIns="0" tIns="0" rIns="0" bIns="0" rtlCol="0" anchor="ctr"/>
-          <a:lstStyle/>
-          <a:p>
-            <a:pPr marL="0" indent="0">
-              <a:buNone/>
-            </a:pPr>
-            <a:r>
-              <a:rPr lang="en-US" sz="850" dirty="0">
-                <a:solidFill>
-                  <a:srgbClr val="2D2D2D"/>
-                </a:solidFill>
-              </a:rPr>
-              <a:t>청크 오버랩(80) 적용으로</a:t>
-            </a:r>
-            <a:endParaRPr lang="en-US" sz="850" dirty="0"/>
-          </a:p>
-          <a:p>
-            <a:pPr marL="0" indent="0">
-              <a:buNone/>
-            </a:pPr>
-            <a:r>
-              <a:rPr lang="en-US" sz="850" dirty="0">
-                <a:solidFill>
-                  <a:srgbClr val="2D2D2D"/>
-                </a:solidFill>
-              </a:rPr>
-              <a:t>필요 정보 대부분 포함</a:t>
-            </a:r>
-            <a:endParaRPr lang="en-US" sz="850" dirty="0"/>
-          </a:p>
-        </p:txBody>
-      </p:sp>
-      <p:sp>
-        <p:nvSpPr>
-          <p:cNvPr id="36" name="Shape 31"/>
-          <p:cNvSpPr/>
-          <p:nvPr/>
-        </p:nvSpPr>
-        <p:spPr>
-          <a:xfrm>
-            <a:off x="5212080" y="4791456"/>
-            <a:ext cx="3657600" cy="274320"/>
-          </a:xfrm>
-          <a:prstGeom prst="rect">
-            <a:avLst/>
-          </a:prstGeom>
-          <a:solidFill>
-            <a:schemeClr val="bg1">
-              <a:lumMod val="85000"/>
-            </a:schemeClr>
-          </a:solidFill>
-          <a:ln w="12700">
-            <a:solidFill>
-              <a:schemeClr val="tx1"/>
-            </a:solidFill>
-            <a:prstDash val="solid"/>
-          </a:ln>
-        </p:spPr>
-      </p:sp>
-      <p:sp>
-        <p:nvSpPr>
-          <p:cNvPr id="37" name="Text 32"/>
-          <p:cNvSpPr/>
-          <p:nvPr/>
-        </p:nvSpPr>
-        <p:spPr>
-          <a:xfrm>
-            <a:off x="5321808" y="4809744"/>
-            <a:ext cx="3474720" cy="237744"/>
-          </a:xfrm>
-          <a:prstGeom prst="rect">
-            <a:avLst/>
-          </a:prstGeom>
-          <a:noFill/>
-          <a:ln/>
-        </p:spPr>
-        <p:txBody>
-          <a:bodyPr wrap="square" lIns="0" tIns="0" rIns="0" bIns="0" rtlCol="0" anchor="ctr"/>
-          <a:lstStyle/>
-          <a:p>
-            <a:pPr marL="0" indent="0">
-              <a:buNone/>
-            </a:pPr>
-            <a:r>
-              <a:rPr lang="en-US" sz="850" dirty="0"/>
-              <a:t>개선 목표 → Ctx.Precision: 0.83+  /  Ctx.Recall: 0.88+  /  전체 평균 0.85+</a:t>
-            </a:r>
-          </a:p>
-        </p:txBody>
-      </p:sp>
     </p:spTree>
   </p:cSld>
   <p:clrMapOvr>

--- a/doc/최종발표/최종발표.pptx
+++ b/doc/최종발표/최종발표.pptx
@@ -2188,7 +2188,7 @@
             <a:blip r:embed="rId3">
               <a:extLst>
                 <a:ext uri="{96DAC541-7B7A-43D3-8B79-37D633B846F1}">
-                  <asvg:svgBlip xmlns="" xmlns:asvg="http://schemas.microsoft.com/office/drawing/2016/SVG/main" r:embed="rId4"/>
+                  <asvg:svgBlip xmlns:asvg="http://schemas.microsoft.com/office/drawing/2016/SVG/main" xmlns="" r:embed="rId4"/>
                 </a:ext>
               </a:extLst>
             </a:blip>
@@ -2240,7 +2240,7 @@
             <a:blip r:embed="rId3">
               <a:extLst>
                 <a:ext uri="{96DAC541-7B7A-43D3-8B79-37D633B846F1}">
-                  <asvg:svgBlip xmlns="" xmlns:asvg="http://schemas.microsoft.com/office/drawing/2016/SVG/main" r:embed="rId4"/>
+                  <asvg:svgBlip xmlns:asvg="http://schemas.microsoft.com/office/drawing/2016/SVG/main" xmlns="" r:embed="rId4"/>
                 </a:ext>
               </a:extLst>
             </a:blip>
@@ -2332,7 +2332,7 @@
             <a:blip r:embed="rId3">
               <a:extLst>
                 <a:ext uri="{96DAC541-7B7A-43D3-8B79-37D633B846F1}">
-                  <asvg:svgBlip xmlns="" xmlns:asvg="http://schemas.microsoft.com/office/drawing/2016/SVG/main" r:embed="rId8"/>
+                  <asvg:svgBlip xmlns:asvg="http://schemas.microsoft.com/office/drawing/2016/SVG/main" xmlns="" r:embed="rId8"/>
                 </a:ext>
               </a:extLst>
             </a:blip>
@@ -2384,7 +2384,7 @@
             <a:blip r:embed="rId3">
               <a:extLst>
                 <a:ext uri="{96DAC541-7B7A-43D3-8B79-37D633B846F1}">
-                  <asvg:svgBlip xmlns="" xmlns:asvg="http://schemas.microsoft.com/office/drawing/2016/SVG/main" r:embed="rId8"/>
+                  <asvg:svgBlip xmlns:asvg="http://schemas.microsoft.com/office/drawing/2016/SVG/main" xmlns="" r:embed="rId8"/>
                 </a:ext>
               </a:extLst>
             </a:blip>
@@ -3543,7 +3543,7 @@
             <a:blip r:embed="rId3">
               <a:extLst>
                 <a:ext uri="{96DAC541-7B7A-43D3-8B79-37D633B846F1}">
-                  <asvg:svgBlip xmlns="" xmlns:asvg="http://schemas.microsoft.com/office/drawing/2016/SVG/main" r:embed="rId4"/>
+                  <asvg:svgBlip xmlns:asvg="http://schemas.microsoft.com/office/drawing/2016/SVG/main" xmlns="" r:embed="rId4"/>
                 </a:ext>
               </a:extLst>
             </a:blip>
@@ -4680,7 +4680,7 @@
             <a:blip r:embed="rId3">
               <a:extLst>
                 <a:ext uri="{96DAC541-7B7A-43D3-8B79-37D633B846F1}">
-                  <asvg:svgBlip xmlns="" xmlns:asvg="http://schemas.microsoft.com/office/drawing/2016/SVG/main" r:embed="rId4"/>
+                  <asvg:svgBlip xmlns:asvg="http://schemas.microsoft.com/office/drawing/2016/SVG/main" xmlns="" r:embed="rId4"/>
                 </a:ext>
               </a:extLst>
             </a:blip>
@@ -4776,7 +4776,7 @@
             <a:blip r:embed="rId5">
               <a:extLst>
                 <a:ext uri="{96DAC541-7B7A-43D3-8B79-37D633B846F1}">
-                  <asvg:svgBlip xmlns="" xmlns:asvg="http://schemas.microsoft.com/office/drawing/2016/SVG/main" r:embed="rId6"/>
+                  <asvg:svgBlip xmlns:asvg="http://schemas.microsoft.com/office/drawing/2016/SVG/main" xmlns="" r:embed="rId6"/>
                 </a:ext>
               </a:extLst>
             </a:blip>
@@ -4785,6 +4785,41 @@
             </a:stretch>
           </a:blipFill>
         </p:spPr>
+      </p:sp>
+      <p:sp>
+        <p:nvSpPr>
+          <p:cNvPr id="6" name="TextBox 5"/>
+          <p:cNvSpPr txBox="1"/>
+          <p:nvPr/>
+        </p:nvSpPr>
+        <p:spPr>
+          <a:xfrm>
+            <a:off x="1791623" y="4071432"/>
+            <a:ext cx="5560753" cy="369332"/>
+          </a:xfrm>
+          <a:prstGeom prst="rect">
+            <a:avLst/>
+          </a:prstGeom>
+          <a:noFill/>
+        </p:spPr>
+        <p:txBody>
+          <a:bodyPr wrap="none" rtlCol="0">
+            <a:spAutoFit/>
+          </a:bodyPr>
+          <a:lstStyle/>
+          <a:p>
+            <a:pPr algn="ctr"/>
+            <a:r>
+              <a:rPr lang="en-US" altLang="ko-KR" dirty="0" smtClean="0"/>
+              <a:t>https</a:t>
+            </a:r>
+            <a:r>
+              <a:rPr lang="en-US" altLang="ko-KR" dirty="0"/>
+              <a:t>://github.com/kangwoohyun999/AI_Service_Project</a:t>
+            </a:r>
+            <a:endParaRPr lang="ko-KR" altLang="en-US" dirty="0"/>
+          </a:p>
+        </p:txBody>
       </p:sp>
     </p:spTree>
     <p:extLst>
@@ -5523,7 +5558,7 @@
             <a:blip r:embed="rId3">
               <a:extLst>
                 <a:ext uri="{96DAC541-7B7A-43D3-8B79-37D633B846F1}">
-                  <asvg:svgBlip xmlns="" xmlns:asvg="http://schemas.microsoft.com/office/drawing/2016/SVG/main" r:embed="rId4"/>
+                  <asvg:svgBlip xmlns:asvg="http://schemas.microsoft.com/office/drawing/2016/SVG/main" xmlns="" r:embed="rId4"/>
                 </a:ext>
               </a:extLst>
             </a:blip>
@@ -5575,7 +5610,7 @@
             <a:blip r:embed="rId5">
               <a:extLst>
                 <a:ext uri="{96DAC541-7B7A-43D3-8B79-37D633B846F1}">
-                  <asvg:svgBlip xmlns="" xmlns:asvg="http://schemas.microsoft.com/office/drawing/2016/SVG/main" r:embed="rId6"/>
+                  <asvg:svgBlip xmlns:asvg="http://schemas.microsoft.com/office/drawing/2016/SVG/main" xmlns="" r:embed="rId6"/>
                 </a:ext>
               </a:extLst>
             </a:blip>
@@ -6022,7 +6057,7 @@
             <a:blip r:embed="rId4">
               <a:extLst>
                 <a:ext uri="{96DAC541-7B7A-43D3-8B79-37D633B846F1}">
-                  <asvg:svgBlip xmlns="" xmlns:asvg="http://schemas.microsoft.com/office/drawing/2016/SVG/main" r:embed="rId7"/>
+                  <asvg:svgBlip xmlns:asvg="http://schemas.microsoft.com/office/drawing/2016/SVG/main" xmlns="" r:embed="rId7"/>
                 </a:ext>
               </a:extLst>
             </a:blip>
@@ -6114,7 +6149,7 @@
             <a:blip r:embed="rId3">
               <a:extLst>
                 <a:ext uri="{96DAC541-7B7A-43D3-8B79-37D633B846F1}">
-                  <asvg:svgBlip xmlns="" xmlns:asvg="http://schemas.microsoft.com/office/drawing/2016/SVG/main" r:embed="rId4"/>
+                  <asvg:svgBlip xmlns:asvg="http://schemas.microsoft.com/office/drawing/2016/SVG/main" xmlns="" r:embed="rId4"/>
                 </a:ext>
               </a:extLst>
             </a:blip>
@@ -6166,7 +6201,7 @@
             <a:blip r:embed="rId3">
               <a:extLst>
                 <a:ext uri="{96DAC541-7B7A-43D3-8B79-37D633B846F1}">
-                  <asvg:svgBlip xmlns="" xmlns:asvg="http://schemas.microsoft.com/office/drawing/2016/SVG/main" r:embed="rId4"/>
+                  <asvg:svgBlip xmlns:asvg="http://schemas.microsoft.com/office/drawing/2016/SVG/main" xmlns="" r:embed="rId4"/>
                 </a:ext>
               </a:extLst>
             </a:blip>
@@ -8195,7 +8230,7 @@
             <a:blip r:embed="rId3">
               <a:extLst>
                 <a:ext uri="{96DAC541-7B7A-43D3-8B79-37D633B846F1}">
-                  <asvg:svgBlip xmlns="" xmlns:asvg="http://schemas.microsoft.com/office/drawing/2016/SVG/main" r:embed="rId4"/>
+                  <asvg:svgBlip xmlns:asvg="http://schemas.microsoft.com/office/drawing/2016/SVG/main" xmlns="" r:embed="rId4"/>
                 </a:ext>
               </a:extLst>
             </a:blip>
@@ -9656,7 +9691,7 @@
             <a:blip r:embed="rId3">
               <a:extLst>
                 <a:ext uri="{96DAC541-7B7A-43D3-8B79-37D633B846F1}">
-                  <asvg:svgBlip xmlns="" xmlns:asvg="http://schemas.microsoft.com/office/drawing/2016/SVG/main" r:embed="rId8"/>
+                  <asvg:svgBlip xmlns:asvg="http://schemas.microsoft.com/office/drawing/2016/SVG/main" xmlns="" r:embed="rId8"/>
                 </a:ext>
               </a:extLst>
             </a:blip>
@@ -10747,7 +10782,7 @@
             <a:blip r:embed="rId3">
               <a:extLst>
                 <a:ext uri="{96DAC541-7B7A-43D3-8B79-37D633B846F1}">
-                  <asvg:svgBlip xmlns="" xmlns:asvg="http://schemas.microsoft.com/office/drawing/2016/SVG/main" r:embed="rId8"/>
+                  <asvg:svgBlip xmlns:asvg="http://schemas.microsoft.com/office/drawing/2016/SVG/main" xmlns="" r:embed="rId8"/>
                 </a:ext>
               </a:extLst>
             </a:blip>
@@ -10949,7 +10984,7 @@
             <a:blip r:embed="rId3">
               <a:extLst>
                 <a:ext uri="{96DAC541-7B7A-43D3-8B79-37D633B846F1}">
-                  <asvg:svgBlip xmlns="" xmlns:asvg="http://schemas.microsoft.com/office/drawing/2016/SVG/main" r:embed="rId8"/>
+                  <asvg:svgBlip xmlns:asvg="http://schemas.microsoft.com/office/drawing/2016/SVG/main" xmlns="" r:embed="rId8"/>
                 </a:ext>
               </a:extLst>
             </a:blip>
@@ -11001,7 +11036,7 @@
             <a:blip r:embed="rId3">
               <a:extLst>
                 <a:ext uri="{96DAC541-7B7A-43D3-8B79-37D633B846F1}">
-                  <asvg:svgBlip xmlns="" xmlns:asvg="http://schemas.microsoft.com/office/drawing/2016/SVG/main" r:embed="rId8"/>
+                  <asvg:svgBlip xmlns:asvg="http://schemas.microsoft.com/office/drawing/2016/SVG/main" xmlns="" r:embed="rId8"/>
                 </a:ext>
               </a:extLst>
             </a:blip>
@@ -12414,7 +12449,7 @@
             <a:blip r:embed="rId3">
               <a:extLst>
                 <a:ext uri="{96DAC541-7B7A-43D3-8B79-37D633B846F1}">
-                  <asvg:svgBlip xmlns="" xmlns:asvg="http://schemas.microsoft.com/office/drawing/2016/SVG/main" r:embed="rId8"/>
+                  <asvg:svgBlip xmlns:asvg="http://schemas.microsoft.com/office/drawing/2016/SVG/main" xmlns="" r:embed="rId8"/>
                 </a:ext>
               </a:extLst>
             </a:blip>
@@ -12466,7 +12501,7 @@
             <a:blip r:embed="rId3">
               <a:extLst>
                 <a:ext uri="{96DAC541-7B7A-43D3-8B79-37D633B846F1}">
-                  <asvg:svgBlip xmlns="" xmlns:asvg="http://schemas.microsoft.com/office/drawing/2016/SVG/main" r:embed="rId8"/>
+                  <asvg:svgBlip xmlns:asvg="http://schemas.microsoft.com/office/drawing/2016/SVG/main" xmlns="" r:embed="rId8"/>
                 </a:ext>
               </a:extLst>
             </a:blip>
